--- a/why-llms-love-tailwind.pptx
+++ b/why-llms-love-tailwind.pptx
@@ -311,7 +311,7 @@
           <a:p>
             <a:r>
               <a:rPr lang="en-US" dirty="0"/>
-              <a:t>Opener — keep the joke tradition. Deliver the setup, pause, let them think. This is a callback to my CSS/position:absolute joke from past talks. The lightbulb version sets up the whole talk: the cascade.</a:t>
+              <a:t>Opener. Read the setup: how many CSS developers to change a lightbulb? Pause. Let them think. Callback to the position:absolute joke if this room knows it. The cascade punchline is next slide.</a:t>
             </a:r>
           </a:p>
         </p:txBody>
@@ -398,7 +398,7 @@
           <a:p>
             <a:r>
               <a:rPr lang="en-US" dirty="0"/>
-              <a:t>Separation of concerns sounds virtuous, but for a component it's separation of CONTEXT. Reference the 'Locality of Behaviour' idea (Carson Gross). The class name is a pointer; you have to dereference it in another file. Every dereference is a chance to be wrong.</a:t>
+              <a:t>Friction 3: separation of concerns became separation of context. Land the slide: two files joined only by a magic string; you must hold both in your head, and so must the model. Class name is a pointer into another file. Optional: Locality of Behaviour (Carson Gross / htmx essay).</a:t>
             </a:r>
           </a:p>
         </p:txBody>
@@ -485,7 +485,7 @@
           <a:p>
             <a:r>
               <a:rPr lang="en-US" dirty="0"/>
-              <a:t>Here's the fix. The markup and the styling are the same artifact. Nothing to name, nothing to look up, nothing that can break from a distance. This is the pivot from problem to why-it-works.</a:t>
+              <a:t>The fix is co-location. Land the slide: markup and style live in one place; an LLM sees the entire spec in one span of tokens. Point at the PricingCard snippet: no CSS file, no invented class names, no cascade. Pivot from problem to why it works.</a:t>
             </a:r>
           </a:p>
         </p:txBody>
@@ -572,7 +572,7 @@
           <a:p>
             <a:r>
               <a:rPr lang="en-US" dirty="0"/>
-              <a:t>DEMO 1. Open the demo repo (App.tsx). Show both cards side by side — pixel identical. Click 'Show source': semantic = 2 files + 11 invented names + a cascade; Tailwind = 1 file. Optional: paste the Tailwind card into an LLM and ask it to make the CTA pulse on hover — one line changes. BACKUP: if the demo breaks, the deployed page is the fallback.</a:t>
+              <a:t>DEMO 1: same card, two ways. Slide prompt: build a pricing card with a featured tier. Run npm run dev. Show semantic (2 files, invented names) vs Tailwind (1 file, right first try). Click Show source if available. Watch: first-try render + spacing consistency. Backup: deployed page.</a:t>
             </a:r>
           </a:p>
         </p:txBody>
@@ -659,7 +659,7 @@
           <a:p>
             <a:r>
               <a:rPr lang="en-US" dirty="0"/>
-              <a:t>Reason 1, the big one. Context is the model's whole world. If the answer lives in a file it didn't retrieve, it will guess. Co-location means the answer is always in front of it.</a:t>
+              <a:t>Reason 1: co-location = context locality. Land the slide: LLMs have a bounded context and no project memory. Co-located styling = whole spec in one token span. Semantic CSS = a second file it may never have read. Point at hero vs grid gap-6 p-8.</a:t>
             </a:r>
           </a:p>
         </p:txBody>
@@ -746,7 +746,7 @@
           <a:p>
             <a:r>
               <a:rPr lang="en-US" dirty="0"/>
-              <a:t>Reason 2. Frame it in the model's native terms: perplexity. Tailwind utilities are among the highest-frequency, most-co-occurring token sequences in the training data. The model isn't guessing — it's completing a phrase it has seen a million times.</a:t>
+              <a:t>Reason 2: closed vocabulary = predictability. Land the slide: flex items-center justify-between is a fixed phrase seen millions of times, low perplexity, high accuracy. Contrast .hero-banner-x. Model is completing a phrase, not inventing one.</a:t>
             </a:r>
           </a:p>
         </p:txBody>
@@ -833,7 +833,7 @@
           <a:p>
             <a:r>
               <a:rPr lang="en-US" dirty="0"/>
-              <a:t>Reason 3. The scale is a guardrail. Freeform CSS lets the model emit 13px here and 14px there — inconsistency that a human reviewer then has to catch. The token scale makes even a mediocre generation look consistent.</a:t>
+              <a:t>Reason 3. Land the slide: constraints guide the model. It picks p-4 from a menu instead of hallucinating padding: 13px. Freeform CSS drifts (13px here, 14px there); the token scale keeps generations consistent without a human cleanup pass.</a:t>
             </a:r>
           </a:p>
         </p:txBody>
@@ -920,7 +920,7 @@
           <a:p>
             <a:r>
               <a:rPr lang="en-US" dirty="0"/>
-              <a:t>Reason 4. Tailwind is effectively a shared standard library the model already knows. Semantic class names are private vocabulary — the model can't have learned yours, because it's yours.</a:t>
+              <a:t>Reason 4: deterministic global mapping. Land the slide: mt-4 means margin-top 1rem in every repo on earth. .spacer means nothing until you read this project. Training generalizes utilities; bespoke names stay project-local.</a:t>
             </a:r>
           </a:p>
         </p:txBody>
@@ -1007,7 +1007,7 @@
           <a:p>
             <a:r>
               <a:rPr lang="en-US" dirty="0"/>
-              <a:t>Reason 5. This is self-reinforcing and it's why the gap widens over time. Semantic CSS can't ride the flywheel — every project's names are different, so there's nothing transferable to learn.</a:t>
+              <a:t>Reason 5: the training-data flywheel. Land the slide: Tailwind saturates modern training data (Next.js, shadcn, public repos). More usage → more data → better gen → more usage. Utilities generalize; project names do not. Gap widens over time.</a:t>
             </a:r>
           </a:p>
         </p:txBody>
@@ -1094,7 +1094,7 @@
           <a:p>
             <a:r>
               <a:rPr lang="en-US" dirty="0"/>
-              <a:t>Reason 6. Because the output is self-documenting, a human can review LLM-generated markup at a glance — no context-switching to a stylesheet, no running it to see what happens. That review speed is what makes AI-assisted UI work actually productive.</a:t>
+              <a:t>Reason 6: self-documenting = verifiable. Land the slide: the class list is the spec. Read bg-coral hover:bg-coral/80 px-4 py-2 rounded-lg and know what it does without running it. Faster review = tighter human + AI loop.</a:t>
             </a:r>
           </a:p>
         </p:txBody>
@@ -1181,7 +1181,7 @@
           <a:p>
             <a:r>
               <a:rPr lang="en-US" dirty="0"/>
-              <a:t>This answers the 'frameworks were architecturally destined' line from the abstract. Components already pulled logic next to markup — that's locality. Tailwind just finishes the job by pulling style in too. It's the same idea, not a coincidence.</a:t>
+              <a:t>JS framework angle. Land the slide: components already co-locate template + logic; Tailwind adds style to the same unit. Template + logic + style = one file, one mental model. Encapsulation and utility-first both apply locality, at different layers.</a:t>
             </a:r>
           </a:p>
         </p:txBody>
@@ -1268,7 +1268,7 @@
           <a:p>
             <a:r>
               <a:rPr lang="en-US" dirty="0"/>
-              <a:t>Punchline. The cascade — spooky action at a distance — is exactly the friction we'll unpack. Bridge: the same thing that makes CSS hard for us makes it hard for an LLM.</a:t>
+              <a:t>Punchline on the slide: they change everything around it and hope it cascades. Bridge: that non-local mess is the problem for humans and for machines. Same friction for the rest of the talk.</a:t>
             </a:r>
           </a:p>
         </p:txBody>
@@ -1355,7 +1355,7 @@
           <a:p>
             <a:r>
               <a:rPr lang="en-US" dirty="0"/>
-              <a:t>Two reinforcing points. (1) Frameworks make composing classes at runtime trivial — you can't do that cleanly with static stylesheets. (2) Tailwind needs a build step to purge unused utilities, and the JS ecosystem already has that step. It's a hand-in-glove fit.</a:t>
+              <a:t>Built for the JS toolchain. Two points matching the slide: (1) dynamic composition is trivial (className={cn(...)}, Vue :class, Svelte class:). (2) build step is already there: Vite/PostCSS, JIT, tree-shaking. Close: Tailwind is build-tool-native; it belongs to the JS ecosystem.</a:t>
             </a:r>
           </a:p>
         </p:txBody>
@@ -1442,7 +1442,7 @@
           <a:p>
             <a:r>
               <a:rPr lang="en-US" dirty="0"/>
-              <a:t>The TypeScript angle ties it together. cva turns a closed set of utilities into a typed contract — autocomplete, compile-time checks, and the whole component readable in one span. TS constrains values; Tailwind constrains styles; both catch errors early. This is why the AI-native stack is TS + Tailwind.</a:t>
+              <a:t>TypeScript angle. Land the slide: same philosophy, constrained named vocabulary that catches mistakes early. Walk the cva Button snippet: variants type-checked and autocompleted. Mention the tools row: cva, tailwind-variants, tailwind-merge, clsx/cn. TS constrains values; Tailwind constrains styles.</a:t>
             </a:r>
           </a:p>
         </p:txBody>
@@ -1529,7 +1529,7 @@
           <a:p>
             <a:r>
               <a:rPr lang="en-US" dirty="0"/>
-              <a:t>DEMO 2. Open the demo repo → the 'Typed variants' section. Toggle variant/size and show the generated class string change live. Then flip to your editor and show autocomplete on &lt;Button variant=" — the closed set appears, and a bad value fails to compile. This is TypeScript + Tailwind as one constrained, checkable vocabulary.</a:t>
+              <a:t>DEMO 2. Open the demo repo, Typed variants section. Toggle variant and size: class string updates live (matches the slide). Then editor: type Button variant= and show IntelliSense. Land the slide line: a wrong variant is a red squiggle at compile time. TypeScript + Tailwind as one constrained, checkable vocabulary.</a:t>
             </a:r>
           </a:p>
         </p:txBody>
@@ -1616,7 +1616,7 @@
           <a:p>
             <a:r>
               <a:rPr lang="en-US" dirty="0"/>
-              <a:t>DEMO 3. Two ways to run it: (a) LIVE — in your editor, ask Cursor/Claude to add a `success` variant then a loading state to ui/button.tsx; narrate that only that one file changes. (b) BACKUP / deterministic — the repo's 'LLM iteration' panel replays the same edits on click: each prompt streams the diff into button.tsx and the live preview gains the capability. Punchline: because everything about the component is co-located, the model's edit is local — and a local edit is a safe edit. That's the whole talk, made physical.</a:t>
+              <a:t>DEMO 3. Prompt on the slide: add a success variant, then a loading state with a spinner. (a) LIVE in Cursor/Claude on ui/button.tsx, or (b) BACKUP: repo LLM iteration panel. Narrate: the diff lands entirely inside button.tsx; nothing else moves. Land the slide: local edit = safe edit. That is the payoff of everything before it.</a:t>
             </a:r>
           </a:p>
         </p:txBody>
@@ -1703,7 +1703,7 @@
           <a:p>
             <a:r>
               <a:rPr lang="en-US" dirty="0"/>
-              <a:t>shadcn/ui is the whole talk made concrete: distribution-by-copy-paste only works because the code is readable and modifiable by both humans and models. It's not a component library you install — it's code you own, in the one dialect everyone (and every model) speaks.</a:t>
+              <a:t>Proof slide. shadcn/ui is the thesis shipped: copy-paste components in Tailwind + TypeScript + cva. It exists because devs and LLMs both read and modify it trivially. You own the code (not a black-box install). Bullet on slide: v0, bolt, Lovable, Cursor, Artifacts all target it by default. Close on the footer: one stack, Tailwind + TypeScript.</a:t>
             </a:r>
           </a:p>
         </p:txBody>
@@ -1790,7 +1790,7 @@
           <a:p>
             <a:r>
               <a:rPr lang="en-US" dirty="0"/>
-              <a:t>Steelman the objections — it builds credibility and hands the audience their rebuttals. The 'inline styles' one is the most common and the most wrong: variants and purge are exactly what inline styles can't do.</a:t>
+              <a:t>Objections slide. Hit all three on screen: (1) class soup → extract components, not @apply; soup lives in one place. (2) learning curve → closed set + IntelliSense; learn once, transfers. (3) just inline styles → no: tokens, hover/md/dark variants, and purge. Inline styles can't do those. Most common pushback is #3.</a:t>
             </a:r>
           </a:p>
         </p:txBody>
@@ -1877,7 +1877,7 @@
           <a:p>
             <a:r>
               <a:rPr lang="en-US" dirty="0"/>
-              <a:t>Make it actionable. Nobody has to rewrite anything — start where new code is written and let the compounding LLM speed be the argument that convinces the skeptics. Velocity is the receipt.</a:t>
+              <a:t>Monday morning adopt list. Walk all five on the slide: (1) start in NEW components, no big-bang rewrite; (2) IntelliSense + Prettier class sorter; (3) cn() + cva for variants; (4) steal from shadcn/ui; (5) let LLM speed compound, measure PR velocity. Velocity is the receipt for skeptics.</a:t>
             </a:r>
           </a:p>
         </p:txBody>
@@ -1964,7 +1964,7 @@
           <a:p>
             <a:r>
               <a:rPr lang="en-US" dirty="0"/>
-              <a:t>Land the four takeaways slowly. If they remember one word, it's 'locality'. If they remember one sentence, it's 'the machines already voted.'</a:t>
+              <a:t>Land the four takeaways slowly, matching the slide: (1) the friction was locality; (2) LLMs love Tailwind because co-located, closed-vocab, deterministic, everywhere in training; (3) components, utilities, and TS types: locality at three layers; (4) the machines already voted, now you have the ammunition. If they keep one word: locality.</a:t>
             </a:r>
           </a:p>
         </p:txBody>
@@ -2051,7 +2051,7 @@
           <a:p>
             <a:r>
               <a:rPr lang="en-US" dirty="0"/>
-              <a:t>Resources — the slides will be shared, so no need to read every link. Call out the Locality of Behaviour essay and the demo repo (on the next slide).</a:t>
+              <a:t>Resources. Slides will be shared; do not read every link. Call out the two that matter on this slide: Locality of Behaviour essay (the locality essay) and v0.dev (see the machines vote live). Demo repo is on the thank-you slide next.</a:t>
             </a:r>
           </a:p>
         </p:txBody>
@@ -2138,7 +2138,7 @@
           <a:p>
             <a:r>
               <a:rPr lang="en-US" dirty="0"/>
-              <a:t>Close on the tradition — Gracias / Thank you. Swap in your real GitHub, socials, and generate a QR to the demo repo. Invite Tailwind hot-takes. End with energy.</a:t>
+              <a:t>Close. Thank you / Gracias. Point at the demo repo on the slide: github.com/devlinduldulao/llm-loves-tailwind-and-js. Socials and QR if present. Invite Tailwind hot-takes. End with energy.</a:t>
             </a:r>
           </a:p>
         </p:txBody>
@@ -2225,7 +2225,7 @@
           <a:p>
             <a:r>
               <a:rPr lang="en-US" dirty="0"/>
-              <a:t>Title. Name check the conference. One-liner: the CSS methodology wars are over and the machines have voted — and today I'll show you why that's not an accident, it's architecture.</a:t>
+              <a:t>Title. Name-check Devlin + Web Developer Conference 2025. One-liner: the methodology wars are over, the machines have voted, and today is why that's architecture. Subtitle on slide: and why you should too.</a:t>
             </a:r>
           </a:p>
         </p:txBody>
@@ -2312,7 +2312,7 @@
           <a:p>
             <a:r>
               <a:rPr lang="en-US" dirty="0"/>
-              <a:t>Quick bio — keep it under 45 seconds. Update the role/company line and add any current creds. Placeholder '@' box: swap for a headshot before the talk if you want.</a:t>
+              <a:t>Bio under 45 seconds. Hit what's on the slide: full-stack from Oslo, creator of DaloyJS. Add current role/company if you want. Headshot box is optional.</a:t>
             </a:r>
           </a:p>
         </p:txBody>
@@ -2399,7 +2399,7 @@
           <a:p>
             <a:r>
               <a:rPr lang="en-US" dirty="0"/>
-              <a:t>The graveyard of methodologies. We spent 15 years arguing about where styles live and what to name them. Tailwind didn't win the argument — it deleted the question.</a:t>
+              <a:t>Graveyard of methodologies. Walk the timeline: each one tried to answer where styles live and what we name them (that is the line on the slide). Optional close: Tailwind mostly deletes those questions instead of answering them better.</a:t>
             </a:r>
           </a:p>
         </p:txBody>
@@ -2486,7 +2486,7 @@
           <a:p>
             <a:r>
               <a:rPr lang="en-US" dirty="0"/>
-              <a:t>When people build tools that generate UIs with AI, they reach for Tailwind by default. v0, bolt, Lovable, Artifacts — all Tailwind + shadcn. The revealed preference of the entire AI tooling industry. The rest of the talk answers: why?</a:t>
+              <a:t>Thesis slide. Open with the headline: the machines have voted. Point at the tools: v0, bolt, Lovable, Artifacts, shadcn, Cursor/Copilot. Land the footer: every major AI UI generator defaults to Tailwind. That's revealed preference. Rest of the talk answers why.</a:t>
             </a:r>
           </a:p>
         </p:txBody>
@@ -2573,7 +2573,7 @@
           <a:p>
             <a:r>
               <a:rPr lang="en-US" dirty="0"/>
-              <a:t>The key reframe of the talk. Humans and LLMs fail on CSS for the SAME reason: you have to reason non-locally. Fix locality and you help both at once. Everything after this is a variation on 'locality'.</a:t>
+              <a:t>Key reframe. Land the slide lines: how code is understood by a teammate and by a next-token predictor. Same friction, same fix: locality. Both fail when they have to reason non-locally. Everything after this is a variation on locality.</a:t>
             </a:r>
           </a:p>
         </p:txBody>
@@ -2660,7 +2660,7 @@
           <a:p>
             <a:r>
               <a:rPr lang="en-US" dirty="0"/>
-              <a:t>Naming is a decision, and decisions compound. BEM makes it explicit but doesn't make it easy. An LLM has to invent a name here, remember it there, and keep them consistent — with no project memory. Tailwind deletes the decision entirely.</a:t>
+              <a:t>Friction 1: naming. Optional Phil Karlton quote on the slide. Walk the three bullets: invented project-specific names, names drift (card/Card/cardWrapper), humans AND models invent inconsistently. Point at .card__header--featured. Close: Tailwind deletes the naming decision.</a:t>
             </a:r>
           </a:p>
         </p:txBody>
@@ -2747,7 +2747,7 @@
           <a:p>
             <a:r>
               <a:rPr lang="en-US" dirty="0"/>
-              <a:t>The cascade is spooky action at a distance. To safely change one rule you must know every other rule that could interact with it. Humans get this wrong when tired; an LLM gets it wrong because the interacting rule was in a file it never saw.</a:t>
+              <a:t>Friction 2: the cascade. Land the slide: the C in CSS is global and order-dependent. Walk reset → buttons → card. Land the bottom line: edit one rule here, break a component three files away. Non-local effects are the worst case for a bounded context window.</a:t>
             </a:r>
           </a:p>
         </p:txBody>
@@ -3737,7 +3737,7 @@
                 <a:ea typeface="Courier New" pitchFamily="34" charset="-122"/>
                 <a:cs typeface="Courier New" pitchFamily="34" charset="-120"/>
               </a:rPr>
-              <a:t> { … }</a:t>
+              <a:t xml:space="preserve"> { … }</a:t>
             </a:r>
             <a:endParaRPr lang="en-US" sz="1300" dirty="0"/>
           </a:p>
@@ -3779,7 +3779,7 @@
                 <a:ea typeface="Arial" pitchFamily="34" charset="-122"/>
                 <a:cs typeface="Arial" pitchFamily="34" charset="-120"/>
               </a:rPr>
-              <a:t>Two files, joined only by a magic string. To understand the component, you must hold both in your head — and so must the model.</a:t>
+              <a:t>Two files, joined only by a magic string. To understand the component, you must hold both in your head, and so must the model.</a:t>
             </a:r>
             <a:endParaRPr lang="en-US" sz="1700" dirty="0"/>
           </a:p>
@@ -4164,7 +4164,7 @@
                 <a:ea typeface="Courier New" pitchFamily="34" charset="-122"/>
                 <a:cs typeface="Courier New" pitchFamily="34" charset="-120"/>
               </a:rPr>
-              <a:t>PricingCard.tsx  — that's the whole thing</a:t>
+              <a:t>PricingCard.tsx (the whole component)</a:t>
             </a:r>
             <a:endParaRPr lang="en-US" sz="1000" dirty="0"/>
           </a:p>
@@ -4246,7 +4246,7 @@
                 <a:ea typeface="Courier New" pitchFamily="34" charset="-122"/>
                 <a:cs typeface="Courier New" pitchFamily="34" charset="-120"/>
               </a:rPr>
-              <a:t> className=</a:t>
+              <a:t xml:space="preserve"> className=</a:t>
             </a:r>
             <a:r>
               <a:rPr lang="en-US" sz="1500" dirty="0">
@@ -4277,7 +4277,7 @@
                 <a:ea typeface="Courier New" pitchFamily="34" charset="-122"/>
                 <a:cs typeface="Courier New" pitchFamily="34" charset="-120"/>
               </a:rPr>
-              <a:t>  "rounded-lg px-4 py-3 font-bold"</a:t>
+              <a:t xml:space="preserve">  "rounded-lg px-4 py-3 font-bold"</a:t>
             </a:r>
             <a:r>
               <a:rPr lang="en-US" sz="1500" dirty="0">
@@ -4308,7 +4308,7 @@
                 <a:ea typeface="Courier New" pitchFamily="34" charset="-122"/>
                 <a:cs typeface="Courier New" pitchFamily="34" charset="-120"/>
               </a:rPr>
-              <a:t>  featured</a:t>
+              <a:t xml:space="preserve">  featured</a:t>
             </a:r>
             <a:r>
               <a:rPr lang="en-US" sz="1500" dirty="0">
@@ -4319,7 +4319,7 @@
                 <a:ea typeface="Courier New" pitchFamily="34" charset="-122"/>
                 <a:cs typeface="Courier New" pitchFamily="34" charset="-120"/>
               </a:rPr>
-              <a:t> &amp;&amp; </a:t>
+              <a:t xml:space="preserve"> &amp;&amp; </a:t>
             </a:r>
             <a:r>
               <a:rPr lang="en-US" sz="1500" dirty="0">
@@ -4370,7 +4370,7 @@
                 <a:ea typeface="Courier New" pitchFamily="34" charset="-122"/>
                 <a:cs typeface="Courier New" pitchFamily="34" charset="-120"/>
               </a:rPr>
-              <a:t>  Choose plan</a:t>
+              <a:t xml:space="preserve">  Choose plan</a:t>
             </a:r>
             <a:endParaRPr lang="en-US" sz="1500" dirty="0"/>
           </a:p>
@@ -4432,7 +4432,7 @@
                 <a:ea typeface="Arial" pitchFamily="34" charset="-122"/>
                 <a:cs typeface="Arial" pitchFamily="34" charset="-120"/>
               </a:rPr>
-              <a:t>No naming • no file-hopping • no indirection • no spooky cascade. An LLM sees the entire spec in one span of tokens.</a:t>
+              <a:t>Markup and style live in one place. An LLM sees the entire spec in one span of tokens.</a:t>
             </a:r>
             <a:endParaRPr lang="en-US" sz="1600" dirty="0"/>
           </a:p>
@@ -4653,7 +4653,7 @@
                 <a:ea typeface="Arial" pitchFamily="34" charset="-122"/>
                 <a:cs typeface="Arial" pitchFamily="34" charset="-120"/>
               </a:rPr>
-              <a:t>Demo 1 — same card, two ways</a:t>
+              <a:t>Demo 1: same card, two ways</a:t>
             </a:r>
             <a:endParaRPr lang="en-US" sz="3600" dirty="0"/>
           </a:p>
@@ -5662,7 +5662,7 @@
                 <a:ea typeface="Courier New" pitchFamily="34" charset="-122"/>
                 <a:cs typeface="Courier New" pitchFamily="34" charset="-120"/>
               </a:rPr>
-              <a:t> { … 40 lines … }</a:t>
+              <a:t xml:space="preserve"> { … 40 lines … }</a:t>
             </a:r>
             <a:endParaRPr lang="en-US" sz="1300" dirty="0"/>
           </a:p>
@@ -5691,7 +5691,7 @@
                 <a:ea typeface="Courier New" pitchFamily="34" charset="-122"/>
                 <a:cs typeface="Courier New" pitchFamily="34" charset="-120"/>
               </a:rPr>
-              <a:t>vs. Tailwind: it's all right here 👇</a:t>
+              <a:t>vs. Tailwind: it's all right here</a:t>
             </a:r>
             <a:endParaRPr lang="en-US" sz="1300" dirty="0"/>
           </a:p>
@@ -6390,7 +6390,7 @@
                 <a:ea typeface="Courier New" pitchFamily="34" charset="-122"/>
                 <a:cs typeface="Courier New" pitchFamily="34" charset="-120"/>
               </a:rPr>
-              <a:t>   flex items-center</a:t>
+              <a:t xml:space="preserve">   flex items-center</a:t>
             </a:r>
             <a:endParaRPr lang="en-US" sz="1300" dirty="0"/>
           </a:p>
@@ -6469,7 +6469,7 @@
                 <a:ea typeface="Courier New" pitchFamily="34" charset="-122"/>
                 <a:cs typeface="Courier New" pitchFamily="34" charset="-120"/>
               </a:rPr>
-              <a:t>  .hero-banner-x</a:t>
+              <a:t xml:space="preserve">  .hero-banner-x</a:t>
             </a:r>
             <a:endParaRPr lang="en-US" sz="1300" dirty="0"/>
           </a:p>
@@ -7071,7 +7071,7 @@
                 <a:ea typeface="Arial" pitchFamily="34" charset="-122"/>
                 <a:cs typeface="Arial" pitchFamily="34" charset="-120"/>
               </a:rPr>
-              <a:t>Constraints don't limit the model — they guide it</a:t>
+              <a:t>Constraints guide the model</a:t>
             </a:r>
             <a:endParaRPr lang="en-US" sz="1600" dirty="0"/>
           </a:p>
@@ -7875,7 +7875,7 @@
                 <a:ea typeface="Arial" pitchFamily="34" charset="-122"/>
                 <a:cs typeface="Arial" pitchFamily="34" charset="-120"/>
               </a:rPr>
-              <a:t>mt-4 == margin-top: 1rem — in every repo on earth</a:t>
+              <a:t>mt-4 == margin-top: 1rem in every repo on earth</a:t>
             </a:r>
             <a:endParaRPr lang="en-US" sz="1600" dirty="0"/>
           </a:p>
@@ -8082,7 +8082,7 @@
                 <a:ea typeface="Arial" pitchFamily="34" charset="-122"/>
                 <a:cs typeface="Arial" pitchFamily="34" charset="-120"/>
               </a:rPr>
-              <a:t>Bespoke class names are project-local — they don't</a:t>
+              <a:t>Bespoke class names are project-local; they don't</a:t>
             </a:r>
             <a:endParaRPr lang="en-US" sz="1600" dirty="0"/>
           </a:p>
@@ -8289,7 +8289,7 @@
                 <a:ea typeface="Courier New" pitchFamily="34" charset="-122"/>
                 <a:cs typeface="Courier New" pitchFamily="34" charset="-120"/>
               </a:rPr>
-              <a:t>   → margin-top: 1rem</a:t>
+              <a:t xml:space="preserve">   → margin-top: 1rem</a:t>
             </a:r>
             <a:endParaRPr lang="en-US" sz="1400" dirty="0"/>
           </a:p>
@@ -8320,7 +8320,7 @@
                 <a:ea typeface="Courier New" pitchFamily="34" charset="-122"/>
                 <a:cs typeface="Courier New" pitchFamily="34" charset="-120"/>
               </a:rPr>
-              <a:t>   → display: flex</a:t>
+              <a:t xml:space="preserve">   → display: flex</a:t>
             </a:r>
             <a:endParaRPr lang="en-US" sz="1400" dirty="0"/>
           </a:p>
@@ -8351,7 +8351,7 @@
                 <a:ea typeface="Courier New" pitchFamily="34" charset="-122"/>
                 <a:cs typeface="Courier New" pitchFamily="34" charset="-120"/>
               </a:rPr>
-              <a:t>  → gap: 1.5rem</a:t>
+              <a:t xml:space="preserve">  → gap: 1.5rem</a:t>
             </a:r>
             <a:endParaRPr lang="en-US" sz="1400" dirty="0"/>
           </a:p>
@@ -8391,7 +8391,7 @@
                 <a:ea typeface="Courier New" pitchFamily="34" charset="-122"/>
                 <a:cs typeface="Courier New" pitchFamily="34" charset="-120"/>
               </a:rPr>
-              <a:t> → ¯\_(ツ)_/¯</a:t>
+              <a:t xml:space="preserve"> → ¯\_(ツ)_/¯</a:t>
             </a:r>
             <a:endParaRPr lang="en-US" sz="1400" dirty="0"/>
           </a:p>
@@ -8411,7 +8411,7 @@
                 <a:ea typeface="Courier New" pitchFamily="34" charset="-122"/>
                 <a:cs typeface="Courier New" pitchFamily="34" charset="-120"/>
               </a:rPr>
-              <a:t>        depends on the repo</a:t>
+              <a:t xml:space="preserve">        depends on the repo</a:t>
             </a:r>
             <a:endParaRPr lang="en-US" sz="1400" dirty="0"/>
           </a:p>
@@ -9632,7 +9632,7 @@
                 <a:ea typeface="Arial" pitchFamily="34" charset="-122"/>
                 <a:cs typeface="Arial" pitchFamily="34" charset="-120"/>
               </a:rPr>
-              <a:t>The class list IS the spec</a:t>
+              <a:t>The class list is the spec</a:t>
             </a:r>
             <a:endParaRPr lang="en-US" sz="1600" dirty="0"/>
           </a:p>
@@ -9770,7 +9770,7 @@
                 <a:ea typeface="Arial" pitchFamily="34" charset="-122"/>
                 <a:cs typeface="Arial" pitchFamily="34" charset="-120"/>
               </a:rPr>
-              <a:t>…and know exactly what it does — without running it</a:t>
+              <a:t>…and know exactly what it does without running it</a:t>
             </a:r>
             <a:endParaRPr lang="en-US" sz="1600" dirty="0"/>
           </a:p>
@@ -9954,7 +9954,7 @@
                 <a:ea typeface="Courier New" pitchFamily="34" charset="-122"/>
                 <a:cs typeface="Courier New" pitchFamily="34" charset="-120"/>
               </a:rPr>
-              <a:t>bg-coral </a:t>
+              <a:t xml:space="preserve">bg-coral </a:t>
             </a:r>
             <a:r>
               <a:rPr lang="en-US" sz="1500" dirty="0">
@@ -9965,7 +9965,7 @@
                 <a:ea typeface="Courier New" pitchFamily="34" charset="-122"/>
                 <a:cs typeface="Courier New" pitchFamily="34" charset="-120"/>
               </a:rPr>
-              <a:t>hover:bg-coral/80 </a:t>
+              <a:t xml:space="preserve">hover:bg-coral/80 </a:t>
             </a:r>
             <a:r>
               <a:rPr lang="en-US" sz="1500" dirty="0">
@@ -9976,7 +9976,7 @@
                 <a:ea typeface="Courier New" pitchFamily="34" charset="-122"/>
                 <a:cs typeface="Courier New" pitchFamily="34" charset="-120"/>
               </a:rPr>
-              <a:t>px-4 py-2 </a:t>
+              <a:t xml:space="preserve">px-4 py-2 </a:t>
             </a:r>
             <a:r>
               <a:rPr lang="en-US" sz="1500" dirty="0">
@@ -10263,7 +10263,7 @@
                 <a:ea typeface="Arial" pitchFamily="34" charset="-122"/>
                 <a:cs typeface="Arial" pitchFamily="34" charset="-120"/>
               </a:rPr>
-              <a:t>Modern frameworks co-locate template + logic in one unit. Tailwind adds the third pillar — style — to the same unit.</a:t>
+              <a:t>Modern frameworks co-locate template + logic in one unit. Tailwind adds style to the same unit.</a:t>
             </a:r>
             <a:endParaRPr lang="en-US" sz="1800" dirty="0"/>
           </a:p>
@@ -10641,7 +10641,7 @@
                 <a:ea typeface="Arial" pitchFamily="34" charset="-122"/>
                 <a:cs typeface="Arial" pitchFamily="34" charset="-120"/>
               </a:rPr>
-              <a:t>Component encapsulation and utility-first are the SAME principle — locality — applied at different layers.</a:t>
+              <a:t>Component encapsulation and utility-first both apply locality, at different layers.</a:t>
             </a:r>
             <a:endParaRPr lang="en-US" sz="2000" dirty="0"/>
           </a:p>
@@ -11183,7 +11183,7 @@
                 <a:ea typeface="Arial" pitchFamily="34" charset="-122"/>
                 <a:cs typeface="Arial" pitchFamily="34" charset="-120"/>
               </a:rPr>
-              <a:t>They just change everything around it —</a:t>
+              <a:t>They change everything around it,</a:t>
             </a:r>
             <a:endParaRPr lang="en-US" sz="3000" dirty="0"/>
           </a:p>
@@ -11203,7 +11203,7 @@
                 <a:ea typeface="Arial" pitchFamily="34" charset="-122"/>
                 <a:cs typeface="Arial" pitchFamily="34" charset="-120"/>
               </a:rPr>
-              <a:t>and hope it cascades. 🌊</a:t>
+              <a:t>and hope it cascades.</a:t>
             </a:r>
             <a:endParaRPr lang="en-US" sz="3000" dirty="0"/>
           </a:p>
@@ -11242,7 +11242,7 @@
                 <a:ea typeface="Arial" pitchFamily="34" charset="-122"/>
                 <a:cs typeface="Arial" pitchFamily="34" charset="-120"/>
               </a:rPr>
-              <a:t>Today: why that joke is basically the whole problem — for humans and for machines.</a:t>
+              <a:t>Today: why that joke is the problem for humans and for machines.</a:t>
             </a:r>
             <a:endParaRPr lang="en-US" sz="1700" dirty="0"/>
           </a:p>
@@ -12286,7 +12286,7 @@
                 <a:ea typeface="Courier New" pitchFamily="34" charset="-122"/>
                 <a:cs typeface="Courier New" pitchFamily="34" charset="-120"/>
               </a:rPr>
-              <a:t>const button = </a:t>
+              <a:t xml:space="preserve">const button = </a:t>
             </a:r>
             <a:r>
               <a:rPr lang="en-US" sz="1350" dirty="0">
@@ -12328,7 +12328,7 @@
                 <a:ea typeface="Courier New" pitchFamily="34" charset="-122"/>
                 <a:cs typeface="Courier New" pitchFamily="34" charset="-120"/>
               </a:rPr>
-              <a:t>  variants</a:t>
+              <a:t xml:space="preserve">  variants</a:t>
             </a:r>
             <a:r>
               <a:rPr lang="en-US" sz="1350" dirty="0">
@@ -12359,7 +12359,7 @@
                 <a:ea typeface="Courier New" pitchFamily="34" charset="-122"/>
                 <a:cs typeface="Courier New" pitchFamily="34" charset="-120"/>
               </a:rPr>
-              <a:t>    variant</a:t>
+              <a:t xml:space="preserve">    variant</a:t>
             </a:r>
             <a:r>
               <a:rPr lang="en-US" sz="1350" dirty="0">
@@ -12370,7 +12370,7 @@
                 <a:ea typeface="Courier New" pitchFamily="34" charset="-122"/>
                 <a:cs typeface="Courier New" pitchFamily="34" charset="-120"/>
               </a:rPr>
-              <a:t>: { primary: </a:t>
+              <a:t xml:space="preserve">: { primary: </a:t>
             </a:r>
             <a:r>
               <a:rPr lang="en-US" sz="1350" dirty="0">
@@ -12412,7 +12412,7 @@
                 <a:ea typeface="Courier New" pitchFamily="34" charset="-122"/>
                 <a:cs typeface="Courier New" pitchFamily="34" charset="-120"/>
               </a:rPr>
-              <a:t>               destructive: </a:t>
+              <a:t xml:space="preserve">               destructive: </a:t>
             </a:r>
             <a:r>
               <a:rPr lang="en-US" sz="1350" dirty="0">
@@ -12434,7 +12434,7 @@
                 <a:ea typeface="Courier New" pitchFamily="34" charset="-122"/>
                 <a:cs typeface="Courier New" pitchFamily="34" charset="-120"/>
               </a:rPr>
-              <a:t> },</a:t>
+              <a:t xml:space="preserve"> },</a:t>
             </a:r>
             <a:endParaRPr lang="en-US" sz="1350" dirty="0"/>
           </a:p>
@@ -12454,7 +12454,7 @@
                 <a:ea typeface="Courier New" pitchFamily="34" charset="-122"/>
                 <a:cs typeface="Courier New" pitchFamily="34" charset="-120"/>
               </a:rPr>
-              <a:t>    size</a:t>
+              <a:t xml:space="preserve">    size</a:t>
             </a:r>
             <a:r>
               <a:rPr lang="en-US" sz="1350" dirty="0">
@@ -12465,7 +12465,7 @@
                 <a:ea typeface="Courier New" pitchFamily="34" charset="-122"/>
                 <a:cs typeface="Courier New" pitchFamily="34" charset="-120"/>
               </a:rPr>
-              <a:t>: { sm: </a:t>
+              <a:t xml:space="preserve">: { sm: </a:t>
             </a:r>
             <a:r>
               <a:rPr lang="en-US" sz="1350" dirty="0">
@@ -12487,7 +12487,7 @@
                 <a:ea typeface="Courier New" pitchFamily="34" charset="-122"/>
                 <a:cs typeface="Courier New" pitchFamily="34" charset="-120"/>
               </a:rPr>
-              <a:t>, lg: </a:t>
+              <a:t xml:space="preserve">, lg: </a:t>
             </a:r>
             <a:r>
               <a:rPr lang="en-US" sz="1350" dirty="0">
@@ -12509,7 +12509,7 @@
                 <a:ea typeface="Courier New" pitchFamily="34" charset="-122"/>
                 <a:cs typeface="Courier New" pitchFamily="34" charset="-120"/>
               </a:rPr>
-              <a:t> },</a:t>
+              <a:t xml:space="preserve"> },</a:t>
             </a:r>
             <a:endParaRPr lang="en-US" sz="1350" dirty="0"/>
           </a:p>
@@ -12529,7 +12529,7 @@
                 <a:ea typeface="Courier New" pitchFamily="34" charset="-122"/>
                 <a:cs typeface="Courier New" pitchFamily="34" charset="-120"/>
               </a:rPr>
-              <a:t>  },</a:t>
+              <a:t xml:space="preserve">  },</a:t>
             </a:r>
             <a:endParaRPr lang="en-US" sz="1350" dirty="0"/>
           </a:p>
@@ -12560,7 +12560,7 @@
                 <a:ea typeface="Courier New" pitchFamily="34" charset="-122"/>
                 <a:cs typeface="Courier New" pitchFamily="34" charset="-120"/>
               </a:rPr>
-              <a:t>   // ← variants are now type-checked &amp; autocompleted</a:t>
+              <a:t xml:space="preserve">   // ← variants are now type-checked &amp; autocompleted</a:t>
             </a:r>
             <a:endParaRPr lang="en-US" sz="1350" dirty="0"/>
           </a:p>
@@ -13073,7 +13073,7 @@
                 <a:ea typeface="Arial" pitchFamily="34" charset="-122"/>
                 <a:cs typeface="Arial" pitchFamily="34" charset="-120"/>
               </a:rPr>
-              <a:t>Demo 2 — typed variants, live</a:t>
+              <a:t>Demo 2: typed variants, live</a:t>
             </a:r>
             <a:endParaRPr lang="en-US" sz="3600" dirty="0"/>
           </a:p>
@@ -13142,7 +13142,7 @@
                 <a:ea typeface="Arial" pitchFamily="34" charset="-122"/>
                 <a:cs typeface="Arial" pitchFamily="34" charset="-120"/>
               </a:rPr>
-              <a:t>Toggle variant × size — the class string updates in real time</a:t>
+              <a:t>Toggle variant × size: the class string updates in real time</a:t>
             </a:r>
             <a:endParaRPr lang="en-US" sz="1800" dirty="0"/>
           </a:p>
@@ -13280,7 +13280,7 @@
                 <a:ea typeface="Arial" pitchFamily="34" charset="-122"/>
                 <a:cs typeface="Arial" pitchFamily="34" charset="-120"/>
               </a:rPr>
-              <a:t>A wrong variant is a red squiggle — not a production bug</a:t>
+              <a:t>A wrong variant is a red squiggle at compile time</a:t>
             </a:r>
             <a:endParaRPr lang="en-US" sz="1800" dirty="0"/>
           </a:p>
@@ -13540,7 +13540,7 @@
                 <a:ea typeface="Arial" pitchFamily="34" charset="-122"/>
                 <a:cs typeface="Arial" pitchFamily="34" charset="-120"/>
               </a:rPr>
-              <a:t>Demo 3 — watch it edit ONE file</a:t>
+              <a:t>Demo 3: watch it edit ONE file</a:t>
             </a:r>
             <a:endParaRPr lang="en-US" sz="3600" dirty="0"/>
           </a:p>
@@ -13678,7 +13678,7 @@
                 <a:ea typeface="Arial" pitchFamily="34" charset="-122"/>
                 <a:cs typeface="Arial" pitchFamily="34" charset="-120"/>
               </a:rPr>
-              <a:t>The diff lands entirely inside button.tsx — nothing else moves</a:t>
+              <a:t>The diff lands entirely inside button.tsx. Nothing else moves.</a:t>
             </a:r>
             <a:endParaRPr lang="en-US" sz="1800" dirty="0"/>
           </a:p>
@@ -13786,7 +13786,7 @@
                 <a:ea typeface="Courier New" pitchFamily="34" charset="-122"/>
                 <a:cs typeface="Courier New" pitchFamily="34" charset="-120"/>
               </a:rPr>
-              <a:t>→ local edit = safe edit. This is the payoff of everything before it.</a:t>
+              <a:t>Local edit = safe edit. That is the payoff of everything before it.</a:t>
             </a:r>
             <a:endParaRPr lang="en-US" sz="1500" dirty="0"/>
           </a:p>
@@ -14116,7 +14116,7 @@
                 <a:ea typeface="Arial" pitchFamily="34" charset="-122"/>
                 <a:cs typeface="Arial" pitchFamily="34" charset="-120"/>
               </a:rPr>
-              <a:t>It exists BECAUSE devs and LLMs both read &amp; modify it trivially</a:t>
+              <a:t>It exists because devs and LLMs both read and modify it trivially</a:t>
             </a:r>
             <a:endParaRPr lang="en-US" sz="1800" dirty="0"/>
           </a:p>
@@ -14258,7 +14258,7 @@
                 <a:ea typeface="Arial" pitchFamily="34" charset="-122"/>
                 <a:cs typeface="Arial" pitchFamily="34" charset="-120"/>
               </a:rPr>
-              <a:t>The most AI-native UI stack on earth is </a:t>
+              <a:t xml:space="preserve">One stack: </a:t>
             </a:r>
             <a:r>
               <a:rPr lang="en-US" sz="2600" b="1" dirty="0">
@@ -14280,7 +14280,7 @@
                 <a:ea typeface="Arial" pitchFamily="34" charset="-122"/>
                 <a:cs typeface="Arial" pitchFamily="34" charset="-120"/>
               </a:rPr>
-              <a:t>.  QED.</a:t>
+              <a:t>.</a:t>
             </a:r>
             <a:endParaRPr lang="en-US" sz="2600" dirty="0"/>
           </a:p>
@@ -14430,7 +14430,7 @@
                 <a:ea typeface="Arial" pitchFamily="34" charset="-122"/>
                 <a:cs typeface="Arial" pitchFamily="34" charset="-120"/>
               </a:rPr>
-              <a:t>LET'S BE HONEST</a:t>
+              <a:t>OBJECTIONS</a:t>
             </a:r>
             <a:endParaRPr lang="en-US" sz="1200" dirty="0"/>
           </a:p>
@@ -14590,7 +14590,7 @@
                 <a:ea typeface="Arial" pitchFamily="34" charset="-122"/>
                 <a:cs typeface="Arial" pitchFamily="34" charset="-120"/>
               </a:rPr>
-              <a:t>Extract components in your framework — not @apply. The soup lives in ONE place you rarely re-read.</a:t>
+              <a:t>Extract components in your framework, not @apply. The soup lives in ONE place you rarely re-read.</a:t>
             </a:r>
             <a:endParaRPr lang="en-US" sz="1500" dirty="0"/>
           </a:p>
@@ -15123,7 +15123,7 @@
                 <a:ea typeface="Arial" pitchFamily="34" charset="-122"/>
                 <a:cs typeface="Arial" pitchFamily="34" charset="-120"/>
               </a:rPr>
-              <a:t>Start in NEW components — no big-bang rewrite</a:t>
+              <a:t>Start in NEW components. No big-bang rewrite.</a:t>
             </a:r>
             <a:endParaRPr lang="en-US" sz="1800" dirty="0"/>
           </a:p>
@@ -15543,7 +15543,7 @@
                 <a:ea typeface="Arial" pitchFamily="34" charset="-122"/>
                 <a:cs typeface="Arial" pitchFamily="34" charset="-120"/>
               </a:rPr>
-              <a:t>Let the LLM speed compound — measure PR velocity</a:t>
+              <a:t>Let the LLM speed compound. Measure PR velocity.</a:t>
             </a:r>
             <a:endParaRPr lang="en-US" sz="1800" dirty="0"/>
           </a:p>
@@ -15843,7 +15843,7 @@
                 <a:ea typeface="Arial" pitchFamily="34" charset="-122"/>
                 <a:cs typeface="Arial" pitchFamily="34" charset="-120"/>
               </a:rPr>
-              <a:t>The friction was never aesthetic — it was locality</a:t>
+              <a:t>The friction was locality</a:t>
             </a:r>
             <a:endParaRPr lang="en-US" sz="1900" dirty="0"/>
           </a:p>
@@ -16059,7 +16059,7 @@
                 <a:ea typeface="Arial" pitchFamily="34" charset="-122"/>
                 <a:cs typeface="Arial" pitchFamily="34" charset="-120"/>
               </a:rPr>
-              <a:t>Components + utilities + TS types = the same idea at three layers</a:t>
+              <a:t>Components, utilities, and TS types: locality at three layers</a:t>
             </a:r>
             <a:endParaRPr lang="en-US" sz="1900" dirty="0"/>
           </a:p>
@@ -16167,7 +16167,7 @@
                 <a:ea typeface="Arial" pitchFamily="34" charset="-122"/>
                 <a:cs typeface="Arial" pitchFamily="34" charset="-120"/>
               </a:rPr>
-              <a:t>The machines already voted — now you have the ammunition</a:t>
+              <a:t>The machines already voted. Now you have the ammunition.</a:t>
             </a:r>
             <a:endParaRPr lang="en-US" sz="1900" dirty="0"/>
           </a:p>
@@ -16884,7 +16884,7 @@
                 <a:ea typeface="Arial" pitchFamily="34" charset="-122"/>
                 <a:cs typeface="Arial" pitchFamily="34" charset="-120"/>
               </a:rPr>
-              <a:t>the idea behind the whole talk</a:t>
+              <a:t>the locality essay</a:t>
             </a:r>
             <a:endParaRPr lang="en-US" sz="1300" dirty="0"/>
           </a:p>
@@ -17247,7 +17247,7 @@
                 <a:ea typeface="Arial" pitchFamily="34" charset="-122"/>
                 <a:cs typeface="Arial" pitchFamily="34" charset="-120"/>
               </a:rPr>
-              <a:t>Demo repo:  </a:t>
+              <a:t xml:space="preserve">Demo repo:  </a:t>
             </a:r>
             <a:r>
               <a:rPr lang="en-US" sz="1600" dirty="0" err="1">
@@ -17928,7 +17928,7 @@
                 <a:ea typeface="Arial" pitchFamily="34" charset="-122"/>
                 <a:cs typeface="Arial" pitchFamily="34" charset="-120"/>
               </a:rPr>
-              <a:t>   •   Web Developer Conference   •   2025</a:t>
+              <a:t xml:space="preserve">   •   Web Developer Conference   •   2025</a:t>
             </a:r>
             <a:endParaRPr lang="en-US" sz="1600" dirty="0"/>
           </a:p>
@@ -18607,7 +18607,7 @@
                 <a:ea typeface="Arial" pitchFamily="34" charset="-122"/>
                 <a:cs typeface="Arial" pitchFamily="34" charset="-120"/>
               </a:rPr>
-              <a:t>Creator of </a:t>
+              <a:t xml:space="preserve">Creator of </a:t>
             </a:r>
             <a:r>
               <a:rPr lang="en-US" sz="1700" dirty="0" err="1">
@@ -20531,7 +20531,7 @@
                 <a:ea typeface="Arial" pitchFamily="34" charset="-122"/>
                 <a:cs typeface="Arial" pitchFamily="34" charset="-120"/>
               </a:rPr>
-              <a:t>the AI UI standard</a:t>
+              <a:t>default for AI tools</a:t>
             </a:r>
             <a:endParaRPr lang="en-US" sz="1300" dirty="0"/>
           </a:p>
@@ -20682,7 +20682,7 @@
                 <a:ea typeface="Arial" pitchFamily="34" charset="-122"/>
                 <a:cs typeface="Arial" pitchFamily="34" charset="-120"/>
               </a:rPr>
-              <a:t>Every major AI UI generator defaults to Tailwind. That's not marketing — it's revealed preference.</a:t>
+              <a:t>Every major AI UI generator defaults to Tailwind. That's revealed preference.</a:t>
             </a:r>
             <a:endParaRPr lang="en-US" sz="1700" dirty="0"/>
           </a:p>
@@ -20871,7 +20871,7 @@
                 <a:ea typeface="Arial" pitchFamily="34" charset="-122"/>
                 <a:cs typeface="Arial" pitchFamily="34" charset="-120"/>
               </a:rPr>
-              <a:t>This was never about </a:t>
+              <a:t xml:space="preserve">How code is </a:t>
             </a:r>
             <a:r>
               <a:rPr lang="en-US" sz="3800" b="1" dirty="0">
@@ -20882,7 +20882,7 @@
                 <a:ea typeface="Arial" pitchFamily="34" charset="-122"/>
                 <a:cs typeface="Arial" pitchFamily="34" charset="-120"/>
               </a:rPr>
-              <a:t>clean HTML</a:t>
+              <a:t>understood</a:t>
             </a:r>
             <a:r>
               <a:rPr lang="en-US" sz="3800" b="1" dirty="0">
@@ -20935,7 +20935,7 @@
                 <a:ea typeface="Arial" pitchFamily="34" charset="-122"/>
                 <a:cs typeface="Arial" pitchFamily="34" charset="-120"/>
               </a:rPr>
-              <a:t>It's about how code is </a:t>
+              <a:t xml:space="preserve">By a </a:t>
             </a:r>
             <a:r>
               <a:rPr lang="en-US" sz="3000" b="1" dirty="0">
@@ -20946,7 +20946,7 @@
                 <a:ea typeface="Arial" pitchFamily="34" charset="-122"/>
                 <a:cs typeface="Arial" pitchFamily="34" charset="-120"/>
               </a:rPr>
-              <a:t>understood</a:t>
+              <a:t>teammate</a:t>
             </a:r>
             <a:r>
               <a:rPr lang="en-US" sz="3000" b="1" dirty="0">
@@ -20957,7 +20957,7 @@
                 <a:ea typeface="Arial" pitchFamily="34" charset="-122"/>
                 <a:cs typeface="Arial" pitchFamily="34" charset="-120"/>
               </a:rPr>
-              <a:t> —</a:t>
+              <a:t>,</a:t>
             </a:r>
             <a:endParaRPr lang="en-US" sz="3000" dirty="0"/>
           </a:p>
@@ -20977,7 +20977,7 @@
                 <a:ea typeface="Arial" pitchFamily="34" charset="-122"/>
                 <a:cs typeface="Arial" pitchFamily="34" charset="-120"/>
               </a:rPr>
-              <a:t>by a teammate, and by a next-token predictor.</a:t>
+              <a:t xml:space="preserve"> and by a next-token predictor.</a:t>
             </a:r>
             <a:endParaRPr lang="en-US" sz="3000" dirty="0"/>
           </a:p>
@@ -21050,7 +21050,7 @@
                 <a:ea typeface="Arial" pitchFamily="34" charset="-122"/>
                 <a:cs typeface="Arial" pitchFamily="34" charset="-120"/>
               </a:rPr>
-              <a:t>Same friction.  Same fix:  locality.</a:t>
+              <a:t>Same friction, same fix: locality.</a:t>
             </a:r>
             <a:endParaRPr lang="en-US" sz="1800" dirty="0"/>
           </a:p>
@@ -21740,7 +21740,7 @@
                 <a:ea typeface="Courier New" pitchFamily="34" charset="-122"/>
                 <a:cs typeface="Courier New" pitchFamily="34" charset="-120"/>
               </a:rPr>
-              <a:t> {</a:t>
+              <a:t xml:space="preserve"> {</a:t>
             </a:r>
             <a:endParaRPr lang="en-US" sz="1400" dirty="0"/>
           </a:p>
@@ -21760,7 +21760,7 @@
                 <a:ea typeface="Courier New" pitchFamily="34" charset="-122"/>
                 <a:cs typeface="Courier New" pitchFamily="34" charset="-120"/>
               </a:rPr>
-              <a:t>  border-color</a:t>
+              <a:t xml:space="preserve">  border-color</a:t>
             </a:r>
             <a:r>
               <a:rPr lang="en-US" sz="1400" dirty="0">
@@ -21771,7 +21771,7 @@
                 <a:ea typeface="Courier New" pitchFamily="34" charset="-122"/>
                 <a:cs typeface="Courier New" pitchFamily="34" charset="-120"/>
               </a:rPr>
-              <a:t>: </a:t>
+              <a:t xml:space="preserve">: </a:t>
             </a:r>
             <a:r>
               <a:rPr lang="en-US" sz="1400" dirty="0">
@@ -21853,7 +21853,7 @@
                 <a:ea typeface="Courier New" pitchFamily="34" charset="-122"/>
                 <a:cs typeface="Courier New" pitchFamily="34" charset="-120"/>
               </a:rPr>
-              <a:t> { … }</a:t>
+              <a:t xml:space="preserve"> { … }</a:t>
             </a:r>
             <a:endParaRPr lang="en-US" sz="1400" dirty="0"/>
           </a:p>
@@ -21895,7 +21895,7 @@
                 <a:ea typeface="Courier New" pitchFamily="34" charset="-122"/>
                 <a:cs typeface="Courier New" pitchFamily="34" charset="-120"/>
               </a:rPr>
-              <a:t> { … }</a:t>
+              <a:t xml:space="preserve"> { … }</a:t>
             </a:r>
             <a:endParaRPr lang="en-US" sz="1400" dirty="0"/>
           </a:p>
@@ -22126,7 +22126,7 @@
                 <a:ea typeface="Arial" pitchFamily="34" charset="-122"/>
                 <a:cs typeface="Arial" pitchFamily="34" charset="-120"/>
               </a:rPr>
-              <a:t>The </a:t>
+              <a:t xml:space="preserve">The </a:t>
             </a:r>
             <a:r>
               <a:rPr lang="en-US" sz="2200" b="1" dirty="0">
@@ -22148,7 +22148,7 @@
                 <a:ea typeface="Arial" pitchFamily="34" charset="-122"/>
                 <a:cs typeface="Arial" pitchFamily="34" charset="-120"/>
               </a:rPr>
-              <a:t> in CSS is global and order-dependent.</a:t>
+              <a:t xml:space="preserve"> in CSS is global and order-dependent.</a:t>
             </a:r>
             <a:endParaRPr lang="en-US" sz="2200" dirty="0"/>
           </a:p>

--- a/why-llms-love-tailwind.pptx
+++ b/why-llms-love-tailwind.pptx
@@ -5,7 +5,7 @@
     <p:sldMasterId id="2147483648" r:id="rId1"/>
   </p:sldMasterIdLst>
   <p:notesMasterIdLst>
-    <p:notesMasterId r:id="rId31"/>
+    <p:notesMasterId r:id="rId32"/>
   </p:notesMasterIdLst>
   <p:sldIdLst>
     <p:sldId id="256" r:id="rId2"/>
@@ -37,6 +37,7 @@
     <p:sldId id="282" r:id="rId28"/>
     <p:sldId id="283" r:id="rId29"/>
     <p:sldId id="284" r:id="rId30"/>
+    <p:sldId id="313" r:id="rId31"/>
   </p:sldIdLst>
   <p:sldSz cx="12192000" cy="6858000"/>
   <p:notesSz cx="6858000" cy="12192000"/>
@@ -2266,6 +2267,86 @@
 </p:notes>
 </file>
 
+<file path=ppt/notesSlides/notesSlide30.xml><?xml version="1.0" encoding="utf-8"?>
+<p:notes xmlns:a="http://schemas.openxmlformats.org/drawingml/2006/main" xmlns:r="http://schemas.openxmlformats.org/officeDocument/2006/relationships" xmlns:p="http://schemas.openxmlformats.org/presentationml/2006/main">
+  <p:cSld>
+    <p:spTree>
+      <p:nvGrpSpPr>
+        <p:cNvPr id="1" name=""/>
+        <p:cNvGrpSpPr/>
+        <p:nvPr/>
+      </p:nvGrpSpPr>
+      <p:grpSpPr>
+        <a:xfrm>
+          <a:off x="0" y="0"/>
+          <a:ext cx="0" cy="0"/>
+          <a:chOff x="0" y="0"/>
+          <a:chExt cx="0" cy="0"/>
+        </a:xfrm>
+      </p:grpSpPr>
+      <p:sp>
+        <p:nvSpPr>
+          <p:cNvPr id="2" name="Slide Image Placeholder 1"/>
+          <p:cNvSpPr>
+            <a:spLocks noGrp="1" noRot="1" noChangeAspect="1"/>
+          </p:cNvSpPr>
+          <p:nvPr>
+            <p:ph type="sldImg"/>
+          </p:nvPr>
+        </p:nvSpPr>
+        <p:spPr/>
+      </p:sp>
+      <p:sp>
+        <p:nvSpPr>
+          <p:cNvPr id="3" name="Notes Placeholder 2"/>
+          <p:cNvSpPr>
+            <a:spLocks noGrp="1"/>
+          </p:cNvSpPr>
+          <p:nvPr>
+            <p:ph type="body" idx="1"/>
+          </p:nvPr>
+        </p:nvSpPr>
+        <p:spPr/>
+        <p:txBody>
+          <a:bodyPr/>
+          <a:lstStyle/>
+          <a:p>
+            <a:endParaRPr lang="en-GB" dirty="0"/>
+          </a:p>
+        </p:txBody>
+      </p:sp>
+      <p:sp>
+        <p:nvSpPr>
+          <p:cNvPr id="4" name="Slide Number Placeholder 3"/>
+          <p:cNvSpPr>
+            <a:spLocks noGrp="1"/>
+          </p:cNvSpPr>
+          <p:nvPr>
+            <p:ph type="sldNum" sz="quarter" idx="5"/>
+          </p:nvPr>
+        </p:nvSpPr>
+        <p:spPr/>
+        <p:txBody>
+          <a:bodyPr/>
+          <a:lstStyle/>
+          <a:p>
+            <a:endParaRPr lang="en-US"/>
+          </a:p>
+        </p:txBody>
+      </p:sp>
+    </p:spTree>
+    <p:extLst>
+      <p:ext uri="{BB962C8B-B14F-4D97-AF65-F5344CB8AC3E}">
+        <p14:creationId xmlns:p14="http://schemas.microsoft.com/office/powerpoint/2010/main" val="1006813423"/>
+      </p:ext>
+    </p:extLst>
+  </p:cSld>
+  <p:clrMapOvr>
+    <a:masterClrMapping/>
+  </p:clrMapOvr>
+</p:notes>
+</file>
+
 <file path=ppt/notesSlides/notesSlide4.xml><?xml version="1.0" encoding="utf-8"?>
 <p:notes xmlns:a="http://schemas.openxmlformats.org/drawingml/2006/main" xmlns:r="http://schemas.openxmlformats.org/officeDocument/2006/relationships" xmlns:p="http://schemas.openxmlformats.org/presentationml/2006/main">
   <p:cSld>
@@ -2818,6 +2899,36 @@
 </p:sldLayout>
 </file>
 
+<file path=ppt/slideLayouts/slideLayout2.xml><?xml version="1.0" encoding="utf-8"?>
+<p:sldLayout xmlns:a="http://schemas.openxmlformats.org/drawingml/2006/main" xmlns:r="http://schemas.openxmlformats.org/officeDocument/2006/relationships" xmlns:p="http://schemas.openxmlformats.org/presentationml/2006/main" type="title">
+  <p:cSld name="Title Slide">
+    <p:spTree>
+      <p:nvGrpSpPr>
+        <p:cNvPr id="1" name=""/>
+        <p:cNvGrpSpPr/>
+        <p:nvPr/>
+      </p:nvGrpSpPr>
+      <p:grpSpPr>
+        <a:xfrm>
+          <a:off x="0" y="0"/>
+          <a:ext cx="0" cy="0"/>
+          <a:chOff x="0" y="0"/>
+          <a:chExt cx="0" cy="0"/>
+        </a:xfrm>
+      </p:grpSpPr>
+    </p:spTree>
+    <p:extLst>
+      <p:ext uri="{BB962C8B-B14F-4D97-AF65-F5344CB8AC3E}">
+        <p14:creationId xmlns:p14="http://schemas.microsoft.com/office/powerpoint/2010/main" val="2090598145"/>
+      </p:ext>
+    </p:extLst>
+  </p:cSld>
+  <p:clrMapOvr>
+    <a:masterClrMapping/>
+  </p:clrMapOvr>
+</p:sldLayout>
+</file>
+
 <file path=ppt/slideMasters/slideMaster1.xml><?xml version="1.0" encoding="utf-8"?>
 <p:sldMaster xmlns:a="http://schemas.openxmlformats.org/drawingml/2006/main" xmlns:r="http://schemas.openxmlformats.org/officeDocument/2006/relationships" xmlns:p="http://schemas.openxmlformats.org/presentationml/2006/main">
   <p:cSld>
@@ -2893,6 +3004,7 @@
   <p:clrMap bg1="lt1" tx1="dk1" bg2="lt2" tx2="dk2" accent1="accent1" accent2="accent2" accent3="accent3" accent4="accent4" accent5="accent5" accent6="accent6" hlink="hlink" folHlink="folHlink"/>
   <p:sldLayoutIdLst>
     <p:sldLayoutId id="2147483649" r:id="rId1"/>
+    <p:sldLayoutId id="2147483650" r:id="rId2"/>
   </p:sldLayoutIdLst>
   <p:hf sldNum="0" hdr="0" ftr="0" dt="0"/>
   <p:txStyles>
@@ -3299,7 +3411,7 @@
               <a:buNone/>
             </a:pPr>
             <a:r>
-              <a:rPr lang="en-US" sz="2000" i="1" dirty="0">
+              <a:rPr lang="en-US" sz="2400" i="1" dirty="0">
                 <a:solidFill>
                   <a:srgbClr val="A6A6A6"/>
                 </a:solidFill>
@@ -3309,7 +3421,7 @@
               </a:rPr>
               <a:t>( wait for it… )</a:t>
             </a:r>
-            <a:endParaRPr lang="en-US" sz="2000" dirty="0"/>
+            <a:endParaRPr lang="en-US" sz="2400" dirty="0"/>
           </a:p>
         </p:txBody>
       </p:sp>
@@ -3455,8 +3567,8 @@
         </p:nvSpPr>
         <p:spPr>
           <a:xfrm>
-            <a:off x="594360" y="2651760"/>
-            <a:ext cx="4846320" cy="2194560"/>
+            <a:off x="594359" y="2651760"/>
+            <a:ext cx="5028227" cy="2194560"/>
           </a:xfrm>
           <a:prstGeom prst="roundRect">
             <a:avLst>
@@ -3477,7 +3589,7 @@
           <a:bodyPr/>
           <a:lstStyle/>
           <a:p>
-            <a:endParaRPr lang="en-US"/>
+            <a:endParaRPr lang="en-US" sz="2400"/>
           </a:p>
         </p:txBody>
       </p:sp>
@@ -3506,7 +3618,7 @@
               <a:buNone/>
             </a:pPr>
             <a:r>
-              <a:rPr lang="en-US" sz="1300" b="1" dirty="0">
+              <a:rPr lang="en-US" sz="1600" b="1" dirty="0">
                 <a:solidFill>
                   <a:srgbClr val="75DFBC"/>
                 </a:solidFill>
@@ -3516,7 +3628,7 @@
               </a:rPr>
               <a:t>Component.tsx</a:t>
             </a:r>
-            <a:endParaRPr lang="en-US" sz="1300" dirty="0"/>
+            <a:endParaRPr lang="en-US" sz="1600" dirty="0"/>
           </a:p>
         </p:txBody>
       </p:sp>
@@ -3529,7 +3641,7 @@
         <p:spPr>
           <a:xfrm>
             <a:off x="868680" y="3383280"/>
-            <a:ext cx="4297680" cy="731520"/>
+            <a:ext cx="4500988" cy="731520"/>
           </a:xfrm>
           <a:prstGeom prst="rect">
             <a:avLst/>
@@ -3545,7 +3657,7 @@
               <a:buNone/>
             </a:pPr>
             <a:r>
-              <a:rPr lang="en-US" sz="1300" dirty="0">
+              <a:rPr lang="en-US" dirty="0">
                 <a:solidFill>
                   <a:srgbClr val="D8D8D8"/>
                 </a:solidFill>
@@ -3556,7 +3668,7 @@
               <a:t>&lt;div className=</a:t>
             </a:r>
             <a:r>
-              <a:rPr lang="en-US" sz="1300" dirty="0">
+              <a:rPr lang="en-US" dirty="0">
                 <a:solidFill>
                   <a:srgbClr val="F1CF25"/>
                 </a:solidFill>
@@ -3567,7 +3679,7 @@
               <a:t>"card--featured"</a:t>
             </a:r>
             <a:r>
-              <a:rPr lang="en-US" sz="1300" dirty="0">
+              <a:rPr lang="en-US" dirty="0">
                 <a:solidFill>
                   <a:srgbClr val="D8D8D8"/>
                 </a:solidFill>
@@ -3577,7 +3689,7 @@
               </a:rPr>
               <a:t>&gt;</a:t>
             </a:r>
-            <a:endParaRPr lang="en-US" sz="1300" dirty="0"/>
+            <a:endParaRPr lang="en-US" dirty="0"/>
           </a:p>
         </p:txBody>
       </p:sp>
@@ -3606,7 +3718,7 @@
               <a:buNone/>
             </a:pPr>
             <a:r>
-              <a:rPr lang="en-US" sz="3000" dirty="0">
+              <a:rPr lang="en-US" sz="3600" dirty="0">
                 <a:solidFill>
                   <a:srgbClr val="000000"/>
                 </a:solidFill>
@@ -3616,7 +3728,7 @@
               </a:rPr>
               <a:t>🔗</a:t>
             </a:r>
-            <a:endParaRPr lang="en-US" sz="3000" dirty="0"/>
+            <a:endParaRPr lang="en-US" sz="3600" dirty="0"/>
           </a:p>
         </p:txBody>
       </p:sp>
@@ -3628,8 +3740,8 @@
         </p:nvSpPr>
         <p:spPr>
           <a:xfrm>
-            <a:off x="6766560" y="2651760"/>
-            <a:ext cx="4828032" cy="2194560"/>
+            <a:off x="6566365" y="2651760"/>
+            <a:ext cx="5028227" cy="2194560"/>
           </a:xfrm>
           <a:prstGeom prst="roundRect">
             <a:avLst>
@@ -3650,7 +3762,7 @@
           <a:bodyPr/>
           <a:lstStyle/>
           <a:p>
-            <a:endParaRPr lang="en-US"/>
+            <a:endParaRPr lang="en-US" sz="2400"/>
           </a:p>
         </p:txBody>
       </p:sp>
@@ -3679,7 +3791,7 @@
               <a:buNone/>
             </a:pPr>
             <a:r>
-              <a:rPr lang="en-US" sz="1300" b="1" dirty="0">
+              <a:rPr lang="en-US" sz="1600" b="1" dirty="0">
                 <a:solidFill>
                   <a:srgbClr val="F1CF25"/>
                 </a:solidFill>
@@ -3689,7 +3801,7 @@
               </a:rPr>
               <a:t>styles.css</a:t>
             </a:r>
-            <a:endParaRPr lang="en-US" sz="1300" dirty="0"/>
+            <a:endParaRPr lang="en-US" sz="1600" dirty="0"/>
           </a:p>
         </p:txBody>
       </p:sp>
@@ -3718,7 +3830,7 @@
               <a:buNone/>
             </a:pPr>
             <a:r>
-              <a:rPr lang="en-US" sz="1300" dirty="0">
+              <a:rPr lang="en-US" dirty="0">
                 <a:solidFill>
                   <a:srgbClr val="F1CF25"/>
                 </a:solidFill>
@@ -3729,7 +3841,7 @@
               <a:t>.card--featured</a:t>
             </a:r>
             <a:r>
-              <a:rPr lang="en-US" sz="1300" dirty="0">
+              <a:rPr lang="en-US" dirty="0">
                 <a:solidFill>
                   <a:srgbClr val="D8D8D8"/>
                 </a:solidFill>
@@ -3737,9 +3849,9 @@
                 <a:ea typeface="Courier New" pitchFamily="34" charset="-122"/>
                 <a:cs typeface="Courier New" pitchFamily="34" charset="-120"/>
               </a:rPr>
-              <a:t xml:space="preserve"> { … }</a:t>
-            </a:r>
-            <a:endParaRPr lang="en-US" sz="1300" dirty="0"/>
+              <a:t> { … }</a:t>
+            </a:r>
+            <a:endParaRPr lang="en-US" dirty="0"/>
           </a:p>
         </p:txBody>
       </p:sp>
@@ -3751,7 +3863,7 @@
         </p:nvSpPr>
         <p:spPr>
           <a:xfrm>
-            <a:off x="594360" y="5120640"/>
+            <a:off x="594360" y="5532120"/>
             <a:ext cx="11002975" cy="731520"/>
           </a:xfrm>
           <a:prstGeom prst="rect">
@@ -3771,7 +3883,7 @@
               <a:buNone/>
             </a:pPr>
             <a:r>
-              <a:rPr lang="en-US" sz="1700" dirty="0">
+              <a:rPr lang="en-US" sz="2000" dirty="0">
                 <a:solidFill>
                   <a:srgbClr val="A6A6A6"/>
                 </a:solidFill>
@@ -3781,7 +3893,7 @@
               </a:rPr>
               <a:t>Two files, joined only by a magic string. To understand the component, you must hold both in your head, and so must the model.</a:t>
             </a:r>
-            <a:endParaRPr lang="en-US" sz="1700" dirty="0"/>
+            <a:endParaRPr lang="en-US" sz="2000" dirty="0"/>
           </a:p>
         </p:txBody>
       </p:sp>
@@ -4025,7 +4137,7 @@
         <p:spPr>
           <a:xfrm>
             <a:off x="594360" y="2468880"/>
-            <a:ext cx="11002975" cy="2651760"/>
+            <a:ext cx="11002975" cy="3307210"/>
           </a:xfrm>
           <a:prstGeom prst="roundRect">
             <a:avLst>
@@ -4156,7 +4268,7 @@
               <a:buNone/>
             </a:pPr>
             <a:r>
-              <a:rPr lang="en-US" sz="1000" dirty="0">
+              <a:rPr lang="en-US" sz="1600" dirty="0">
                 <a:solidFill>
                   <a:srgbClr val="6E6E6E"/>
                 </a:solidFill>
@@ -4166,7 +4278,7 @@
               </a:rPr>
               <a:t>PricingCard.tsx (the whole component)</a:t>
             </a:r>
-            <a:endParaRPr lang="en-US" sz="1000" dirty="0"/>
+            <a:endParaRPr lang="en-US" sz="1600" dirty="0"/>
           </a:p>
         </p:txBody>
       </p:sp>
@@ -4178,8 +4290,8 @@
         </p:nvSpPr>
         <p:spPr>
           <a:xfrm>
-            <a:off x="886968" y="3017520"/>
-            <a:ext cx="10417759" cy="1920240"/>
+            <a:off x="886968" y="3017519"/>
+            <a:ext cx="10417759" cy="2605067"/>
           </a:xfrm>
           <a:prstGeom prst="rect">
             <a:avLst/>
@@ -4198,7 +4310,7 @@
               <a:buNone/>
             </a:pPr>
             <a:r>
-              <a:rPr lang="en-US" sz="1500" dirty="0">
+              <a:rPr lang="en-US" dirty="0">
                 <a:solidFill>
                   <a:srgbClr val="6E6E6E"/>
                 </a:solidFill>
@@ -4208,7 +4320,7 @@
               </a:rPr>
               <a:t>// no CSS file. no class names. no cascade.</a:t>
             </a:r>
-            <a:endParaRPr lang="en-US" sz="1500" dirty="0"/>
+            <a:endParaRPr lang="en-US" dirty="0"/>
           </a:p>
           <a:p>
             <a:pPr marL="0" indent="0" algn="l">
@@ -4217,7 +4329,7 @@
               </a:lnSpc>
               <a:buNone/>
             </a:pPr>
-            <a:endParaRPr lang="en-US" sz="1500" dirty="0"/>
+            <a:endParaRPr lang="en-US" dirty="0"/>
           </a:p>
           <a:p>
             <a:pPr marL="0" indent="0" algn="l">
@@ -4227,7 +4339,7 @@
               <a:buNone/>
             </a:pPr>
             <a:r>
-              <a:rPr lang="en-US" sz="1500" dirty="0">
+              <a:rPr lang="en-US" dirty="0">
                 <a:solidFill>
                   <a:srgbClr val="9CDCFE"/>
                 </a:solidFill>
@@ -4238,7 +4350,7 @@
               <a:t>&lt;button</a:t>
             </a:r>
             <a:r>
-              <a:rPr lang="en-US" sz="1500" dirty="0">
+              <a:rPr lang="en-US" dirty="0">
                 <a:solidFill>
                   <a:srgbClr val="D8D8D8"/>
                 </a:solidFill>
@@ -4246,10 +4358,10 @@
                 <a:ea typeface="Courier New" pitchFamily="34" charset="-122"/>
                 <a:cs typeface="Courier New" pitchFamily="34" charset="-120"/>
               </a:rPr>
-              <a:t xml:space="preserve"> className=</a:t>
-            </a:r>
-            <a:r>
-              <a:rPr lang="en-US" sz="1500" dirty="0">
+              <a:t> className=</a:t>
+            </a:r>
+            <a:r>
+              <a:rPr lang="en-US" dirty="0">
                 <a:solidFill>
                   <a:srgbClr val="75DFBC"/>
                 </a:solidFill>
@@ -4259,7 +4371,7 @@
               </a:rPr>
               <a:t>{cn(</a:t>
             </a:r>
-            <a:endParaRPr lang="en-US" sz="1500" dirty="0"/>
+            <a:endParaRPr lang="en-US" dirty="0"/>
           </a:p>
           <a:p>
             <a:pPr marL="0" indent="0" algn="l">
@@ -4269,7 +4381,7 @@
               <a:buNone/>
             </a:pPr>
             <a:r>
-              <a:rPr lang="en-US" sz="1500" dirty="0">
+              <a:rPr lang="en-US" dirty="0">
                 <a:solidFill>
                   <a:srgbClr val="F1CF25"/>
                 </a:solidFill>
@@ -4277,10 +4389,10 @@
                 <a:ea typeface="Courier New" pitchFamily="34" charset="-122"/>
                 <a:cs typeface="Courier New" pitchFamily="34" charset="-120"/>
               </a:rPr>
-              <a:t xml:space="preserve">  "rounded-lg px-4 py-3 font-bold"</a:t>
-            </a:r>
-            <a:r>
-              <a:rPr lang="en-US" sz="1500" dirty="0">
+              <a:t>  "rounded-lg px-4 py-3 font-bold"</a:t>
+            </a:r>
+            <a:r>
+              <a:rPr lang="en-US" dirty="0">
                 <a:solidFill>
                   <a:srgbClr val="D8D8D8"/>
                 </a:solidFill>
@@ -4290,7 +4402,7 @@
               </a:rPr>
               <a:t>,</a:t>
             </a:r>
-            <a:endParaRPr lang="en-US" sz="1500" dirty="0"/>
+            <a:endParaRPr lang="en-US" dirty="0"/>
           </a:p>
           <a:p>
             <a:pPr marL="0" indent="0" algn="l">
@@ -4300,7 +4412,7 @@
               <a:buNone/>
             </a:pPr>
             <a:r>
-              <a:rPr lang="en-US" sz="1500" dirty="0">
+              <a:rPr lang="en-US" dirty="0">
                 <a:solidFill>
                   <a:srgbClr val="9CDCFE"/>
                 </a:solidFill>
@@ -4308,10 +4420,10 @@
                 <a:ea typeface="Courier New" pitchFamily="34" charset="-122"/>
                 <a:cs typeface="Courier New" pitchFamily="34" charset="-120"/>
               </a:rPr>
-              <a:t xml:space="preserve">  featured</a:t>
-            </a:r>
-            <a:r>
-              <a:rPr lang="en-US" sz="1500" dirty="0">
+              <a:t>  featured</a:t>
+            </a:r>
+            <a:r>
+              <a:rPr lang="en-US" dirty="0">
                 <a:solidFill>
                   <a:srgbClr val="D8D8D8"/>
                 </a:solidFill>
@@ -4319,10 +4431,10 @@
                 <a:ea typeface="Courier New" pitchFamily="34" charset="-122"/>
                 <a:cs typeface="Courier New" pitchFamily="34" charset="-120"/>
               </a:rPr>
-              <a:t xml:space="preserve"> &amp;&amp; </a:t>
-            </a:r>
-            <a:r>
-              <a:rPr lang="en-US" sz="1500" dirty="0">
+              <a:t> &amp;&amp; </a:t>
+            </a:r>
+            <a:r>
+              <a:rPr lang="en-US" dirty="0">
                 <a:solidFill>
                   <a:srgbClr val="F1CF25"/>
                 </a:solidFill>
@@ -4332,7 +4444,7 @@
               </a:rPr>
               <a:t>"bg-mint text-ink hover:bg-mint/80"</a:t>
             </a:r>
-            <a:endParaRPr lang="en-US" sz="1500" dirty="0"/>
+            <a:endParaRPr lang="en-US" dirty="0"/>
           </a:p>
           <a:p>
             <a:pPr marL="0" indent="0" algn="l">
@@ -4342,7 +4454,7 @@
               <a:buNone/>
             </a:pPr>
             <a:r>
-              <a:rPr lang="en-US" sz="1500" dirty="0">
+              <a:rPr lang="en-US" dirty="0">
                 <a:solidFill>
                   <a:srgbClr val="75DFBC"/>
                 </a:solidFill>
@@ -4352,7 +4464,7 @@
               </a:rPr>
               <a:t>)}&gt;</a:t>
             </a:r>
-            <a:endParaRPr lang="en-US" sz="1500" dirty="0"/>
+            <a:endParaRPr lang="en-US" dirty="0"/>
           </a:p>
           <a:p>
             <a:pPr marL="0" indent="0" algn="l">
@@ -4362,7 +4474,7 @@
               <a:buNone/>
             </a:pPr>
             <a:r>
-              <a:rPr lang="en-US" sz="1500" dirty="0">
+              <a:rPr lang="en-US" dirty="0">
                 <a:solidFill>
                   <a:srgbClr val="D8D8D8"/>
                 </a:solidFill>
@@ -4370,9 +4482,9 @@
                 <a:ea typeface="Courier New" pitchFamily="34" charset="-122"/>
                 <a:cs typeface="Courier New" pitchFamily="34" charset="-120"/>
               </a:rPr>
-              <a:t xml:space="preserve">  Choose plan</a:t>
-            </a:r>
-            <a:endParaRPr lang="en-US" sz="1500" dirty="0"/>
+              <a:t>  Choose plan</a:t>
+            </a:r>
+            <a:endParaRPr lang="en-US" dirty="0"/>
           </a:p>
           <a:p>
             <a:pPr marL="0" indent="0" algn="l">
@@ -4382,7 +4494,7 @@
               <a:buNone/>
             </a:pPr>
             <a:r>
-              <a:rPr lang="en-US" sz="1500" dirty="0">
+              <a:rPr lang="en-US" dirty="0">
                 <a:solidFill>
                   <a:srgbClr val="9CDCFE"/>
                 </a:solidFill>
@@ -4392,7 +4504,7 @@
               </a:rPr>
               <a:t>&lt;/button&gt;</a:t>
             </a:r>
-            <a:endParaRPr lang="en-US" sz="1500" dirty="0"/>
+            <a:endParaRPr lang="en-US" dirty="0"/>
           </a:p>
         </p:txBody>
       </p:sp>
@@ -4404,7 +4516,7 @@
         </p:nvSpPr>
         <p:spPr>
           <a:xfrm>
-            <a:off x="594360" y="5349240"/>
+            <a:off x="594359" y="5776090"/>
             <a:ext cx="11002975" cy="640080"/>
           </a:xfrm>
           <a:prstGeom prst="rect">
@@ -4424,7 +4536,7 @@
               <a:buNone/>
             </a:pPr>
             <a:r>
-              <a:rPr lang="en-US" sz="1600" i="1" dirty="0">
+              <a:rPr lang="en-US" i="1" dirty="0">
                 <a:solidFill>
                   <a:srgbClr val="75DFBC"/>
                 </a:solidFill>
@@ -4434,7 +4546,7 @@
               </a:rPr>
               <a:t>Markup and style live in one place. An LLM sees the entire spec in one span of tokens.</a:t>
             </a:r>
-            <a:endParaRPr lang="en-US" sz="1600" dirty="0"/>
+            <a:endParaRPr lang="en-US" dirty="0"/>
           </a:p>
         </p:txBody>
       </p:sp>
@@ -4736,7 +4848,7 @@
         </p:nvSpPr>
         <p:spPr>
           <a:xfrm>
-            <a:off x="594360" y="3831336"/>
+            <a:off x="594360" y="4032504"/>
             <a:ext cx="118872" cy="118872"/>
           </a:xfrm>
           <a:prstGeom prst="rect">
@@ -4763,7 +4875,7 @@
         </p:nvSpPr>
         <p:spPr>
           <a:xfrm>
-            <a:off x="886968" y="3749040"/>
+            <a:off x="886968" y="3950208"/>
             <a:ext cx="10710367" cy="457200"/>
           </a:xfrm>
           <a:prstGeom prst="rect">
@@ -4805,7 +4917,7 @@
         </p:nvSpPr>
         <p:spPr>
           <a:xfrm>
-            <a:off x="594360" y="4471416"/>
+            <a:off x="594360" y="4873752"/>
             <a:ext cx="118872" cy="118872"/>
           </a:xfrm>
           <a:prstGeom prst="rect">
@@ -4832,7 +4944,7 @@
         </p:nvSpPr>
         <p:spPr>
           <a:xfrm>
-            <a:off x="886968" y="4389120"/>
+            <a:off x="886968" y="4791456"/>
             <a:ext cx="10710367" cy="457200"/>
           </a:xfrm>
           <a:prstGeom prst="rect">
@@ -4874,7 +4986,7 @@
         </p:nvSpPr>
         <p:spPr>
           <a:xfrm>
-            <a:off x="594360" y="5212080"/>
+            <a:off x="594359" y="5824728"/>
             <a:ext cx="11002975" cy="457200"/>
           </a:xfrm>
           <a:prstGeom prst="rect">
@@ -4891,7 +5003,7 @@
               <a:buNone/>
             </a:pPr>
             <a:r>
-              <a:rPr lang="en-US" sz="1500" dirty="0">
+              <a:rPr lang="en-US" sz="1600" dirty="0">
                 <a:solidFill>
                   <a:srgbClr val="A6A6A6"/>
                 </a:solidFill>
@@ -4901,7 +5013,7 @@
               </a:rPr>
               <a:t>→ npm run dev   ·   watch: does it render correctly first try? Is the spacing consistent?</a:t>
             </a:r>
-            <a:endParaRPr lang="en-US" sz="1500" dirty="0"/>
+            <a:endParaRPr lang="en-US" sz="1600" dirty="0"/>
           </a:p>
         </p:txBody>
       </p:sp>
@@ -5186,7 +5298,7 @@
           <a:bodyPr/>
           <a:lstStyle/>
           <a:p>
-            <a:endParaRPr lang="en-US"/>
+            <a:endParaRPr lang="en-US" sz="2000"/>
           </a:p>
         </p:txBody>
       </p:sp>
@@ -5218,7 +5330,7 @@
               <a:buNone/>
             </a:pPr>
             <a:r>
-              <a:rPr lang="en-US" sz="1600" dirty="0">
+              <a:rPr lang="en-US" dirty="0">
                 <a:solidFill>
                   <a:srgbClr val="FFFFFF"/>
                 </a:solidFill>
@@ -5228,7 +5340,7 @@
               </a:rPr>
               <a:t>LLMs have a bounded context and no project memory</a:t>
             </a:r>
-            <a:endParaRPr lang="en-US" sz="1600" dirty="0"/>
+            <a:endParaRPr lang="en-US" dirty="0"/>
           </a:p>
         </p:txBody>
       </p:sp>
@@ -5240,7 +5352,7 @@
         </p:nvSpPr>
         <p:spPr>
           <a:xfrm>
-            <a:off x="594360" y="3602736"/>
+            <a:off x="594360" y="3831336"/>
             <a:ext cx="118872" cy="118872"/>
           </a:xfrm>
           <a:prstGeom prst="rect">
@@ -5255,7 +5367,7 @@
           <a:bodyPr/>
           <a:lstStyle/>
           <a:p>
-            <a:endParaRPr lang="en-US"/>
+            <a:endParaRPr lang="en-US" sz="2000"/>
           </a:p>
         </p:txBody>
       </p:sp>
@@ -5267,7 +5379,7 @@
         </p:nvSpPr>
         <p:spPr>
           <a:xfrm>
-            <a:off x="886968" y="3520440"/>
+            <a:off x="886968" y="3749040"/>
             <a:ext cx="5742432" cy="457200"/>
           </a:xfrm>
           <a:prstGeom prst="rect">
@@ -5287,7 +5399,7 @@
               <a:buNone/>
             </a:pPr>
             <a:r>
-              <a:rPr lang="en-US" sz="1600" dirty="0">
+              <a:rPr lang="en-US" dirty="0">
                 <a:solidFill>
                   <a:srgbClr val="FFFFFF"/>
                 </a:solidFill>
@@ -5297,7 +5409,7 @@
               </a:rPr>
               <a:t>Co-located styling = the whole spec in one token span</a:t>
             </a:r>
-            <a:endParaRPr lang="en-US" sz="1600" dirty="0"/>
+            <a:endParaRPr lang="en-US" dirty="0"/>
           </a:p>
         </p:txBody>
       </p:sp>
@@ -5309,7 +5421,7 @@
         </p:nvSpPr>
         <p:spPr>
           <a:xfrm>
-            <a:off x="594360" y="4242816"/>
+            <a:off x="594360" y="4701962"/>
             <a:ext cx="118872" cy="118872"/>
           </a:xfrm>
           <a:prstGeom prst="rect">
@@ -5324,7 +5436,7 @@
           <a:bodyPr/>
           <a:lstStyle/>
           <a:p>
-            <a:endParaRPr lang="en-US"/>
+            <a:endParaRPr lang="en-US" sz="2000"/>
           </a:p>
         </p:txBody>
       </p:sp>
@@ -5336,7 +5448,7 @@
         </p:nvSpPr>
         <p:spPr>
           <a:xfrm>
-            <a:off x="886968" y="4160520"/>
+            <a:off x="886968" y="4619666"/>
             <a:ext cx="5742432" cy="457200"/>
           </a:xfrm>
           <a:prstGeom prst="rect">
@@ -5356,7 +5468,7 @@
               <a:buNone/>
             </a:pPr>
             <a:r>
-              <a:rPr lang="en-US" sz="1600" dirty="0">
+              <a:rPr lang="en-US" dirty="0">
                 <a:solidFill>
                   <a:srgbClr val="FFFFFF"/>
                 </a:solidFill>
@@ -5366,7 +5478,7 @@
               </a:rPr>
               <a:t>Semantic CSS = a second file it may never have read</a:t>
             </a:r>
-            <a:endParaRPr lang="en-US" sz="1600" dirty="0"/>
+            <a:endParaRPr lang="en-US" dirty="0"/>
           </a:p>
         </p:txBody>
       </p:sp>
@@ -5378,8 +5490,8 @@
         </p:nvSpPr>
         <p:spPr>
           <a:xfrm>
-            <a:off x="6766560" y="2651760"/>
-            <a:ext cx="4828032" cy="2743200"/>
+            <a:off x="6766559" y="2651759"/>
+            <a:ext cx="5101185" cy="3535031"/>
           </a:xfrm>
           <a:prstGeom prst="roundRect">
             <a:avLst>
@@ -5510,7 +5622,7 @@
               <a:buNone/>
             </a:pPr>
             <a:r>
-              <a:rPr lang="en-US" sz="1000" dirty="0">
+              <a:rPr lang="en-US" dirty="0">
                 <a:solidFill>
                   <a:srgbClr val="6E6E6E"/>
                 </a:solidFill>
@@ -5520,7 +5632,7 @@
               </a:rPr>
               <a:t>context window</a:t>
             </a:r>
-            <a:endParaRPr lang="en-US" sz="1000" dirty="0"/>
+            <a:endParaRPr lang="en-US" dirty="0"/>
           </a:p>
         </p:txBody>
       </p:sp>
@@ -5532,8 +5644,8 @@
         </p:nvSpPr>
         <p:spPr>
           <a:xfrm>
-            <a:off x="7059168" y="3200400"/>
-            <a:ext cx="4242816" cy="2011680"/>
+            <a:off x="7059167" y="3200399"/>
+            <a:ext cx="4468109" cy="2645923"/>
           </a:xfrm>
           <a:prstGeom prst="rect">
             <a:avLst/>
@@ -5552,7 +5664,7 @@
               <a:buNone/>
             </a:pPr>
             <a:r>
-              <a:rPr lang="en-US" sz="1300" dirty="0">
+              <a:rPr lang="en-US" sz="1600" dirty="0">
                 <a:solidFill>
                   <a:srgbClr val="6E6E6E"/>
                 </a:solidFill>
@@ -5562,7 +5674,7 @@
               </a:rPr>
               <a:t>// the model needs BOTH of these,</a:t>
             </a:r>
-            <a:endParaRPr lang="en-US" sz="1300" dirty="0"/>
+            <a:endParaRPr lang="en-US" sz="1600" dirty="0"/>
           </a:p>
           <a:p>
             <a:pPr marL="0" indent="0" algn="l">
@@ -5572,7 +5684,7 @@
               <a:buNone/>
             </a:pPr>
             <a:r>
-              <a:rPr lang="en-US" sz="1300" dirty="0">
+              <a:rPr lang="en-US" sz="1600" dirty="0">
                 <a:solidFill>
                   <a:srgbClr val="6E6E6E"/>
                 </a:solidFill>
@@ -5582,7 +5694,7 @@
               </a:rPr>
               <a:t>// often from different files:</a:t>
             </a:r>
-            <a:endParaRPr lang="en-US" sz="1300" dirty="0"/>
+            <a:endParaRPr lang="en-US" sz="1600" dirty="0"/>
           </a:p>
           <a:p>
             <a:pPr marL="0" indent="0" algn="l">
@@ -5591,7 +5703,7 @@
               </a:lnSpc>
               <a:buNone/>
             </a:pPr>
-            <a:endParaRPr lang="en-US" sz="1300" dirty="0"/>
+            <a:endParaRPr lang="en-US" sz="1600" dirty="0"/>
           </a:p>
           <a:p>
             <a:pPr marL="0" indent="0" algn="l">
@@ -5601,7 +5713,7 @@
               <a:buNone/>
             </a:pPr>
             <a:r>
-              <a:rPr lang="en-US" sz="1300" dirty="0">
+              <a:rPr lang="en-US" sz="1600" dirty="0">
                 <a:solidFill>
                   <a:srgbClr val="D8D8D8"/>
                 </a:solidFill>
@@ -5612,7 +5724,7 @@
               <a:t>&lt;div class=</a:t>
             </a:r>
             <a:r>
-              <a:rPr lang="en-US" sz="1300" dirty="0">
+              <a:rPr lang="en-US" sz="1600" dirty="0">
                 <a:solidFill>
                   <a:srgbClr val="F1CF25"/>
                 </a:solidFill>
@@ -5623,7 +5735,7 @@
               <a:t>"hero"</a:t>
             </a:r>
             <a:r>
-              <a:rPr lang="en-US" sz="1300" dirty="0">
+              <a:rPr lang="en-US" sz="1600" dirty="0">
                 <a:solidFill>
                   <a:srgbClr val="D8D8D8"/>
                 </a:solidFill>
@@ -5633,7 +5745,7 @@
               </a:rPr>
               <a:t>&gt;</a:t>
             </a:r>
-            <a:endParaRPr lang="en-US" sz="1300" dirty="0"/>
+            <a:endParaRPr lang="en-US" sz="1600" dirty="0"/>
           </a:p>
           <a:p>
             <a:pPr marL="0" indent="0" algn="l">
@@ -5643,7 +5755,7 @@
               <a:buNone/>
             </a:pPr>
             <a:r>
-              <a:rPr lang="en-US" sz="1300" dirty="0">
+              <a:rPr lang="en-US" sz="1600" dirty="0">
                 <a:solidFill>
                   <a:srgbClr val="FF6A4C"/>
                 </a:solidFill>
@@ -5654,7 +5766,7 @@
               <a:t>.hero</a:t>
             </a:r>
             <a:r>
-              <a:rPr lang="en-US" sz="1300" dirty="0">
+              <a:rPr lang="en-US" sz="1600" dirty="0">
                 <a:solidFill>
                   <a:srgbClr val="D8D8D8"/>
                 </a:solidFill>
@@ -5662,9 +5774,9 @@
                 <a:ea typeface="Courier New" pitchFamily="34" charset="-122"/>
                 <a:cs typeface="Courier New" pitchFamily="34" charset="-120"/>
               </a:rPr>
-              <a:t xml:space="preserve"> { … 40 lines … }</a:t>
-            </a:r>
-            <a:endParaRPr lang="en-US" sz="1300" dirty="0"/>
+              <a:t> { … 40 lines … }</a:t>
+            </a:r>
+            <a:endParaRPr lang="en-US" sz="1600" dirty="0"/>
           </a:p>
           <a:p>
             <a:pPr marL="0" indent="0" algn="l">
@@ -5673,7 +5785,7 @@
               </a:lnSpc>
               <a:buNone/>
             </a:pPr>
-            <a:endParaRPr lang="en-US" sz="1300" dirty="0"/>
+            <a:endParaRPr lang="en-US" sz="1600" dirty="0"/>
           </a:p>
           <a:p>
             <a:pPr marL="0" indent="0" algn="l">
@@ -5683,7 +5795,7 @@
               <a:buNone/>
             </a:pPr>
             <a:r>
-              <a:rPr lang="en-US" sz="1300" dirty="0">
+              <a:rPr lang="en-US" sz="1600" dirty="0">
                 <a:solidFill>
                   <a:srgbClr val="75DFBC"/>
                 </a:solidFill>
@@ -5693,7 +5805,7 @@
               </a:rPr>
               <a:t>vs. Tailwind: it's all right here</a:t>
             </a:r>
-            <a:endParaRPr lang="en-US" sz="1300" dirty="0"/>
+            <a:endParaRPr lang="en-US" sz="1600" dirty="0"/>
           </a:p>
           <a:p>
             <a:pPr marL="0" indent="0" algn="l">
@@ -5703,7 +5815,7 @@
               <a:buNone/>
             </a:pPr>
             <a:r>
-              <a:rPr lang="en-US" sz="1300" dirty="0">
+              <a:rPr lang="en-US" sz="1600" dirty="0">
                 <a:solidFill>
                   <a:srgbClr val="D8D8D8"/>
                 </a:solidFill>
@@ -5714,7 +5826,7 @@
               <a:t>&lt;div class=</a:t>
             </a:r>
             <a:r>
-              <a:rPr lang="en-US" sz="1300" dirty="0">
+              <a:rPr lang="en-US" sz="1600" dirty="0">
                 <a:solidFill>
                   <a:srgbClr val="F1CF25"/>
                 </a:solidFill>
@@ -5725,7 +5837,7 @@
               <a:t>"grid gap-6 p-8"</a:t>
             </a:r>
             <a:r>
-              <a:rPr lang="en-US" sz="1300" dirty="0">
+              <a:rPr lang="en-US" sz="1600" dirty="0">
                 <a:solidFill>
                   <a:srgbClr val="D8D8D8"/>
                 </a:solidFill>
@@ -5735,7 +5847,7 @@
               </a:rPr>
               <a:t>&gt;</a:t>
             </a:r>
-            <a:endParaRPr lang="en-US" sz="1300" dirty="0"/>
+            <a:endParaRPr lang="en-US" sz="1600" dirty="0"/>
           </a:p>
         </p:txBody>
       </p:sp>
@@ -6020,7 +6132,7 @@
           <a:bodyPr/>
           <a:lstStyle/>
           <a:p>
-            <a:endParaRPr lang="en-US"/>
+            <a:endParaRPr lang="en-US" sz="2000"/>
           </a:p>
         </p:txBody>
       </p:sp>
@@ -6052,7 +6164,7 @@
               <a:buNone/>
             </a:pPr>
             <a:r>
-              <a:rPr lang="en-US" sz="1600" dirty="0">
+              <a:rPr lang="en-US" dirty="0">
                 <a:solidFill>
                   <a:srgbClr val="FFFFFF"/>
                 </a:solidFill>
@@ -6062,7 +6174,7 @@
               </a:rPr>
               <a:t>An LLM is a next-token predictor</a:t>
             </a:r>
-            <a:endParaRPr lang="en-US" sz="1600" dirty="0"/>
+            <a:endParaRPr lang="en-US" dirty="0"/>
           </a:p>
         </p:txBody>
       </p:sp>
@@ -6074,7 +6186,7 @@
         </p:nvSpPr>
         <p:spPr>
           <a:xfrm>
-            <a:off x="594360" y="3602736"/>
+            <a:off x="594360" y="3807017"/>
             <a:ext cx="118872" cy="118872"/>
           </a:xfrm>
           <a:prstGeom prst="rect">
@@ -6089,7 +6201,7 @@
           <a:bodyPr/>
           <a:lstStyle/>
           <a:p>
-            <a:endParaRPr lang="en-US"/>
+            <a:endParaRPr lang="en-US" sz="2000"/>
           </a:p>
         </p:txBody>
       </p:sp>
@@ -6101,7 +6213,7 @@
         </p:nvSpPr>
         <p:spPr>
           <a:xfrm>
-            <a:off x="886968" y="3520440"/>
+            <a:off x="886968" y="3724721"/>
             <a:ext cx="5742432" cy="457200"/>
           </a:xfrm>
           <a:prstGeom prst="rect">
@@ -6121,7 +6233,7 @@
               <a:buNone/>
             </a:pPr>
             <a:r>
-              <a:rPr lang="en-US" sz="1600" dirty="0">
+              <a:rPr lang="en-US" dirty="0">
                 <a:solidFill>
                   <a:srgbClr val="FFFFFF"/>
                 </a:solidFill>
@@ -6131,7 +6243,7 @@
               </a:rPr>
               <a:t>“flex items-center justify-between” = a fixed phrase</a:t>
             </a:r>
-            <a:endParaRPr lang="en-US" sz="1600" dirty="0"/>
+            <a:endParaRPr lang="en-US" dirty="0"/>
           </a:p>
         </p:txBody>
       </p:sp>
@@ -6143,7 +6255,7 @@
         </p:nvSpPr>
         <p:spPr>
           <a:xfrm>
-            <a:off x="594360" y="4242816"/>
+            <a:off x="594360" y="4608576"/>
             <a:ext cx="118872" cy="118872"/>
           </a:xfrm>
           <a:prstGeom prst="rect">
@@ -6158,7 +6270,7 @@
           <a:bodyPr/>
           <a:lstStyle/>
           <a:p>
-            <a:endParaRPr lang="en-US"/>
+            <a:endParaRPr lang="en-US" sz="2000"/>
           </a:p>
         </p:txBody>
       </p:sp>
@@ -6170,7 +6282,7 @@
         </p:nvSpPr>
         <p:spPr>
           <a:xfrm>
-            <a:off x="886968" y="4160520"/>
+            <a:off x="886968" y="4526280"/>
             <a:ext cx="5742432" cy="457200"/>
           </a:xfrm>
           <a:prstGeom prst="rect">
@@ -6190,7 +6302,7 @@
               <a:buNone/>
             </a:pPr>
             <a:r>
-              <a:rPr lang="en-US" sz="1600" dirty="0">
+              <a:rPr lang="en-US" dirty="0">
                 <a:solidFill>
                   <a:srgbClr val="FFFFFF"/>
                 </a:solidFill>
@@ -6200,7 +6312,7 @@
               </a:rPr>
               <a:t>seen millions of times → low perplexity, high accuracy</a:t>
             </a:r>
-            <a:endParaRPr lang="en-US" sz="1600" dirty="0"/>
+            <a:endParaRPr lang="en-US" dirty="0"/>
           </a:p>
         </p:txBody>
       </p:sp>
@@ -6212,7 +6324,7 @@
         </p:nvSpPr>
         <p:spPr>
           <a:xfrm>
-            <a:off x="594360" y="4882896"/>
+            <a:off x="594360" y="5410135"/>
             <a:ext cx="118872" cy="118872"/>
           </a:xfrm>
           <a:prstGeom prst="rect">
@@ -6227,7 +6339,7 @@
           <a:bodyPr/>
           <a:lstStyle/>
           <a:p>
-            <a:endParaRPr lang="en-US"/>
+            <a:endParaRPr lang="en-US" sz="2000"/>
           </a:p>
         </p:txBody>
       </p:sp>
@@ -6239,7 +6351,7 @@
         </p:nvSpPr>
         <p:spPr>
           <a:xfrm>
-            <a:off x="886968" y="4800600"/>
+            <a:off x="886968" y="5327839"/>
             <a:ext cx="5742432" cy="457200"/>
           </a:xfrm>
           <a:prstGeom prst="rect">
@@ -6259,7 +6371,7 @@
               <a:buNone/>
             </a:pPr>
             <a:r>
-              <a:rPr lang="en-US" sz="1600" dirty="0">
+              <a:rPr lang="en-US" dirty="0">
                 <a:solidFill>
                   <a:srgbClr val="FFFFFF"/>
                 </a:solidFill>
@@ -6269,7 +6381,7 @@
               </a:rPr>
               <a:t>Arbitrary CSS = infinite names, orders, units → drift</a:t>
             </a:r>
-            <a:endParaRPr lang="en-US" sz="1600" dirty="0"/>
+            <a:endParaRPr lang="en-US" dirty="0"/>
           </a:p>
         </p:txBody>
       </p:sp>
@@ -6303,7 +6415,7 @@
           <a:bodyPr/>
           <a:lstStyle/>
           <a:p>
-            <a:endParaRPr lang="en-US"/>
+            <a:endParaRPr lang="en-US" sz="2800"/>
           </a:p>
         </p:txBody>
       </p:sp>
@@ -6332,7 +6444,7 @@
               <a:buNone/>
             </a:pPr>
             <a:r>
-              <a:rPr lang="en-US" sz="1100" dirty="0">
+              <a:rPr lang="en-US" sz="1600" dirty="0">
                 <a:solidFill>
                   <a:srgbClr val="6E6E6E"/>
                 </a:solidFill>
@@ -6342,7 +6454,7 @@
               </a:rPr>
               <a:t>predictability</a:t>
             </a:r>
-            <a:endParaRPr lang="en-US" sz="1100" dirty="0"/>
+            <a:endParaRPr lang="en-US" sz="1600" dirty="0"/>
           </a:p>
         </p:txBody>
       </p:sp>
@@ -6371,7 +6483,7 @@
               <a:buNone/>
             </a:pPr>
             <a:r>
-              <a:rPr lang="en-US" sz="1300" b="1" dirty="0">
+              <a:rPr lang="en-US" b="1" dirty="0">
                 <a:solidFill>
                   <a:srgbClr val="75DFBC"/>
                 </a:solidFill>
@@ -6382,7 +6494,7 @@
               <a:t>Tailwind</a:t>
             </a:r>
             <a:r>
-              <a:rPr lang="en-US" sz="1300" dirty="0">
+              <a:rPr lang="en-US" dirty="0">
                 <a:solidFill>
                   <a:srgbClr val="F1CF25"/>
                 </a:solidFill>
@@ -6390,9 +6502,9 @@
                 <a:ea typeface="Courier New" pitchFamily="34" charset="-122"/>
                 <a:cs typeface="Courier New" pitchFamily="34" charset="-120"/>
               </a:rPr>
-              <a:t xml:space="preserve">   flex items-center</a:t>
-            </a:r>
-            <a:endParaRPr lang="en-US" sz="1300" dirty="0"/>
+              <a:t>   flex items-center</a:t>
+            </a:r>
+            <a:endParaRPr lang="en-US" dirty="0"/>
           </a:p>
         </p:txBody>
       </p:sp>
@@ -6421,7 +6533,7 @@
           <a:bodyPr/>
           <a:lstStyle/>
           <a:p>
-            <a:endParaRPr lang="en-US"/>
+            <a:endParaRPr lang="en-US" sz="2800"/>
           </a:p>
         </p:txBody>
       </p:sp>
@@ -6450,7 +6562,7 @@
               <a:buNone/>
             </a:pPr>
             <a:r>
-              <a:rPr lang="en-US" sz="1300" b="1" dirty="0">
+              <a:rPr lang="en-US" b="1" dirty="0">
                 <a:solidFill>
                   <a:srgbClr val="FF6A4C"/>
                 </a:solidFill>
@@ -6461,7 +6573,7 @@
               <a:t>Semantic</a:t>
             </a:r>
             <a:r>
-              <a:rPr lang="en-US" sz="1300" dirty="0">
+              <a:rPr lang="en-US" dirty="0">
                 <a:solidFill>
                   <a:srgbClr val="A6A6A6"/>
                 </a:solidFill>
@@ -6469,9 +6581,9 @@
                 <a:ea typeface="Courier New" pitchFamily="34" charset="-122"/>
                 <a:cs typeface="Courier New" pitchFamily="34" charset="-120"/>
               </a:rPr>
-              <a:t xml:space="preserve">  .hero-banner-x</a:t>
-            </a:r>
-            <a:endParaRPr lang="en-US" sz="1300" dirty="0"/>
+              <a:t>  .hero-banner-x</a:t>
+            </a:r>
+            <a:endParaRPr lang="en-US" dirty="0"/>
           </a:p>
         </p:txBody>
       </p:sp>
@@ -6500,7 +6612,7 @@
           <a:bodyPr/>
           <a:lstStyle/>
           <a:p>
-            <a:endParaRPr lang="en-US"/>
+            <a:endParaRPr lang="en-US" sz="2800"/>
           </a:p>
         </p:txBody>
       </p:sp>
@@ -6529,7 +6641,7 @@
               <a:buNone/>
             </a:pPr>
             <a:r>
-              <a:rPr lang="en-US" sz="1100" i="1" dirty="0">
+              <a:rPr lang="en-US" sz="1600" i="1" dirty="0">
                 <a:solidFill>
                   <a:srgbClr val="6E6E6E"/>
                 </a:solidFill>
@@ -6539,7 +6651,7 @@
               </a:rPr>
               <a:t>model confidence in the next token</a:t>
             </a:r>
-            <a:endParaRPr lang="en-US" sz="1100" dirty="0"/>
+            <a:endParaRPr lang="en-US" sz="1600" dirty="0"/>
           </a:p>
         </p:txBody>
       </p:sp>
@@ -6824,7 +6936,7 @@
           <a:bodyPr/>
           <a:lstStyle/>
           <a:p>
-            <a:endParaRPr lang="en-US"/>
+            <a:endParaRPr lang="en-US" sz="2400"/>
           </a:p>
         </p:txBody>
       </p:sp>
@@ -6856,7 +6968,7 @@
               <a:buNone/>
             </a:pPr>
             <a:r>
-              <a:rPr lang="en-US" sz="1600" dirty="0">
+              <a:rPr lang="en-US" sz="2000" dirty="0">
                 <a:solidFill>
                   <a:srgbClr val="FFFFFF"/>
                 </a:solidFill>
@@ -6866,7 +6978,7 @@
               </a:rPr>
               <a:t>Spacing, color, radius all come from a fixed scale</a:t>
             </a:r>
-            <a:endParaRPr lang="en-US" sz="1600" dirty="0"/>
+            <a:endParaRPr lang="en-US" sz="2000" dirty="0"/>
           </a:p>
         </p:txBody>
       </p:sp>
@@ -6878,7 +6990,7 @@
         </p:nvSpPr>
         <p:spPr>
           <a:xfrm>
-            <a:off x="594360" y="3602736"/>
+            <a:off x="594360" y="3937367"/>
             <a:ext cx="118872" cy="118872"/>
           </a:xfrm>
           <a:prstGeom prst="rect">
@@ -6893,7 +7005,7 @@
           <a:bodyPr/>
           <a:lstStyle/>
           <a:p>
-            <a:endParaRPr lang="en-US"/>
+            <a:endParaRPr lang="en-US" sz="2400"/>
           </a:p>
         </p:txBody>
       </p:sp>
@@ -6905,7 +7017,7 @@
         </p:nvSpPr>
         <p:spPr>
           <a:xfrm>
-            <a:off x="886968" y="3520440"/>
+            <a:off x="886968" y="3855071"/>
             <a:ext cx="5742432" cy="457200"/>
           </a:xfrm>
           <a:prstGeom prst="rect">
@@ -6925,7 +7037,7 @@
               <a:buNone/>
             </a:pPr>
             <a:r>
-              <a:rPr lang="en-US" sz="1600" dirty="0">
+              <a:rPr lang="en-US" sz="2000" dirty="0">
                 <a:solidFill>
                   <a:srgbClr val="FFFFFF"/>
                 </a:solidFill>
@@ -6935,7 +7047,7 @@
               </a:rPr>
               <a:t>The model picks p-4 from a menu…</a:t>
             </a:r>
-            <a:endParaRPr lang="en-US" sz="1600" dirty="0"/>
+            <a:endParaRPr lang="en-US" sz="2000" dirty="0"/>
           </a:p>
         </p:txBody>
       </p:sp>
@@ -6947,7 +7059,7 @@
         </p:nvSpPr>
         <p:spPr>
           <a:xfrm>
-            <a:off x="594360" y="4242816"/>
+            <a:off x="594360" y="4822585"/>
             <a:ext cx="118872" cy="118872"/>
           </a:xfrm>
           <a:prstGeom prst="rect">
@@ -6962,7 +7074,7 @@
           <a:bodyPr/>
           <a:lstStyle/>
           <a:p>
-            <a:endParaRPr lang="en-US"/>
+            <a:endParaRPr lang="en-US" sz="2400"/>
           </a:p>
         </p:txBody>
       </p:sp>
@@ -6974,7 +7086,7 @@
         </p:nvSpPr>
         <p:spPr>
           <a:xfrm>
-            <a:off x="886968" y="4160520"/>
+            <a:off x="886968" y="4740289"/>
             <a:ext cx="5742432" cy="457200"/>
           </a:xfrm>
           <a:prstGeom prst="rect">
@@ -6994,7 +7106,7 @@
               <a:buNone/>
             </a:pPr>
             <a:r>
-              <a:rPr lang="en-US" sz="1600" dirty="0">
+              <a:rPr lang="en-US" sz="2000" dirty="0">
                 <a:solidFill>
                   <a:srgbClr val="FFFFFF"/>
                 </a:solidFill>
@@ -7004,7 +7116,7 @@
               </a:rPr>
               <a:t>…instead of hallucinating padding: 13px</a:t>
             </a:r>
-            <a:endParaRPr lang="en-US" sz="1600" dirty="0"/>
+            <a:endParaRPr lang="en-US" sz="2000" dirty="0"/>
           </a:p>
         </p:txBody>
       </p:sp>
@@ -7016,7 +7128,7 @@
         </p:nvSpPr>
         <p:spPr>
           <a:xfrm>
-            <a:off x="594360" y="4882896"/>
+            <a:off x="594360" y="5724144"/>
             <a:ext cx="118872" cy="118872"/>
           </a:xfrm>
           <a:prstGeom prst="rect">
@@ -7031,7 +7143,7 @@
           <a:bodyPr/>
           <a:lstStyle/>
           <a:p>
-            <a:endParaRPr lang="en-US"/>
+            <a:endParaRPr lang="en-US" sz="2400"/>
           </a:p>
         </p:txBody>
       </p:sp>
@@ -7043,7 +7155,7 @@
         </p:nvSpPr>
         <p:spPr>
           <a:xfrm>
-            <a:off x="886968" y="4800600"/>
+            <a:off x="886968" y="5641848"/>
             <a:ext cx="5742432" cy="457200"/>
           </a:xfrm>
           <a:prstGeom prst="rect">
@@ -7063,7 +7175,7 @@
               <a:buNone/>
             </a:pPr>
             <a:r>
-              <a:rPr lang="en-US" sz="1600" dirty="0">
+              <a:rPr lang="en-US" sz="2000" dirty="0">
                 <a:solidFill>
                   <a:srgbClr val="FFFFFF"/>
                 </a:solidFill>
@@ -7073,7 +7185,7 @@
               </a:rPr>
               <a:t>Constraints guide the model</a:t>
             </a:r>
-            <a:endParaRPr lang="en-US" sz="1600" dirty="0"/>
+            <a:endParaRPr lang="en-US" sz="2000" dirty="0"/>
           </a:p>
         </p:txBody>
       </p:sp>
@@ -7107,7 +7219,7 @@
           <a:bodyPr/>
           <a:lstStyle/>
           <a:p>
-            <a:endParaRPr lang="en-US"/>
+            <a:endParaRPr lang="en-US" sz="2800"/>
           </a:p>
         </p:txBody>
       </p:sp>
@@ -7136,7 +7248,7 @@
               <a:buNone/>
             </a:pPr>
             <a:r>
-              <a:rPr lang="en-US" sz="1100" dirty="0">
+              <a:rPr lang="en-US" sz="1600" dirty="0">
                 <a:solidFill>
                   <a:srgbClr val="A6A6A6"/>
                 </a:solidFill>
@@ -7146,7 +7258,7 @@
               </a:rPr>
               <a:t>p-1</a:t>
             </a:r>
-            <a:endParaRPr lang="en-US" sz="1100" dirty="0"/>
+            <a:endParaRPr lang="en-US" sz="1600" dirty="0"/>
           </a:p>
         </p:txBody>
       </p:sp>
@@ -7180,7 +7292,7 @@
           <a:bodyPr/>
           <a:lstStyle/>
           <a:p>
-            <a:endParaRPr lang="en-US"/>
+            <a:endParaRPr lang="en-US" sz="2800"/>
           </a:p>
         </p:txBody>
       </p:sp>
@@ -7209,7 +7321,7 @@
               <a:buNone/>
             </a:pPr>
             <a:r>
-              <a:rPr lang="en-US" sz="1100" dirty="0">
+              <a:rPr lang="en-US" sz="1600" dirty="0">
                 <a:solidFill>
                   <a:srgbClr val="A6A6A6"/>
                 </a:solidFill>
@@ -7219,7 +7331,7 @@
               </a:rPr>
               <a:t>p-2</a:t>
             </a:r>
-            <a:endParaRPr lang="en-US" sz="1100" dirty="0"/>
+            <a:endParaRPr lang="en-US" sz="1600" dirty="0"/>
           </a:p>
         </p:txBody>
       </p:sp>
@@ -7253,7 +7365,7 @@
           <a:bodyPr/>
           <a:lstStyle/>
           <a:p>
-            <a:endParaRPr lang="en-US"/>
+            <a:endParaRPr lang="en-US" sz="2800"/>
           </a:p>
         </p:txBody>
       </p:sp>
@@ -7282,7 +7394,7 @@
               <a:buNone/>
             </a:pPr>
             <a:r>
-              <a:rPr lang="en-US" sz="1100" dirty="0">
+              <a:rPr lang="en-US" sz="1600" dirty="0">
                 <a:solidFill>
                   <a:srgbClr val="A6A6A6"/>
                 </a:solidFill>
@@ -7292,7 +7404,7 @@
               </a:rPr>
               <a:t>p-3</a:t>
             </a:r>
-            <a:endParaRPr lang="en-US" sz="1100" dirty="0"/>
+            <a:endParaRPr lang="en-US" sz="1600" dirty="0"/>
           </a:p>
         </p:txBody>
       </p:sp>
@@ -7326,7 +7438,7 @@
           <a:bodyPr/>
           <a:lstStyle/>
           <a:p>
-            <a:endParaRPr lang="en-US"/>
+            <a:endParaRPr lang="en-US" sz="2800"/>
           </a:p>
         </p:txBody>
       </p:sp>
@@ -7355,7 +7467,7 @@
               <a:buNone/>
             </a:pPr>
             <a:r>
-              <a:rPr lang="en-US" sz="1100" dirty="0">
+              <a:rPr lang="en-US" sz="1600" dirty="0">
                 <a:solidFill>
                   <a:srgbClr val="75DFBC"/>
                 </a:solidFill>
@@ -7365,7 +7477,7 @@
               </a:rPr>
               <a:t>p-4</a:t>
             </a:r>
-            <a:endParaRPr lang="en-US" sz="1100" dirty="0"/>
+            <a:endParaRPr lang="en-US" sz="1600" dirty="0"/>
           </a:p>
         </p:txBody>
       </p:sp>
@@ -7399,7 +7511,7 @@
           <a:bodyPr/>
           <a:lstStyle/>
           <a:p>
-            <a:endParaRPr lang="en-US"/>
+            <a:endParaRPr lang="en-US" sz="2800"/>
           </a:p>
         </p:txBody>
       </p:sp>
@@ -7428,7 +7540,7 @@
               <a:buNone/>
             </a:pPr>
             <a:r>
-              <a:rPr lang="en-US" sz="1100" dirty="0">
+              <a:rPr lang="en-US" sz="1600" dirty="0">
                 <a:solidFill>
                   <a:srgbClr val="A6A6A6"/>
                 </a:solidFill>
@@ -7438,7 +7550,7 @@
               </a:rPr>
               <a:t>p-6</a:t>
             </a:r>
-            <a:endParaRPr lang="en-US" sz="1100" dirty="0"/>
+            <a:endParaRPr lang="en-US" sz="1600" dirty="0"/>
           </a:p>
         </p:txBody>
       </p:sp>
@@ -7472,7 +7584,7 @@
           <a:bodyPr/>
           <a:lstStyle/>
           <a:p>
-            <a:endParaRPr lang="en-US"/>
+            <a:endParaRPr lang="en-US" sz="2800"/>
           </a:p>
         </p:txBody>
       </p:sp>
@@ -7501,7 +7613,7 @@
               <a:buNone/>
             </a:pPr>
             <a:r>
-              <a:rPr lang="en-US" sz="1100" dirty="0">
+              <a:rPr lang="en-US" sz="1600" dirty="0">
                 <a:solidFill>
                   <a:srgbClr val="A6A6A6"/>
                 </a:solidFill>
@@ -7511,7 +7623,7 @@
               </a:rPr>
               <a:t>p-8</a:t>
             </a:r>
-            <a:endParaRPr lang="en-US" sz="1100" dirty="0"/>
+            <a:endParaRPr lang="en-US" sz="1600" dirty="0"/>
           </a:p>
         </p:txBody>
       </p:sp>
@@ -7540,7 +7652,7 @@
               <a:buNone/>
             </a:pPr>
             <a:r>
-              <a:rPr lang="en-US" sz="1300" i="1" dirty="0">
+              <a:rPr lang="en-US" i="1" dirty="0">
                 <a:solidFill>
                   <a:srgbClr val="6E6E6E"/>
                 </a:solidFill>
@@ -7550,7 +7662,7 @@
               </a:rPr>
               <a:t>a small, safe menu</a:t>
             </a:r>
-            <a:endParaRPr lang="en-US" sz="1300" dirty="0"/>
+            <a:endParaRPr lang="en-US" dirty="0"/>
           </a:p>
         </p:txBody>
       </p:sp>
@@ -7835,7 +7947,7 @@
           <a:bodyPr/>
           <a:lstStyle/>
           <a:p>
-            <a:endParaRPr lang="en-US"/>
+            <a:endParaRPr lang="en-US" sz="2000"/>
           </a:p>
         </p:txBody>
       </p:sp>
@@ -7867,7 +7979,7 @@
               <a:buNone/>
             </a:pPr>
             <a:r>
-              <a:rPr lang="en-US" sz="1600" dirty="0">
+              <a:rPr lang="en-US" dirty="0">
                 <a:solidFill>
                   <a:srgbClr val="FFFFFF"/>
                 </a:solidFill>
@@ -7877,7 +7989,7 @@
               </a:rPr>
               <a:t>mt-4 == margin-top: 1rem in every repo on earth</a:t>
             </a:r>
-            <a:endParaRPr lang="en-US" sz="1600" dirty="0"/>
+            <a:endParaRPr lang="en-US" dirty="0"/>
           </a:p>
         </p:txBody>
       </p:sp>
@@ -7889,7 +8001,7 @@
         </p:nvSpPr>
         <p:spPr>
           <a:xfrm>
-            <a:off x="594360" y="3602736"/>
+            <a:off x="594360" y="3739896"/>
             <a:ext cx="118872" cy="118872"/>
           </a:xfrm>
           <a:prstGeom prst="rect">
@@ -7904,7 +8016,7 @@
           <a:bodyPr/>
           <a:lstStyle/>
           <a:p>
-            <a:endParaRPr lang="en-US"/>
+            <a:endParaRPr lang="en-US" sz="2000"/>
           </a:p>
         </p:txBody>
       </p:sp>
@@ -7916,7 +8028,7 @@
         </p:nvSpPr>
         <p:spPr>
           <a:xfrm>
-            <a:off x="886968" y="3520440"/>
+            <a:off x="886968" y="3657600"/>
             <a:ext cx="5742432" cy="457200"/>
           </a:xfrm>
           <a:prstGeom prst="rect">
@@ -7936,7 +8048,7 @@
               <a:buNone/>
             </a:pPr>
             <a:r>
-              <a:rPr lang="en-US" sz="1600" dirty="0">
+              <a:rPr lang="en-US" dirty="0">
                 <a:solidFill>
                   <a:srgbClr val="FFFFFF"/>
                 </a:solidFill>
@@ -7946,7 +8058,7 @@
               </a:rPr>
               <a:t>No “what does .spacer mean in THIS project?”</a:t>
             </a:r>
-            <a:endParaRPr lang="en-US" sz="1600" dirty="0"/>
+            <a:endParaRPr lang="en-US" dirty="0"/>
           </a:p>
         </p:txBody>
       </p:sp>
@@ -7958,7 +8070,7 @@
         </p:nvSpPr>
         <p:spPr>
           <a:xfrm>
-            <a:off x="594360" y="4242816"/>
+            <a:off x="594360" y="4581144"/>
             <a:ext cx="118872" cy="118872"/>
           </a:xfrm>
           <a:prstGeom prst="rect">
@@ -7973,7 +8085,7 @@
           <a:bodyPr/>
           <a:lstStyle/>
           <a:p>
-            <a:endParaRPr lang="en-US"/>
+            <a:endParaRPr lang="en-US" sz="2000"/>
           </a:p>
         </p:txBody>
       </p:sp>
@@ -7985,7 +8097,7 @@
         </p:nvSpPr>
         <p:spPr>
           <a:xfrm>
-            <a:off x="886968" y="4160520"/>
+            <a:off x="886968" y="4498848"/>
             <a:ext cx="5742432" cy="457200"/>
           </a:xfrm>
           <a:prstGeom prst="rect">
@@ -8005,7 +8117,7 @@
               <a:buNone/>
             </a:pPr>
             <a:r>
-              <a:rPr lang="en-US" sz="1600" dirty="0">
+              <a:rPr lang="en-US" dirty="0">
                 <a:solidFill>
                   <a:srgbClr val="FFFFFF"/>
                 </a:solidFill>
@@ -8015,7 +8127,7 @@
               </a:rPr>
               <a:t>Training generalizes across the entire corpus</a:t>
             </a:r>
-            <a:endParaRPr lang="en-US" sz="1600" dirty="0"/>
+            <a:endParaRPr lang="en-US" dirty="0"/>
           </a:p>
         </p:txBody>
       </p:sp>
@@ -8027,7 +8139,7 @@
         </p:nvSpPr>
         <p:spPr>
           <a:xfrm>
-            <a:off x="594360" y="4882896"/>
+            <a:off x="594360" y="5413248"/>
             <a:ext cx="118872" cy="118872"/>
           </a:xfrm>
           <a:prstGeom prst="rect">
@@ -8042,7 +8154,7 @@
           <a:bodyPr/>
           <a:lstStyle/>
           <a:p>
-            <a:endParaRPr lang="en-US"/>
+            <a:endParaRPr lang="en-US" sz="2000"/>
           </a:p>
         </p:txBody>
       </p:sp>
@@ -8054,7 +8166,7 @@
         </p:nvSpPr>
         <p:spPr>
           <a:xfrm>
-            <a:off x="886968" y="4800600"/>
+            <a:off x="886968" y="5330952"/>
             <a:ext cx="5742432" cy="457200"/>
           </a:xfrm>
           <a:prstGeom prst="rect">
@@ -8074,7 +8186,7 @@
               <a:buNone/>
             </a:pPr>
             <a:r>
-              <a:rPr lang="en-US" sz="1600" dirty="0">
+              <a:rPr lang="en-US" dirty="0">
                 <a:solidFill>
                   <a:srgbClr val="FFFFFF"/>
                 </a:solidFill>
@@ -8084,7 +8196,7 @@
               </a:rPr>
               <a:t>Bespoke class names are project-local; they don't</a:t>
             </a:r>
-            <a:endParaRPr lang="en-US" sz="1600" dirty="0"/>
+            <a:endParaRPr lang="en-US" dirty="0"/>
           </a:p>
         </p:txBody>
       </p:sp>
@@ -8097,7 +8209,7 @@
         <p:spPr>
           <a:xfrm>
             <a:off x="6766560" y="2651760"/>
-            <a:ext cx="4828032" cy="2468880"/>
+            <a:ext cx="4955270" cy="3350206"/>
           </a:xfrm>
           <a:prstGeom prst="roundRect">
             <a:avLst>
@@ -8145,7 +8257,7 @@
           <a:bodyPr/>
           <a:lstStyle/>
           <a:p>
-            <a:endParaRPr lang="en-US"/>
+            <a:endParaRPr lang="en-US" sz="2000"/>
           </a:p>
         </p:txBody>
       </p:sp>
@@ -8172,7 +8284,7 @@
           <a:bodyPr/>
           <a:lstStyle/>
           <a:p>
-            <a:endParaRPr lang="en-US"/>
+            <a:endParaRPr lang="en-US" sz="2000"/>
           </a:p>
         </p:txBody>
       </p:sp>
@@ -8199,7 +8311,7 @@
           <a:bodyPr/>
           <a:lstStyle/>
           <a:p>
-            <a:endParaRPr lang="en-US"/>
+            <a:endParaRPr lang="en-US" sz="2000"/>
           </a:p>
         </p:txBody>
       </p:sp>
@@ -8228,7 +8340,7 @@
               <a:buNone/>
             </a:pPr>
             <a:r>
-              <a:rPr lang="en-US" sz="1000" dirty="0">
+              <a:rPr lang="en-US" sz="1600" dirty="0">
                 <a:solidFill>
                   <a:srgbClr val="6E6E6E"/>
                 </a:solidFill>
@@ -8238,7 +8350,7 @@
               </a:rPr>
               <a:t>stable across every codebase</a:t>
             </a:r>
-            <a:endParaRPr lang="en-US" sz="1000" dirty="0"/>
+            <a:endParaRPr lang="en-US" sz="1600" dirty="0"/>
           </a:p>
         </p:txBody>
       </p:sp>
@@ -8270,7 +8382,7 @@
               <a:buNone/>
             </a:pPr>
             <a:r>
-              <a:rPr lang="en-US" sz="1400" dirty="0">
+              <a:rPr lang="en-US" sz="2000" dirty="0">
                 <a:solidFill>
                   <a:srgbClr val="75DFBC"/>
                 </a:solidFill>
@@ -8281,7 +8393,7 @@
               <a:t>mt-4</a:t>
             </a:r>
             <a:r>
-              <a:rPr lang="en-US" sz="1400" dirty="0">
+              <a:rPr lang="en-US" sz="2000" dirty="0">
                 <a:solidFill>
                   <a:srgbClr val="A6A6A6"/>
                 </a:solidFill>
@@ -8289,9 +8401,9 @@
                 <a:ea typeface="Courier New" pitchFamily="34" charset="-122"/>
                 <a:cs typeface="Courier New" pitchFamily="34" charset="-120"/>
               </a:rPr>
-              <a:t xml:space="preserve">   → margin-top: 1rem</a:t>
-            </a:r>
-            <a:endParaRPr lang="en-US" sz="1400" dirty="0"/>
+              <a:t>   → margin-top: 1rem</a:t>
+            </a:r>
+            <a:endParaRPr lang="en-US" sz="2000" dirty="0"/>
           </a:p>
           <a:p>
             <a:pPr marL="0" indent="0" algn="l">
@@ -8301,7 +8413,7 @@
               <a:buNone/>
             </a:pPr>
             <a:r>
-              <a:rPr lang="en-US" sz="1400" dirty="0">
+              <a:rPr lang="en-US" sz="2000" dirty="0">
                 <a:solidFill>
                   <a:srgbClr val="75DFBC"/>
                 </a:solidFill>
@@ -8312,7 +8424,7 @@
               <a:t>flex</a:t>
             </a:r>
             <a:r>
-              <a:rPr lang="en-US" sz="1400" dirty="0">
+              <a:rPr lang="en-US" sz="2000" dirty="0">
                 <a:solidFill>
                   <a:srgbClr val="A6A6A6"/>
                 </a:solidFill>
@@ -8320,9 +8432,9 @@
                 <a:ea typeface="Courier New" pitchFamily="34" charset="-122"/>
                 <a:cs typeface="Courier New" pitchFamily="34" charset="-120"/>
               </a:rPr>
-              <a:t xml:space="preserve">   → display: flex</a:t>
-            </a:r>
-            <a:endParaRPr lang="en-US" sz="1400" dirty="0"/>
+              <a:t>   → display: flex</a:t>
+            </a:r>
+            <a:endParaRPr lang="en-US" sz="2000" dirty="0"/>
           </a:p>
           <a:p>
             <a:pPr marL="0" indent="0" algn="l">
@@ -8332,7 +8444,7 @@
               <a:buNone/>
             </a:pPr>
             <a:r>
-              <a:rPr lang="en-US" sz="1400" dirty="0">
+              <a:rPr lang="en-US" sz="2000" dirty="0">
                 <a:solidFill>
                   <a:srgbClr val="75DFBC"/>
                 </a:solidFill>
@@ -8343,7 +8455,7 @@
               <a:t>gap-6</a:t>
             </a:r>
             <a:r>
-              <a:rPr lang="en-US" sz="1400" dirty="0">
+              <a:rPr lang="en-US" sz="2000" dirty="0">
                 <a:solidFill>
                   <a:srgbClr val="A6A6A6"/>
                 </a:solidFill>
@@ -8351,9 +8463,9 @@
                 <a:ea typeface="Courier New" pitchFamily="34" charset="-122"/>
                 <a:cs typeface="Courier New" pitchFamily="34" charset="-120"/>
               </a:rPr>
-              <a:t xml:space="preserve">  → gap: 1.5rem</a:t>
-            </a:r>
-            <a:endParaRPr lang="en-US" sz="1400" dirty="0"/>
+              <a:t>  → gap: 1.5rem</a:t>
+            </a:r>
+            <a:endParaRPr lang="en-US" sz="2000" dirty="0"/>
           </a:p>
           <a:p>
             <a:pPr marL="0" indent="0" algn="l">
@@ -8362,7 +8474,7 @@
               </a:lnSpc>
               <a:buNone/>
             </a:pPr>
-            <a:endParaRPr lang="en-US" sz="1400" dirty="0"/>
+            <a:endParaRPr lang="en-US" sz="2000" dirty="0"/>
           </a:p>
           <a:p>
             <a:pPr marL="0" indent="0" algn="l">
@@ -8372,7 +8484,7 @@
               <a:buNone/>
             </a:pPr>
             <a:r>
-              <a:rPr lang="en-US" sz="1400" dirty="0">
+              <a:rPr lang="en-US" sz="2000" dirty="0">
                 <a:solidFill>
                   <a:srgbClr val="FF6A4C"/>
                 </a:solidFill>
@@ -8383,7 +8495,7 @@
               <a:t>.spacer</a:t>
             </a:r>
             <a:r>
-              <a:rPr lang="en-US" sz="1400" dirty="0">
+              <a:rPr lang="en-US" sz="2000" dirty="0">
                 <a:solidFill>
                   <a:srgbClr val="A6A6A6"/>
                 </a:solidFill>
@@ -8391,9 +8503,9 @@
                 <a:ea typeface="Courier New" pitchFamily="34" charset="-122"/>
                 <a:cs typeface="Courier New" pitchFamily="34" charset="-120"/>
               </a:rPr>
-              <a:t xml:space="preserve"> → ¯\_(ツ)_/¯</a:t>
-            </a:r>
-            <a:endParaRPr lang="en-US" sz="1400" dirty="0"/>
+              <a:t> → ¯\_(ツ)_/¯</a:t>
+            </a:r>
+            <a:endParaRPr lang="en-US" sz="2000" dirty="0"/>
           </a:p>
           <a:p>
             <a:pPr marL="0" indent="0" algn="l">
@@ -8403,7 +8515,7 @@
               <a:buNone/>
             </a:pPr>
             <a:r>
-              <a:rPr lang="en-US" sz="1400" dirty="0">
+              <a:rPr lang="en-US" sz="2000" dirty="0">
                 <a:solidFill>
                   <a:srgbClr val="6E6E6E"/>
                 </a:solidFill>
@@ -8411,9 +8523,9 @@
                 <a:ea typeface="Courier New" pitchFamily="34" charset="-122"/>
                 <a:cs typeface="Courier New" pitchFamily="34" charset="-120"/>
               </a:rPr>
-              <a:t xml:space="preserve">        depends on the repo</a:t>
-            </a:r>
-            <a:endParaRPr lang="en-US" sz="1400" dirty="0"/>
+              <a:t>        depends on the repo</a:t>
+            </a:r>
+            <a:endParaRPr lang="en-US" sz="2000" dirty="0"/>
           </a:p>
         </p:txBody>
       </p:sp>
@@ -8698,7 +8810,7 @@
           <a:bodyPr/>
           <a:lstStyle/>
           <a:p>
-            <a:endParaRPr lang="en-US"/>
+            <a:endParaRPr lang="en-US" sz="2000"/>
           </a:p>
         </p:txBody>
       </p:sp>
@@ -8730,7 +8842,7 @@
               <a:buNone/>
             </a:pPr>
             <a:r>
-              <a:rPr lang="en-US" sz="1600" dirty="0">
+              <a:rPr lang="en-US" dirty="0">
                 <a:solidFill>
                   <a:srgbClr val="FFFFFF"/>
                 </a:solidFill>
@@ -8740,7 +8852,7 @@
               </a:rPr>
               <a:t>Tailwind saturates modern training data</a:t>
             </a:r>
-            <a:endParaRPr lang="en-US" sz="1600" dirty="0"/>
+            <a:endParaRPr lang="en-US" dirty="0"/>
           </a:p>
         </p:txBody>
       </p:sp>
@@ -8752,7 +8864,7 @@
         </p:nvSpPr>
         <p:spPr>
           <a:xfrm>
-            <a:off x="594360" y="3602736"/>
+            <a:off x="594360" y="3879879"/>
             <a:ext cx="118872" cy="118872"/>
           </a:xfrm>
           <a:prstGeom prst="rect">
@@ -8767,7 +8879,7 @@
           <a:bodyPr/>
           <a:lstStyle/>
           <a:p>
-            <a:endParaRPr lang="en-US"/>
+            <a:endParaRPr lang="en-US" sz="2000"/>
           </a:p>
         </p:txBody>
       </p:sp>
@@ -8779,7 +8891,7 @@
         </p:nvSpPr>
         <p:spPr>
           <a:xfrm>
-            <a:off x="886968" y="3520440"/>
+            <a:off x="886968" y="3797583"/>
             <a:ext cx="5742432" cy="457200"/>
           </a:xfrm>
           <a:prstGeom prst="rect">
@@ -8799,7 +8911,7 @@
               <a:buNone/>
             </a:pPr>
             <a:r>
-              <a:rPr lang="en-US" sz="1600" dirty="0">
+              <a:rPr lang="en-US" dirty="0">
                 <a:solidFill>
                   <a:srgbClr val="FFFFFF"/>
                 </a:solidFill>
@@ -8809,7 +8921,7 @@
               </a:rPr>
               <a:t>Next.js, shadcn/ui, millions of public repos</a:t>
             </a:r>
-            <a:endParaRPr lang="en-US" sz="1600" dirty="0"/>
+            <a:endParaRPr lang="en-US" dirty="0"/>
           </a:p>
         </p:txBody>
       </p:sp>
@@ -8821,7 +8933,7 @@
         </p:nvSpPr>
         <p:spPr>
           <a:xfrm>
-            <a:off x="594360" y="4242816"/>
+            <a:off x="594360" y="4714414"/>
             <a:ext cx="118872" cy="118872"/>
           </a:xfrm>
           <a:prstGeom prst="rect">
@@ -8836,7 +8948,7 @@
           <a:bodyPr/>
           <a:lstStyle/>
           <a:p>
-            <a:endParaRPr lang="en-US"/>
+            <a:endParaRPr lang="en-US" sz="2000"/>
           </a:p>
         </p:txBody>
       </p:sp>
@@ -8848,7 +8960,7 @@
         </p:nvSpPr>
         <p:spPr>
           <a:xfrm>
-            <a:off x="886968" y="4160520"/>
+            <a:off x="886968" y="4632118"/>
             <a:ext cx="5742432" cy="457200"/>
           </a:xfrm>
           <a:prstGeom prst="rect">
@@ -8868,7 +8980,7 @@
               <a:buNone/>
             </a:pPr>
             <a:r>
-              <a:rPr lang="en-US" sz="1600" dirty="0">
+              <a:rPr lang="en-US" dirty="0">
                 <a:solidFill>
                   <a:srgbClr val="FFFFFF"/>
                 </a:solidFill>
@@ -8878,7 +8990,7 @@
               </a:rPr>
               <a:t>Utilities generalize across the corpus; names don't</a:t>
             </a:r>
-            <a:endParaRPr lang="en-US" sz="1600" dirty="0"/>
+            <a:endParaRPr lang="en-US" dirty="0"/>
           </a:p>
         </p:txBody>
       </p:sp>
@@ -8890,7 +9002,7 @@
         </p:nvSpPr>
         <p:spPr>
           <a:xfrm>
-            <a:off x="594360" y="4882896"/>
+            <a:off x="594360" y="5587957"/>
             <a:ext cx="118872" cy="118872"/>
           </a:xfrm>
           <a:prstGeom prst="rect">
@@ -8905,7 +9017,7 @@
           <a:bodyPr/>
           <a:lstStyle/>
           <a:p>
-            <a:endParaRPr lang="en-US"/>
+            <a:endParaRPr lang="en-US" sz="2000"/>
           </a:p>
         </p:txBody>
       </p:sp>
@@ -8917,7 +9029,7 @@
         </p:nvSpPr>
         <p:spPr>
           <a:xfrm>
-            <a:off x="886968" y="4800600"/>
+            <a:off x="886968" y="5505661"/>
             <a:ext cx="5742432" cy="457200"/>
           </a:xfrm>
           <a:prstGeom prst="rect">
@@ -8937,7 +9049,7 @@
               <a:buNone/>
             </a:pPr>
             <a:r>
-              <a:rPr lang="en-US" sz="1600" dirty="0">
+              <a:rPr lang="en-US" dirty="0">
                 <a:solidFill>
                   <a:srgbClr val="FFFFFF"/>
                 </a:solidFill>
@@ -8947,7 +9059,7 @@
               </a:rPr>
               <a:t>More usage → more data → better gen → more usage</a:t>
             </a:r>
-            <a:endParaRPr lang="en-US" sz="1600" dirty="0"/>
+            <a:endParaRPr lang="en-US" dirty="0"/>
           </a:p>
         </p:txBody>
       </p:sp>
@@ -8976,7 +9088,7 @@
           <a:bodyPr/>
           <a:lstStyle/>
           <a:p>
-            <a:endParaRPr lang="en-US"/>
+            <a:endParaRPr lang="en-US" sz="2800"/>
           </a:p>
         </p:txBody>
       </p:sp>
@@ -9010,7 +9122,7 @@
           <a:bodyPr/>
           <a:lstStyle/>
           <a:p>
-            <a:endParaRPr lang="en-US"/>
+            <a:endParaRPr lang="en-US" sz="2800"/>
           </a:p>
         </p:txBody>
       </p:sp>
@@ -9039,7 +9151,7 @@
               <a:buNone/>
             </a:pPr>
             <a:r>
-              <a:rPr lang="en-US" sz="1100" b="1" dirty="0">
+              <a:rPr lang="en-US" sz="1600" b="1" dirty="0">
                 <a:solidFill>
                   <a:srgbClr val="75DFBC"/>
                 </a:solidFill>
@@ -9049,7 +9161,7 @@
               </a:rPr>
               <a:t>usage</a:t>
             </a:r>
-            <a:endParaRPr lang="en-US" sz="1100" dirty="0"/>
+            <a:endParaRPr lang="en-US" sz="1600" dirty="0"/>
           </a:p>
         </p:txBody>
       </p:sp>
@@ -9083,7 +9195,7 @@
           <a:bodyPr/>
           <a:lstStyle/>
           <a:p>
-            <a:endParaRPr lang="en-US"/>
+            <a:endParaRPr lang="en-US" sz="2800"/>
           </a:p>
         </p:txBody>
       </p:sp>
@@ -9112,7 +9224,7 @@
               <a:buNone/>
             </a:pPr>
             <a:r>
-              <a:rPr lang="en-US" sz="1100" b="1" dirty="0">
+              <a:rPr lang="en-US" sz="1600" b="1" dirty="0">
                 <a:solidFill>
                   <a:srgbClr val="75DFBC"/>
                 </a:solidFill>
@@ -9122,7 +9234,7 @@
               </a:rPr>
               <a:t>training data</a:t>
             </a:r>
-            <a:endParaRPr lang="en-US" sz="1100" dirty="0"/>
+            <a:endParaRPr lang="en-US" sz="1600" dirty="0"/>
           </a:p>
         </p:txBody>
       </p:sp>
@@ -9156,7 +9268,7 @@
           <a:bodyPr/>
           <a:lstStyle/>
           <a:p>
-            <a:endParaRPr lang="en-US"/>
+            <a:endParaRPr lang="en-US" sz="2800"/>
           </a:p>
         </p:txBody>
       </p:sp>
@@ -9185,7 +9297,7 @@
               <a:buNone/>
             </a:pPr>
             <a:r>
-              <a:rPr lang="en-US" sz="1100" b="1" dirty="0">
+              <a:rPr lang="en-US" sz="1600" b="1" dirty="0">
                 <a:solidFill>
                   <a:srgbClr val="75DFBC"/>
                 </a:solidFill>
@@ -9195,7 +9307,7 @@
               </a:rPr>
               <a:t>better output</a:t>
             </a:r>
-            <a:endParaRPr lang="en-US" sz="1100" dirty="0"/>
+            <a:endParaRPr lang="en-US" sz="1600" dirty="0"/>
           </a:p>
         </p:txBody>
       </p:sp>
@@ -9229,7 +9341,7 @@
           <a:bodyPr/>
           <a:lstStyle/>
           <a:p>
-            <a:endParaRPr lang="en-US"/>
+            <a:endParaRPr lang="en-US" sz="2800"/>
           </a:p>
         </p:txBody>
       </p:sp>
@@ -9258,7 +9370,7 @@
               <a:buNone/>
             </a:pPr>
             <a:r>
-              <a:rPr lang="en-US" sz="1100" b="1" dirty="0">
+              <a:rPr lang="en-US" sz="1600" b="1" dirty="0">
                 <a:solidFill>
                   <a:srgbClr val="75DFBC"/>
                 </a:solidFill>
@@ -9268,7 +9380,7 @@
               </a:rPr>
               <a:t>more trust</a:t>
             </a:r>
-            <a:endParaRPr lang="en-US" sz="1100" dirty="0"/>
+            <a:endParaRPr lang="en-US" sz="1600" dirty="0"/>
           </a:p>
         </p:txBody>
       </p:sp>
@@ -9297,7 +9409,7 @@
               <a:buNone/>
             </a:pPr>
             <a:r>
-              <a:rPr lang="en-US" sz="4000" b="1" dirty="0">
+              <a:rPr lang="en-US" sz="5400" b="1" dirty="0">
                 <a:solidFill>
                   <a:srgbClr val="F1CF25"/>
                 </a:solidFill>
@@ -9307,7 +9419,7 @@
               </a:rPr>
               <a:t>↻</a:t>
             </a:r>
-            <a:endParaRPr lang="en-US" sz="4000" dirty="0"/>
+            <a:endParaRPr lang="en-US" sz="5400" dirty="0"/>
           </a:p>
         </p:txBody>
       </p:sp>
@@ -9592,7 +9704,7 @@
           <a:bodyPr/>
           <a:lstStyle/>
           <a:p>
-            <a:endParaRPr lang="en-US"/>
+            <a:endParaRPr lang="en-US" sz="2400"/>
           </a:p>
         </p:txBody>
       </p:sp>
@@ -9624,7 +9736,7 @@
               <a:buNone/>
             </a:pPr>
             <a:r>
-              <a:rPr lang="en-US" sz="1600" dirty="0">
+              <a:rPr lang="en-US" sz="2000" dirty="0">
                 <a:solidFill>
                   <a:srgbClr val="FFFFFF"/>
                 </a:solidFill>
@@ -9634,7 +9746,7 @@
               </a:rPr>
               <a:t>The class list is the spec</a:t>
             </a:r>
-            <a:endParaRPr lang="en-US" sz="1600" dirty="0"/>
+            <a:endParaRPr lang="en-US" sz="2000" dirty="0"/>
           </a:p>
         </p:txBody>
       </p:sp>
@@ -9661,7 +9773,7 @@
           <a:bodyPr/>
           <a:lstStyle/>
           <a:p>
-            <a:endParaRPr lang="en-US"/>
+            <a:endParaRPr lang="en-US" sz="2400"/>
           </a:p>
         </p:txBody>
       </p:sp>
@@ -9693,7 +9805,7 @@
               <a:buNone/>
             </a:pPr>
             <a:r>
-              <a:rPr lang="en-US" sz="1600" dirty="0">
+              <a:rPr lang="en-US" sz="2000" dirty="0">
                 <a:solidFill>
                   <a:srgbClr val="FFFFFF"/>
                 </a:solidFill>
@@ -9703,7 +9815,7 @@
               </a:rPr>
               <a:t>Read bg-coral hover:bg-coral/80 px-4 py-2 rounded-lg</a:t>
             </a:r>
-            <a:endParaRPr lang="en-US" sz="1600" dirty="0"/>
+            <a:endParaRPr lang="en-US" sz="2000" dirty="0"/>
           </a:p>
         </p:txBody>
       </p:sp>
@@ -9715,7 +9827,7 @@
         </p:nvSpPr>
         <p:spPr>
           <a:xfrm>
-            <a:off x="594360" y="4242816"/>
+            <a:off x="594360" y="4581144"/>
             <a:ext cx="118872" cy="118872"/>
           </a:xfrm>
           <a:prstGeom prst="rect">
@@ -9730,7 +9842,7 @@
           <a:bodyPr/>
           <a:lstStyle/>
           <a:p>
-            <a:endParaRPr lang="en-US"/>
+            <a:endParaRPr lang="en-US" sz="2400"/>
           </a:p>
         </p:txBody>
       </p:sp>
@@ -9742,7 +9854,7 @@
         </p:nvSpPr>
         <p:spPr>
           <a:xfrm>
-            <a:off x="886968" y="4160520"/>
+            <a:off x="886968" y="4498848"/>
             <a:ext cx="5742432" cy="457200"/>
           </a:xfrm>
           <a:prstGeom prst="rect">
@@ -9762,7 +9874,7 @@
               <a:buNone/>
             </a:pPr>
             <a:r>
-              <a:rPr lang="en-US" sz="1600" dirty="0">
+              <a:rPr lang="en-US" sz="2000" dirty="0">
                 <a:solidFill>
                   <a:srgbClr val="FFFFFF"/>
                 </a:solidFill>
@@ -9772,7 +9884,7 @@
               </a:rPr>
               <a:t>…and know exactly what it does without running it</a:t>
             </a:r>
-            <a:endParaRPr lang="en-US" sz="1600" dirty="0"/>
+            <a:endParaRPr lang="en-US" sz="2000" dirty="0"/>
           </a:p>
         </p:txBody>
       </p:sp>
@@ -9784,7 +9896,7 @@
         </p:nvSpPr>
         <p:spPr>
           <a:xfrm>
-            <a:off x="594360" y="4882896"/>
+            <a:off x="594360" y="5376672"/>
             <a:ext cx="118872" cy="118872"/>
           </a:xfrm>
           <a:prstGeom prst="rect">
@@ -9799,7 +9911,7 @@
           <a:bodyPr/>
           <a:lstStyle/>
           <a:p>
-            <a:endParaRPr lang="en-US"/>
+            <a:endParaRPr lang="en-US" sz="2400"/>
           </a:p>
         </p:txBody>
       </p:sp>
@@ -9811,7 +9923,7 @@
         </p:nvSpPr>
         <p:spPr>
           <a:xfrm>
-            <a:off x="886968" y="4800600"/>
+            <a:off x="886968" y="5294376"/>
             <a:ext cx="5742432" cy="457200"/>
           </a:xfrm>
           <a:prstGeom prst="rect">
@@ -9831,7 +9943,7 @@
               <a:buNone/>
             </a:pPr>
             <a:r>
-              <a:rPr lang="en-US" sz="1600" dirty="0">
+              <a:rPr lang="en-US" sz="2000" dirty="0">
                 <a:solidFill>
                   <a:srgbClr val="FFFFFF"/>
                 </a:solidFill>
@@ -9841,7 +9953,7 @@
               </a:rPr>
               <a:t>Faster review = a tighter human + AI loop</a:t>
             </a:r>
-            <a:endParaRPr lang="en-US" sz="1600" dirty="0"/>
+            <a:endParaRPr lang="en-US" sz="2000" dirty="0"/>
           </a:p>
         </p:txBody>
       </p:sp>
@@ -9854,7 +9966,7 @@
         <p:spPr>
           <a:xfrm>
             <a:off x="6766560" y="2651760"/>
-            <a:ext cx="4828032" cy="2468880"/>
+            <a:ext cx="4828032" cy="3099816"/>
           </a:xfrm>
           <a:prstGeom prst="roundRect">
             <a:avLst>
@@ -9875,7 +9987,7 @@
           <a:bodyPr/>
           <a:lstStyle/>
           <a:p>
-            <a:endParaRPr lang="en-US"/>
+            <a:endParaRPr lang="en-US" sz="2800" dirty="0"/>
           </a:p>
         </p:txBody>
       </p:sp>
@@ -9904,7 +10016,7 @@
               <a:buNone/>
             </a:pPr>
             <a:r>
-              <a:rPr lang="en-US" sz="1300" i="1" dirty="0">
+              <a:rPr lang="en-US" i="1" dirty="0">
                 <a:solidFill>
                   <a:srgbClr val="6E6E6E"/>
                 </a:solidFill>
@@ -9914,7 +10026,7 @@
               </a:rPr>
               <a:t>you can verify by reading:</a:t>
             </a:r>
-            <a:endParaRPr lang="en-US" sz="1300" dirty="0"/>
+            <a:endParaRPr lang="en-US" dirty="0"/>
           </a:p>
         </p:txBody>
       </p:sp>
@@ -9926,7 +10038,7 @@
         </p:nvSpPr>
         <p:spPr>
           <a:xfrm>
-            <a:off x="7040880" y="3383280"/>
+            <a:off x="7031736" y="3712464"/>
             <a:ext cx="4297680" cy="914400"/>
           </a:xfrm>
           <a:prstGeom prst="rect">
@@ -9946,7 +10058,7 @@
               <a:buNone/>
             </a:pPr>
             <a:r>
-              <a:rPr lang="en-US" sz="1500" dirty="0">
+              <a:rPr lang="en-US" sz="2000" dirty="0">
                 <a:solidFill>
                   <a:srgbClr val="FF6A4C"/>
                 </a:solidFill>
@@ -9954,10 +10066,10 @@
                 <a:ea typeface="Courier New" pitchFamily="34" charset="-122"/>
                 <a:cs typeface="Courier New" pitchFamily="34" charset="-120"/>
               </a:rPr>
-              <a:t xml:space="preserve">bg-coral </a:t>
-            </a:r>
-            <a:r>
-              <a:rPr lang="en-US" sz="1500" dirty="0">
+              <a:t>bg-coral </a:t>
+            </a:r>
+            <a:r>
+              <a:rPr lang="en-US" sz="2000" dirty="0">
                 <a:solidFill>
                   <a:srgbClr val="F1CF25"/>
                 </a:solidFill>
@@ -9965,10 +10077,10 @@
                 <a:ea typeface="Courier New" pitchFamily="34" charset="-122"/>
                 <a:cs typeface="Courier New" pitchFamily="34" charset="-120"/>
               </a:rPr>
-              <a:t xml:space="preserve">hover:bg-coral/80 </a:t>
-            </a:r>
-            <a:r>
-              <a:rPr lang="en-US" sz="1500" dirty="0">
+              <a:t>hover:bg-coral/80 </a:t>
+            </a:r>
+            <a:r>
+              <a:rPr lang="en-US" sz="2000" dirty="0">
                 <a:solidFill>
                   <a:srgbClr val="75DFBC"/>
                 </a:solidFill>
@@ -9976,10 +10088,10 @@
                 <a:ea typeface="Courier New" pitchFamily="34" charset="-122"/>
                 <a:cs typeface="Courier New" pitchFamily="34" charset="-120"/>
               </a:rPr>
-              <a:t xml:space="preserve">px-4 py-2 </a:t>
-            </a:r>
-            <a:r>
-              <a:rPr lang="en-US" sz="1500" dirty="0">
+              <a:t>px-4 py-2 </a:t>
+            </a:r>
+            <a:r>
+              <a:rPr lang="en-US" sz="2000" dirty="0">
                 <a:solidFill>
                   <a:srgbClr val="9CDCFE"/>
                 </a:solidFill>
@@ -9989,7 +10101,7 @@
               </a:rPr>
               <a:t>rounded-lg</a:t>
             </a:r>
-            <a:endParaRPr lang="en-US" sz="1500" dirty="0"/>
+            <a:endParaRPr lang="en-US" sz="2000" dirty="0"/>
           </a:p>
         </p:txBody>
       </p:sp>
@@ -10001,7 +10113,7 @@
         </p:nvSpPr>
         <p:spPr>
           <a:xfrm>
-            <a:off x="7040880" y="4343400"/>
+            <a:off x="7031736" y="4895737"/>
             <a:ext cx="4297680" cy="731520"/>
           </a:xfrm>
           <a:prstGeom prst="rect">
@@ -10021,7 +10133,7 @@
               <a:buNone/>
             </a:pPr>
             <a:r>
-              <a:rPr lang="en-US" sz="1300" dirty="0">
+              <a:rPr lang="en-US" dirty="0">
                 <a:solidFill>
                   <a:srgbClr val="A6A6A6"/>
                 </a:solidFill>
@@ -10031,7 +10143,7 @@
               </a:rPr>
               <a:t>→ coral button, darkens on hover, comfy padding, soft corners.</a:t>
             </a:r>
-            <a:endParaRPr lang="en-US" sz="1300" dirty="0"/>
+            <a:endParaRPr lang="en-US" dirty="0"/>
           </a:p>
         </p:txBody>
       </p:sp>
@@ -10591,7 +10703,7 @@
               <a:buNone/>
             </a:pPr>
             <a:r>
-              <a:rPr lang="en-US" sz="1500" i="1" dirty="0">
+              <a:rPr lang="en-US" sz="1600" i="1" dirty="0">
                 <a:solidFill>
                   <a:srgbClr val="75DFBC"/>
                 </a:solidFill>
@@ -10601,7 +10713,7 @@
               </a:rPr>
               <a:t>= one component, one file, one mental model</a:t>
             </a:r>
-            <a:endParaRPr lang="en-US" sz="1500" dirty="0"/>
+            <a:endParaRPr lang="en-US" sz="1600" dirty="0"/>
           </a:p>
         </p:txBody>
       </p:sp>
@@ -10655,7 +10767,7 @@
         </p:nvSpPr>
         <p:spPr>
           <a:xfrm>
-            <a:off x="594360" y="4892040"/>
+            <a:off x="594360" y="5097780"/>
             <a:ext cx="1234440" cy="411480"/>
           </a:xfrm>
           <a:prstGeom prst="roundRect">
@@ -10674,7 +10786,7 @@
           <a:bodyPr/>
           <a:lstStyle/>
           <a:p>
-            <a:endParaRPr lang="en-US"/>
+            <a:endParaRPr lang="en-US" sz="2400"/>
           </a:p>
         </p:txBody>
       </p:sp>
@@ -10686,7 +10798,7 @@
         </p:nvSpPr>
         <p:spPr>
           <a:xfrm>
-            <a:off x="594360" y="4892040"/>
+            <a:off x="594360" y="5097780"/>
             <a:ext cx="1234440" cy="411480"/>
           </a:xfrm>
           <a:prstGeom prst="rect">
@@ -10703,7 +10815,7 @@
               <a:buNone/>
             </a:pPr>
             <a:r>
-              <a:rPr lang="en-US" sz="1300" b="1" dirty="0">
+              <a:rPr lang="en-US" sz="1600" b="1" dirty="0">
                 <a:solidFill>
                   <a:srgbClr val="A6A6A6"/>
                 </a:solidFill>
@@ -10713,7 +10825,7 @@
               </a:rPr>
               <a:t>React</a:t>
             </a:r>
-            <a:endParaRPr lang="en-US" sz="1300" dirty="0"/>
+            <a:endParaRPr lang="en-US" sz="1600" dirty="0"/>
           </a:p>
         </p:txBody>
       </p:sp>
@@ -10725,7 +10837,7 @@
         </p:nvSpPr>
         <p:spPr>
           <a:xfrm>
-            <a:off x="2057400" y="4892040"/>
+            <a:off x="2057400" y="5097780"/>
             <a:ext cx="996696" cy="411480"/>
           </a:xfrm>
           <a:prstGeom prst="roundRect">
@@ -10744,7 +10856,7 @@
           <a:bodyPr/>
           <a:lstStyle/>
           <a:p>
-            <a:endParaRPr lang="en-US"/>
+            <a:endParaRPr lang="en-US" sz="2400"/>
           </a:p>
         </p:txBody>
       </p:sp>
@@ -10756,7 +10868,7 @@
         </p:nvSpPr>
         <p:spPr>
           <a:xfrm>
-            <a:off x="2057400" y="4892040"/>
+            <a:off x="2057400" y="5097780"/>
             <a:ext cx="996696" cy="411480"/>
           </a:xfrm>
           <a:prstGeom prst="rect">
@@ -10773,7 +10885,7 @@
               <a:buNone/>
             </a:pPr>
             <a:r>
-              <a:rPr lang="en-US" sz="1300" b="1" dirty="0">
+              <a:rPr lang="en-US" sz="1600" b="1" dirty="0">
                 <a:solidFill>
                   <a:srgbClr val="A6A6A6"/>
                 </a:solidFill>
@@ -10783,7 +10895,7 @@
               </a:rPr>
               <a:t>Vue</a:t>
             </a:r>
-            <a:endParaRPr lang="en-US" sz="1300" dirty="0"/>
+            <a:endParaRPr lang="en-US" sz="1600" dirty="0"/>
           </a:p>
         </p:txBody>
       </p:sp>
@@ -10795,7 +10907,7 @@
         </p:nvSpPr>
         <p:spPr>
           <a:xfrm>
-            <a:off x="3282696" y="4892040"/>
+            <a:off x="3282696" y="5097780"/>
             <a:ext cx="1353312" cy="411480"/>
           </a:xfrm>
           <a:prstGeom prst="roundRect">
@@ -10814,7 +10926,7 @@
           <a:bodyPr/>
           <a:lstStyle/>
           <a:p>
-            <a:endParaRPr lang="en-US"/>
+            <a:endParaRPr lang="en-US" sz="2400"/>
           </a:p>
         </p:txBody>
       </p:sp>
@@ -10826,7 +10938,7 @@
         </p:nvSpPr>
         <p:spPr>
           <a:xfrm>
-            <a:off x="3282696" y="4892040"/>
+            <a:off x="3282696" y="5097780"/>
             <a:ext cx="1353312" cy="411480"/>
           </a:xfrm>
           <a:prstGeom prst="rect">
@@ -10843,7 +10955,7 @@
               <a:buNone/>
             </a:pPr>
             <a:r>
-              <a:rPr lang="en-US" sz="1300" b="1" dirty="0">
+              <a:rPr lang="en-US" sz="1600" b="1" dirty="0">
                 <a:solidFill>
                   <a:srgbClr val="A6A6A6"/>
                 </a:solidFill>
@@ -10853,7 +10965,7 @@
               </a:rPr>
               <a:t>Svelte</a:t>
             </a:r>
-            <a:endParaRPr lang="en-US" sz="1300" dirty="0"/>
+            <a:endParaRPr lang="en-US" sz="1600" dirty="0"/>
           </a:p>
         </p:txBody>
       </p:sp>
@@ -10865,7 +10977,7 @@
         </p:nvSpPr>
         <p:spPr>
           <a:xfrm>
-            <a:off x="4864608" y="4892040"/>
+            <a:off x="4864608" y="5097780"/>
             <a:ext cx="1234440" cy="411480"/>
           </a:xfrm>
           <a:prstGeom prst="roundRect">
@@ -10884,7 +10996,7 @@
           <a:bodyPr/>
           <a:lstStyle/>
           <a:p>
-            <a:endParaRPr lang="en-US"/>
+            <a:endParaRPr lang="en-US" sz="2400"/>
           </a:p>
         </p:txBody>
       </p:sp>
@@ -10896,7 +11008,7 @@
         </p:nvSpPr>
         <p:spPr>
           <a:xfrm>
-            <a:off x="4864608" y="4892040"/>
+            <a:off x="4864608" y="5097780"/>
             <a:ext cx="1234440" cy="411480"/>
           </a:xfrm>
           <a:prstGeom prst="rect">
@@ -10913,7 +11025,7 @@
               <a:buNone/>
             </a:pPr>
             <a:r>
-              <a:rPr lang="en-US" sz="1300" b="1" dirty="0">
+              <a:rPr lang="en-US" sz="1600" b="1" dirty="0">
                 <a:solidFill>
                   <a:srgbClr val="A6A6A6"/>
                 </a:solidFill>
@@ -10923,7 +11035,7 @@
               </a:rPr>
               <a:t>Solid</a:t>
             </a:r>
-            <a:endParaRPr lang="en-US" sz="1300" dirty="0"/>
+            <a:endParaRPr lang="en-US" sz="1600" dirty="0"/>
           </a:p>
         </p:txBody>
       </p:sp>
@@ -10935,7 +11047,7 @@
         </p:nvSpPr>
         <p:spPr>
           <a:xfrm>
-            <a:off x="6327648" y="4892040"/>
+            <a:off x="6327648" y="5097780"/>
             <a:ext cx="1472184" cy="411480"/>
           </a:xfrm>
           <a:prstGeom prst="roundRect">
@@ -10954,7 +11066,7 @@
           <a:bodyPr/>
           <a:lstStyle/>
           <a:p>
-            <a:endParaRPr lang="en-US"/>
+            <a:endParaRPr lang="en-US" sz="2400"/>
           </a:p>
         </p:txBody>
       </p:sp>
@@ -10966,7 +11078,7 @@
         </p:nvSpPr>
         <p:spPr>
           <a:xfrm>
-            <a:off x="6327648" y="4892040"/>
+            <a:off x="6327648" y="5097780"/>
             <a:ext cx="1472184" cy="411480"/>
           </a:xfrm>
           <a:prstGeom prst="rect">
@@ -10983,7 +11095,7 @@
               <a:buNone/>
             </a:pPr>
             <a:r>
-              <a:rPr lang="en-US" sz="1300" b="1" dirty="0">
+              <a:rPr lang="en-US" sz="1600" b="1" dirty="0">
                 <a:solidFill>
                   <a:srgbClr val="A6A6A6"/>
                 </a:solidFill>
@@ -10993,7 +11105,7 @@
               </a:rPr>
               <a:t>Angular</a:t>
             </a:r>
-            <a:endParaRPr lang="en-US" sz="1300" dirty="0"/>
+            <a:endParaRPr lang="en-US" sz="1600" dirty="0"/>
           </a:p>
         </p:txBody>
       </p:sp>
@@ -11234,7 +11346,7 @@
               <a:buNone/>
             </a:pPr>
             <a:r>
-              <a:rPr lang="en-US" sz="1700" i="1" dirty="0">
+              <a:rPr lang="en-US" sz="2400" i="1" dirty="0">
                 <a:solidFill>
                   <a:srgbClr val="A6A6A6"/>
                 </a:solidFill>
@@ -11244,7 +11356,7 @@
               </a:rPr>
               <a:t>Today: why that joke is the problem for humans and for machines.</a:t>
             </a:r>
-            <a:endParaRPr lang="en-US" sz="1700" dirty="0"/>
+            <a:endParaRPr lang="en-US" sz="2400" dirty="0"/>
           </a:p>
         </p:txBody>
       </p:sp>
@@ -11371,7 +11483,7 @@
         <p:spPr>
           <a:xfrm>
             <a:off x="594360" y="1920240"/>
-            <a:ext cx="5349240" cy="3108960"/>
+            <a:ext cx="5349240" cy="3857990"/>
           </a:xfrm>
           <a:prstGeom prst="roundRect">
             <a:avLst>
@@ -11443,7 +11555,7 @@
         </p:nvSpPr>
         <p:spPr>
           <a:xfrm>
-            <a:off x="914400" y="2743200"/>
+            <a:off x="914400" y="3108960"/>
             <a:ext cx="4709160" cy="1463040"/>
           </a:xfrm>
           <a:prstGeom prst="rect">
@@ -11463,7 +11575,7 @@
               <a:buNone/>
             </a:pPr>
             <a:r>
-              <a:rPr lang="en-US" sz="1300" dirty="0">
+              <a:rPr lang="en-US" sz="1600" dirty="0">
                 <a:solidFill>
                   <a:srgbClr val="F1CF25"/>
                 </a:solidFill>
@@ -11475,7 +11587,7 @@
 </a:t>
             </a:r>
             <a:r>
-              <a:rPr lang="en-US" sz="1300" dirty="0">
+              <a:rPr lang="en-US" sz="1600" dirty="0">
                 <a:solidFill>
                   <a:srgbClr val="9CDCFE"/>
                 </a:solidFill>
@@ -11487,7 +11599,7 @@
 </a:t>
             </a:r>
             <a:r>
-              <a:rPr lang="en-US" sz="1300" dirty="0">
+              <a:rPr lang="en-US" sz="1600" dirty="0">
                 <a:solidFill>
                   <a:srgbClr val="75DFBC"/>
                 </a:solidFill>
@@ -11497,7 +11609,7 @@
               </a:rPr>
               <a:t>class:selected={isSelected}</a:t>
             </a:r>
-            <a:endParaRPr lang="en-US" sz="1300" dirty="0"/>
+            <a:endParaRPr lang="en-US" sz="1600" dirty="0"/>
           </a:p>
         </p:txBody>
       </p:sp>
@@ -11509,7 +11621,7 @@
         </p:nvSpPr>
         <p:spPr>
           <a:xfrm>
-            <a:off x="914400" y="4297680"/>
+            <a:off x="914400" y="5023850"/>
             <a:ext cx="4709160" cy="548640"/>
           </a:xfrm>
           <a:prstGeom prst="rect">
@@ -11529,7 +11641,7 @@
               <a:buNone/>
             </a:pPr>
             <a:r>
-              <a:rPr lang="en-US" sz="1300" i="1" dirty="0">
+              <a:rPr lang="en-US" sz="1600" i="1" dirty="0">
                 <a:solidFill>
                   <a:srgbClr val="A6A6A6"/>
                 </a:solidFill>
@@ -11539,7 +11651,7 @@
               </a:rPr>
               <a:t>JSX &amp; template bindings make class composition a one-liner.</a:t>
             </a:r>
-            <a:endParaRPr lang="en-US" sz="1300" dirty="0"/>
+            <a:endParaRPr lang="en-US" sz="1600" dirty="0"/>
           </a:p>
         </p:txBody>
       </p:sp>
@@ -11552,7 +11664,7 @@
         <p:spPr>
           <a:xfrm>
             <a:off x="6263640" y="1920240"/>
-            <a:ext cx="5330952" cy="3108960"/>
+            <a:ext cx="5330952" cy="3857990"/>
           </a:xfrm>
           <a:prstGeom prst="roundRect">
             <a:avLst>
@@ -11624,7 +11736,7 @@
         </p:nvSpPr>
         <p:spPr>
           <a:xfrm>
-            <a:off x="6583680" y="2825496"/>
+            <a:off x="6583680" y="3191256"/>
             <a:ext cx="118872" cy="118872"/>
           </a:xfrm>
           <a:prstGeom prst="rect">
@@ -11639,7 +11751,7 @@
           <a:bodyPr/>
           <a:lstStyle/>
           <a:p>
-            <a:endParaRPr lang="en-US"/>
+            <a:endParaRPr lang="en-US" sz="1600"/>
           </a:p>
         </p:txBody>
       </p:sp>
@@ -11651,7 +11763,7 @@
         </p:nvSpPr>
         <p:spPr>
           <a:xfrm>
-            <a:off x="6876288" y="2743200"/>
+            <a:off x="6876288" y="3108960"/>
             <a:ext cx="4553712" cy="457200"/>
           </a:xfrm>
           <a:prstGeom prst="rect">
@@ -11671,7 +11783,7 @@
               <a:buNone/>
             </a:pPr>
             <a:r>
-              <a:rPr lang="en-US" sz="1400" dirty="0">
+              <a:rPr lang="en-US" sz="1600" dirty="0">
                 <a:solidFill>
                   <a:srgbClr val="FFFFFF"/>
                 </a:solidFill>
@@ -11681,7 +11793,7 @@
               </a:rPr>
               <a:t>Vite / PostCSS / bundlers = Tailwind's native home</a:t>
             </a:r>
-            <a:endParaRPr lang="en-US" sz="1400" dirty="0"/>
+            <a:endParaRPr lang="en-US" sz="1600" dirty="0"/>
           </a:p>
         </p:txBody>
       </p:sp>
@@ -11693,7 +11805,7 @@
         </p:nvSpPr>
         <p:spPr>
           <a:xfrm>
-            <a:off x="6583680" y="3374136"/>
+            <a:off x="6583680" y="3739896"/>
             <a:ext cx="118872" cy="118872"/>
           </a:xfrm>
           <a:prstGeom prst="rect">
@@ -11708,7 +11820,7 @@
           <a:bodyPr/>
           <a:lstStyle/>
           <a:p>
-            <a:endParaRPr lang="en-US"/>
+            <a:endParaRPr lang="en-US" sz="1600"/>
           </a:p>
         </p:txBody>
       </p:sp>
@@ -11720,7 +11832,7 @@
         </p:nvSpPr>
         <p:spPr>
           <a:xfrm>
-            <a:off x="6876288" y="3291840"/>
+            <a:off x="6876288" y="3657600"/>
             <a:ext cx="4553712" cy="457200"/>
           </a:xfrm>
           <a:prstGeom prst="rect">
@@ -11740,7 +11852,7 @@
               <a:buNone/>
             </a:pPr>
             <a:r>
-              <a:rPr lang="en-US" sz="1400" dirty="0">
+              <a:rPr lang="en-US" sz="1600" dirty="0">
                 <a:solidFill>
                   <a:srgbClr val="FFFFFF"/>
                 </a:solidFill>
@@ -11750,7 +11862,7 @@
               </a:rPr>
               <a:t>JIT compiler + content scanning</a:t>
             </a:r>
-            <a:endParaRPr lang="en-US" sz="1400" dirty="0"/>
+            <a:endParaRPr lang="en-US" sz="1600" dirty="0"/>
           </a:p>
         </p:txBody>
       </p:sp>
@@ -11762,7 +11874,7 @@
         </p:nvSpPr>
         <p:spPr>
           <a:xfrm>
-            <a:off x="6583680" y="3922776"/>
+            <a:off x="6583680" y="4288536"/>
             <a:ext cx="118872" cy="118872"/>
           </a:xfrm>
           <a:prstGeom prst="rect">
@@ -11777,7 +11889,7 @@
           <a:bodyPr/>
           <a:lstStyle/>
           <a:p>
-            <a:endParaRPr lang="en-US"/>
+            <a:endParaRPr lang="en-US" sz="1600"/>
           </a:p>
         </p:txBody>
       </p:sp>
@@ -11789,7 +11901,7 @@
         </p:nvSpPr>
         <p:spPr>
           <a:xfrm>
-            <a:off x="6876288" y="3840480"/>
+            <a:off x="6876288" y="4206240"/>
             <a:ext cx="4553712" cy="457200"/>
           </a:xfrm>
           <a:prstGeom prst="rect">
@@ -11809,7 +11921,7 @@
               <a:buNone/>
             </a:pPr>
             <a:r>
-              <a:rPr lang="en-US" sz="1400" dirty="0">
+              <a:rPr lang="en-US" sz="1600" dirty="0">
                 <a:solidFill>
                   <a:srgbClr val="FFFFFF"/>
                 </a:solidFill>
@@ -11819,7 +11931,7 @@
               </a:rPr>
               <a:t>Tree-shaking → ship only the utilities you use</a:t>
             </a:r>
-            <a:endParaRPr lang="en-US" sz="1400" dirty="0"/>
+            <a:endParaRPr lang="en-US" sz="1600" dirty="0"/>
           </a:p>
         </p:txBody>
       </p:sp>
@@ -11831,7 +11943,7 @@
         </p:nvSpPr>
         <p:spPr>
           <a:xfrm>
-            <a:off x="6583680" y="4434840"/>
+            <a:off x="6563641" y="5023850"/>
             <a:ext cx="4709160" cy="548640"/>
           </a:xfrm>
           <a:prstGeom prst="rect">
@@ -11851,7 +11963,7 @@
               <a:buNone/>
             </a:pPr>
             <a:r>
-              <a:rPr lang="en-US" sz="1300" i="1" dirty="0">
+              <a:rPr lang="en-US" sz="1600" i="1" dirty="0">
                 <a:solidFill>
                   <a:srgbClr val="A6A6A6"/>
                 </a:solidFill>
@@ -11861,7 +11973,7 @@
               </a:rPr>
               <a:t>Tailwind is a build-tool-native idea. It belongs to the JS ecosystem.</a:t>
             </a:r>
-            <a:endParaRPr lang="en-US" sz="1300" dirty="0"/>
+            <a:endParaRPr lang="en-US" sz="1600" dirty="0"/>
           </a:p>
         </p:txBody>
       </p:sp>
@@ -12105,7 +12217,7 @@
         <p:spPr>
           <a:xfrm>
             <a:off x="594360" y="2377440"/>
-            <a:ext cx="11002975" cy="2468880"/>
+            <a:ext cx="11002975" cy="3502152"/>
           </a:xfrm>
           <a:prstGeom prst="roundRect">
             <a:avLst>
@@ -12236,7 +12348,7 @@
               <a:buNone/>
             </a:pPr>
             <a:r>
-              <a:rPr lang="en-US" sz="1000" dirty="0">
+              <a:rPr lang="en-US" sz="1600" dirty="0">
                 <a:solidFill>
                   <a:srgbClr val="6E6E6E"/>
                 </a:solidFill>
@@ -12246,7 +12358,7 @@
               </a:rPr>
               <a:t>button.tsx  ·  class-variance-authority</a:t>
             </a:r>
-            <a:endParaRPr lang="en-US" sz="1000" dirty="0"/>
+            <a:endParaRPr lang="en-US" sz="1600" dirty="0"/>
           </a:p>
         </p:txBody>
       </p:sp>
@@ -12259,7 +12371,7 @@
         <p:spPr>
           <a:xfrm>
             <a:off x="886968" y="2926080"/>
-            <a:ext cx="10417759" cy="1737360"/>
+            <a:ext cx="10417759" cy="2667324"/>
           </a:xfrm>
           <a:prstGeom prst="rect">
             <a:avLst/>
@@ -12278,39 +12390,42 @@
               <a:buNone/>
             </a:pPr>
             <a:r>
-              <a:rPr lang="en-US" sz="1350" dirty="0">
+              <a:rPr lang="en-US" sz="2000" dirty="0">
                 <a:solidFill>
                   <a:srgbClr val="D8D8D8"/>
                 </a:solidFill>
-                <a:latin typeface="Courier New" pitchFamily="34" charset="0"/>
+                <a:latin typeface="Cascadia Code" panose="020B0609020000020004" pitchFamily="49" charset="0"/>
                 <a:ea typeface="Courier New" pitchFamily="34" charset="-122"/>
-                <a:cs typeface="Courier New" pitchFamily="34" charset="-120"/>
-              </a:rPr>
-              <a:t xml:space="preserve">const button = </a:t>
-            </a:r>
-            <a:r>
-              <a:rPr lang="en-US" sz="1350" dirty="0">
+                <a:cs typeface="Cascadia Code" panose="020B0609020000020004" pitchFamily="49" charset="0"/>
+              </a:rPr>
+              <a:t>const button = </a:t>
+            </a:r>
+            <a:r>
+              <a:rPr lang="en-US" sz="2000" dirty="0">
                 <a:solidFill>
                   <a:srgbClr val="75DFBC"/>
                 </a:solidFill>
-                <a:latin typeface="Courier New" pitchFamily="34" charset="0"/>
+                <a:latin typeface="Cascadia Code" panose="020B0609020000020004" pitchFamily="49" charset="0"/>
                 <a:ea typeface="Courier New" pitchFamily="34" charset="-122"/>
-                <a:cs typeface="Courier New" pitchFamily="34" charset="-120"/>
+                <a:cs typeface="Cascadia Code" panose="020B0609020000020004" pitchFamily="49" charset="0"/>
               </a:rPr>
               <a:t>cva</a:t>
             </a:r>
             <a:r>
-              <a:rPr lang="en-US" sz="1350" dirty="0">
+              <a:rPr lang="en-US" sz="2000" dirty="0">
                 <a:solidFill>
                   <a:srgbClr val="D8D8D8"/>
                 </a:solidFill>
-                <a:latin typeface="Courier New" pitchFamily="34" charset="0"/>
+                <a:latin typeface="Cascadia Code" panose="020B0609020000020004" pitchFamily="49" charset="0"/>
                 <a:ea typeface="Courier New" pitchFamily="34" charset="-122"/>
-                <a:cs typeface="Courier New" pitchFamily="34" charset="-120"/>
+                <a:cs typeface="Cascadia Code" panose="020B0609020000020004" pitchFamily="49" charset="0"/>
               </a:rPr>
               <a:t>("rounded-lg font-bold", {</a:t>
             </a:r>
-            <a:endParaRPr lang="en-US" sz="1350" dirty="0"/>
+            <a:endParaRPr lang="en-US" sz="2000" dirty="0">
+              <a:latin typeface="Cascadia Code" panose="020B0609020000020004" pitchFamily="49" charset="0"/>
+              <a:cs typeface="Cascadia Code" panose="020B0609020000020004" pitchFamily="49" charset="0"/>
+            </a:endParaRPr>
           </a:p>
           <a:p>
             <a:pPr marL="0" indent="0" algn="l">
@@ -12320,28 +12435,31 @@
               <a:buNone/>
             </a:pPr>
             <a:r>
-              <a:rPr lang="en-US" sz="1350" dirty="0">
+              <a:rPr lang="en-US" sz="2000" dirty="0">
                 <a:solidFill>
                   <a:srgbClr val="9CDCFE"/>
                 </a:solidFill>
-                <a:latin typeface="Courier New" pitchFamily="34" charset="0"/>
+                <a:latin typeface="Cascadia Code" panose="020B0609020000020004" pitchFamily="49" charset="0"/>
                 <a:ea typeface="Courier New" pitchFamily="34" charset="-122"/>
-                <a:cs typeface="Courier New" pitchFamily="34" charset="-120"/>
-              </a:rPr>
-              <a:t xml:space="preserve">  variants</a:t>
-            </a:r>
-            <a:r>
-              <a:rPr lang="en-US" sz="1350" dirty="0">
+                <a:cs typeface="Cascadia Code" panose="020B0609020000020004" pitchFamily="49" charset="0"/>
+              </a:rPr>
+              <a:t>  variants</a:t>
+            </a:r>
+            <a:r>
+              <a:rPr lang="en-US" sz="2000" dirty="0">
                 <a:solidFill>
                   <a:srgbClr val="D8D8D8"/>
                 </a:solidFill>
-                <a:latin typeface="Courier New" pitchFamily="34" charset="0"/>
+                <a:latin typeface="Cascadia Code" panose="020B0609020000020004" pitchFamily="49" charset="0"/>
                 <a:ea typeface="Courier New" pitchFamily="34" charset="-122"/>
-                <a:cs typeface="Courier New" pitchFamily="34" charset="-120"/>
+                <a:cs typeface="Cascadia Code" panose="020B0609020000020004" pitchFamily="49" charset="0"/>
               </a:rPr>
               <a:t>: {</a:t>
             </a:r>
-            <a:endParaRPr lang="en-US" sz="1350" dirty="0"/>
+            <a:endParaRPr lang="en-US" sz="2000" dirty="0">
+              <a:latin typeface="Cascadia Code" panose="020B0609020000020004" pitchFamily="49" charset="0"/>
+              <a:cs typeface="Cascadia Code" panose="020B0609020000020004" pitchFamily="49" charset="0"/>
+            </a:endParaRPr>
           </a:p>
           <a:p>
             <a:pPr marL="0" indent="0" algn="l">
@@ -12351,50 +12469,53 @@
               <a:buNone/>
             </a:pPr>
             <a:r>
-              <a:rPr lang="en-US" sz="1350" dirty="0">
+              <a:rPr lang="en-US" sz="2000" dirty="0">
                 <a:solidFill>
                   <a:srgbClr val="9CDCFE"/>
                 </a:solidFill>
-                <a:latin typeface="Courier New" pitchFamily="34" charset="0"/>
+                <a:latin typeface="Cascadia Code" panose="020B0609020000020004" pitchFamily="49" charset="0"/>
                 <a:ea typeface="Courier New" pitchFamily="34" charset="-122"/>
-                <a:cs typeface="Courier New" pitchFamily="34" charset="-120"/>
-              </a:rPr>
-              <a:t xml:space="preserve">    variant</a:t>
-            </a:r>
-            <a:r>
-              <a:rPr lang="en-US" sz="1350" dirty="0">
+                <a:cs typeface="Cascadia Code" panose="020B0609020000020004" pitchFamily="49" charset="0"/>
+              </a:rPr>
+              <a:t>    variant</a:t>
+            </a:r>
+            <a:r>
+              <a:rPr lang="en-US" sz="2000" dirty="0">
                 <a:solidFill>
                   <a:srgbClr val="D8D8D8"/>
                 </a:solidFill>
-                <a:latin typeface="Courier New" pitchFamily="34" charset="0"/>
+                <a:latin typeface="Cascadia Code" panose="020B0609020000020004" pitchFamily="49" charset="0"/>
                 <a:ea typeface="Courier New" pitchFamily="34" charset="-122"/>
-                <a:cs typeface="Courier New" pitchFamily="34" charset="-120"/>
-              </a:rPr>
-              <a:t xml:space="preserve">: { primary: </a:t>
-            </a:r>
-            <a:r>
-              <a:rPr lang="en-US" sz="1350" dirty="0">
+                <a:cs typeface="Cascadia Code" panose="020B0609020000020004" pitchFamily="49" charset="0"/>
+              </a:rPr>
+              <a:t>: { primary: </a:t>
+            </a:r>
+            <a:r>
+              <a:rPr lang="en-US" sz="2000" dirty="0">
                 <a:solidFill>
                   <a:srgbClr val="F1CF25"/>
                 </a:solidFill>
-                <a:latin typeface="Courier New" pitchFamily="34" charset="0"/>
+                <a:latin typeface="Cascadia Code" panose="020B0609020000020004" pitchFamily="49" charset="0"/>
                 <a:ea typeface="Courier New" pitchFamily="34" charset="-122"/>
-                <a:cs typeface="Courier New" pitchFamily="34" charset="-120"/>
+                <a:cs typeface="Cascadia Code" panose="020B0609020000020004" pitchFamily="49" charset="0"/>
               </a:rPr>
               <a:t>"bg-mint text-ink"</a:t>
             </a:r>
             <a:r>
-              <a:rPr lang="en-US" sz="1350" dirty="0">
+              <a:rPr lang="en-US" sz="2000" dirty="0">
                 <a:solidFill>
                   <a:srgbClr val="D8D8D8"/>
                 </a:solidFill>
-                <a:latin typeface="Courier New" pitchFamily="34" charset="0"/>
+                <a:latin typeface="Cascadia Code" panose="020B0609020000020004" pitchFamily="49" charset="0"/>
                 <a:ea typeface="Courier New" pitchFamily="34" charset="-122"/>
-                <a:cs typeface="Courier New" pitchFamily="34" charset="-120"/>
+                <a:cs typeface="Cascadia Code" panose="020B0609020000020004" pitchFamily="49" charset="0"/>
               </a:rPr>
               <a:t>,</a:t>
             </a:r>
-            <a:endParaRPr lang="en-US" sz="1350" dirty="0"/>
+            <a:endParaRPr lang="en-US" sz="2000" dirty="0">
+              <a:latin typeface="Cascadia Code" panose="020B0609020000020004" pitchFamily="49" charset="0"/>
+              <a:cs typeface="Cascadia Code" panose="020B0609020000020004" pitchFamily="49" charset="0"/>
+            </a:endParaRPr>
           </a:p>
           <a:p>
             <a:pPr marL="0" indent="0" algn="l">
@@ -12404,39 +12525,42 @@
               <a:buNone/>
             </a:pPr>
             <a:r>
-              <a:rPr lang="en-US" sz="1350" dirty="0">
+              <a:rPr lang="en-US" sz="2000" dirty="0">
                 <a:solidFill>
                   <a:srgbClr val="D8D8D8"/>
                 </a:solidFill>
-                <a:latin typeface="Courier New" pitchFamily="34" charset="0"/>
+                <a:latin typeface="Cascadia Code" panose="020B0609020000020004" pitchFamily="49" charset="0"/>
                 <a:ea typeface="Courier New" pitchFamily="34" charset="-122"/>
-                <a:cs typeface="Courier New" pitchFamily="34" charset="-120"/>
-              </a:rPr>
-              <a:t xml:space="preserve">               destructive: </a:t>
-            </a:r>
-            <a:r>
-              <a:rPr lang="en-US" sz="1350" dirty="0">
+                <a:cs typeface="Cascadia Code" panose="020B0609020000020004" pitchFamily="49" charset="0"/>
+              </a:rPr>
+              <a:t>               destructive: </a:t>
+            </a:r>
+            <a:r>
+              <a:rPr lang="en-US" sz="2000" dirty="0">
                 <a:solidFill>
                   <a:srgbClr val="F1CF25"/>
                 </a:solidFill>
-                <a:latin typeface="Courier New" pitchFamily="34" charset="0"/>
+                <a:latin typeface="Cascadia Code" panose="020B0609020000020004" pitchFamily="49" charset="0"/>
                 <a:ea typeface="Courier New" pitchFamily="34" charset="-122"/>
-                <a:cs typeface="Courier New" pitchFamily="34" charset="-120"/>
+                <a:cs typeface="Cascadia Code" panose="020B0609020000020004" pitchFamily="49" charset="0"/>
               </a:rPr>
               <a:t>"bg-coral text-ink"</a:t>
             </a:r>
             <a:r>
-              <a:rPr lang="en-US" sz="1350" dirty="0">
+              <a:rPr lang="en-US" sz="2000" dirty="0">
                 <a:solidFill>
                   <a:srgbClr val="D8D8D8"/>
                 </a:solidFill>
-                <a:latin typeface="Courier New" pitchFamily="34" charset="0"/>
+                <a:latin typeface="Cascadia Code" panose="020B0609020000020004" pitchFamily="49" charset="0"/>
                 <a:ea typeface="Courier New" pitchFamily="34" charset="-122"/>
-                <a:cs typeface="Courier New" pitchFamily="34" charset="-120"/>
-              </a:rPr>
-              <a:t xml:space="preserve"> },</a:t>
-            </a:r>
-            <a:endParaRPr lang="en-US" sz="1350" dirty="0"/>
+                <a:cs typeface="Cascadia Code" panose="020B0609020000020004" pitchFamily="49" charset="0"/>
+              </a:rPr>
+              <a:t> },</a:t>
+            </a:r>
+            <a:endParaRPr lang="en-US" sz="2000" dirty="0">
+              <a:latin typeface="Cascadia Code" panose="020B0609020000020004" pitchFamily="49" charset="0"/>
+              <a:cs typeface="Cascadia Code" panose="020B0609020000020004" pitchFamily="49" charset="0"/>
+            </a:endParaRPr>
           </a:p>
           <a:p>
             <a:pPr marL="0" indent="0" algn="l">
@@ -12446,72 +12570,75 @@
               <a:buNone/>
             </a:pPr>
             <a:r>
-              <a:rPr lang="en-US" sz="1350" dirty="0">
+              <a:rPr lang="en-US" sz="2000" dirty="0">
                 <a:solidFill>
                   <a:srgbClr val="9CDCFE"/>
                 </a:solidFill>
-                <a:latin typeface="Courier New" pitchFamily="34" charset="0"/>
+                <a:latin typeface="Cascadia Code" panose="020B0609020000020004" pitchFamily="49" charset="0"/>
                 <a:ea typeface="Courier New" pitchFamily="34" charset="-122"/>
-                <a:cs typeface="Courier New" pitchFamily="34" charset="-120"/>
-              </a:rPr>
-              <a:t xml:space="preserve">    size</a:t>
-            </a:r>
-            <a:r>
-              <a:rPr lang="en-US" sz="1350" dirty="0">
+                <a:cs typeface="Cascadia Code" panose="020B0609020000020004" pitchFamily="49" charset="0"/>
+              </a:rPr>
+              <a:t>    size</a:t>
+            </a:r>
+            <a:r>
+              <a:rPr lang="en-US" sz="2000" dirty="0">
                 <a:solidFill>
                   <a:srgbClr val="D8D8D8"/>
                 </a:solidFill>
-                <a:latin typeface="Courier New" pitchFamily="34" charset="0"/>
+                <a:latin typeface="Cascadia Code" panose="020B0609020000020004" pitchFamily="49" charset="0"/>
                 <a:ea typeface="Courier New" pitchFamily="34" charset="-122"/>
-                <a:cs typeface="Courier New" pitchFamily="34" charset="-120"/>
-              </a:rPr>
-              <a:t xml:space="preserve">: { sm: </a:t>
-            </a:r>
-            <a:r>
-              <a:rPr lang="en-US" sz="1350" dirty="0">
+                <a:cs typeface="Cascadia Code" panose="020B0609020000020004" pitchFamily="49" charset="0"/>
+              </a:rPr>
+              <a:t>: { sm: </a:t>
+            </a:r>
+            <a:r>
+              <a:rPr lang="en-US" sz="2000" dirty="0">
                 <a:solidFill>
                   <a:srgbClr val="F1CF25"/>
                 </a:solidFill>
-                <a:latin typeface="Courier New" pitchFamily="34" charset="0"/>
+                <a:latin typeface="Cascadia Code" panose="020B0609020000020004" pitchFamily="49" charset="0"/>
                 <a:ea typeface="Courier New" pitchFamily="34" charset="-122"/>
-                <a:cs typeface="Courier New" pitchFamily="34" charset="-120"/>
+                <a:cs typeface="Cascadia Code" panose="020B0609020000020004" pitchFamily="49" charset="0"/>
               </a:rPr>
               <a:t>"h-8 px-3"</a:t>
             </a:r>
             <a:r>
-              <a:rPr lang="en-US" sz="1350" dirty="0">
+              <a:rPr lang="en-US" sz="2000" dirty="0">
                 <a:solidFill>
                   <a:srgbClr val="D8D8D8"/>
                 </a:solidFill>
-                <a:latin typeface="Courier New" pitchFamily="34" charset="0"/>
+                <a:latin typeface="Cascadia Code" panose="020B0609020000020004" pitchFamily="49" charset="0"/>
                 <a:ea typeface="Courier New" pitchFamily="34" charset="-122"/>
-                <a:cs typeface="Courier New" pitchFamily="34" charset="-120"/>
-              </a:rPr>
-              <a:t xml:space="preserve">, lg: </a:t>
-            </a:r>
-            <a:r>
-              <a:rPr lang="en-US" sz="1350" dirty="0">
+                <a:cs typeface="Cascadia Code" panose="020B0609020000020004" pitchFamily="49" charset="0"/>
+              </a:rPr>
+              <a:t>, lg: </a:t>
+            </a:r>
+            <a:r>
+              <a:rPr lang="en-US" sz="2000" dirty="0">
                 <a:solidFill>
                   <a:srgbClr val="F1CF25"/>
                 </a:solidFill>
-                <a:latin typeface="Courier New" pitchFamily="34" charset="0"/>
+                <a:latin typeface="Cascadia Code" panose="020B0609020000020004" pitchFamily="49" charset="0"/>
                 <a:ea typeface="Courier New" pitchFamily="34" charset="-122"/>
-                <a:cs typeface="Courier New" pitchFamily="34" charset="-120"/>
+                <a:cs typeface="Cascadia Code" panose="020B0609020000020004" pitchFamily="49" charset="0"/>
               </a:rPr>
               <a:t>"h-12 px-6"</a:t>
             </a:r>
             <a:r>
-              <a:rPr lang="en-US" sz="1350" dirty="0">
+              <a:rPr lang="en-US" sz="2000" dirty="0">
                 <a:solidFill>
                   <a:srgbClr val="D8D8D8"/>
                 </a:solidFill>
-                <a:latin typeface="Courier New" pitchFamily="34" charset="0"/>
+                <a:latin typeface="Cascadia Code" panose="020B0609020000020004" pitchFamily="49" charset="0"/>
                 <a:ea typeface="Courier New" pitchFamily="34" charset="-122"/>
-                <a:cs typeface="Courier New" pitchFamily="34" charset="-120"/>
-              </a:rPr>
-              <a:t xml:space="preserve"> },</a:t>
-            </a:r>
-            <a:endParaRPr lang="en-US" sz="1350" dirty="0"/>
+                <a:cs typeface="Cascadia Code" panose="020B0609020000020004" pitchFamily="49" charset="0"/>
+              </a:rPr>
+              <a:t> },</a:t>
+            </a:r>
+            <a:endParaRPr lang="en-US" sz="2000" dirty="0">
+              <a:latin typeface="Cascadia Code" panose="020B0609020000020004" pitchFamily="49" charset="0"/>
+              <a:cs typeface="Cascadia Code" panose="020B0609020000020004" pitchFamily="49" charset="0"/>
+            </a:endParaRPr>
           </a:p>
           <a:p>
             <a:pPr marL="0" indent="0" algn="l">
@@ -12521,17 +12648,20 @@
               <a:buNone/>
             </a:pPr>
             <a:r>
-              <a:rPr lang="en-US" sz="1350" dirty="0">
+              <a:rPr lang="en-US" sz="2000" dirty="0">
                 <a:solidFill>
                   <a:srgbClr val="D8D8D8"/>
                 </a:solidFill>
-                <a:latin typeface="Courier New" pitchFamily="34" charset="0"/>
+                <a:latin typeface="Cascadia Code" panose="020B0609020000020004" pitchFamily="49" charset="0"/>
                 <a:ea typeface="Courier New" pitchFamily="34" charset="-122"/>
-                <a:cs typeface="Courier New" pitchFamily="34" charset="-120"/>
-              </a:rPr>
-              <a:t xml:space="preserve">  },</a:t>
-            </a:r>
-            <a:endParaRPr lang="en-US" sz="1350" dirty="0"/>
+                <a:cs typeface="Cascadia Code" panose="020B0609020000020004" pitchFamily="49" charset="0"/>
+              </a:rPr>
+              <a:t>  },</a:t>
+            </a:r>
+            <a:endParaRPr lang="en-US" sz="2000" dirty="0">
+              <a:latin typeface="Cascadia Code" panose="020B0609020000020004" pitchFamily="49" charset="0"/>
+              <a:cs typeface="Cascadia Code" panose="020B0609020000020004" pitchFamily="49" charset="0"/>
+            </a:endParaRPr>
           </a:p>
           <a:p>
             <a:pPr marL="0" indent="0" algn="l">
@@ -12541,28 +12671,31 @@
               <a:buNone/>
             </a:pPr>
             <a:r>
-              <a:rPr lang="en-US" sz="1350" dirty="0">
+              <a:rPr lang="en-US" sz="2000" dirty="0">
                 <a:solidFill>
                   <a:srgbClr val="D8D8D8"/>
                 </a:solidFill>
-                <a:latin typeface="Courier New" pitchFamily="34" charset="0"/>
+                <a:latin typeface="Cascadia Code" panose="020B0609020000020004" pitchFamily="49" charset="0"/>
                 <a:ea typeface="Courier New" pitchFamily="34" charset="-122"/>
-                <a:cs typeface="Courier New" pitchFamily="34" charset="-120"/>
+                <a:cs typeface="Cascadia Code" panose="020B0609020000020004" pitchFamily="49" charset="0"/>
               </a:rPr>
               <a:t>})</a:t>
             </a:r>
             <a:r>
-              <a:rPr lang="en-US" sz="1350" dirty="0">
+              <a:rPr lang="en-US" sz="2000" dirty="0">
                 <a:solidFill>
                   <a:srgbClr val="6E6E6E"/>
                 </a:solidFill>
-                <a:latin typeface="Courier New" pitchFamily="34" charset="0"/>
+                <a:latin typeface="Cascadia Code" panose="020B0609020000020004" pitchFamily="49" charset="0"/>
                 <a:ea typeface="Courier New" pitchFamily="34" charset="-122"/>
-                <a:cs typeface="Courier New" pitchFamily="34" charset="-120"/>
-              </a:rPr>
-              <a:t xml:space="preserve">   // ← variants are now type-checked &amp; autocompleted</a:t>
-            </a:r>
-            <a:endParaRPr lang="en-US" sz="1350" dirty="0"/>
+                <a:cs typeface="Cascadia Code" panose="020B0609020000020004" pitchFamily="49" charset="0"/>
+              </a:rPr>
+              <a:t>   // ← variants are now type-checked &amp; autocompleted</a:t>
+            </a:r>
+            <a:endParaRPr lang="en-US" sz="2000" dirty="0">
+              <a:latin typeface="Cascadia Code" panose="020B0609020000020004" pitchFamily="49" charset="0"/>
+              <a:cs typeface="Cascadia Code" panose="020B0609020000020004" pitchFamily="49" charset="0"/>
+            </a:endParaRPr>
           </a:p>
         </p:txBody>
       </p:sp>
@@ -12574,7 +12707,7 @@
         </p:nvSpPr>
         <p:spPr>
           <a:xfrm>
-            <a:off x="594360" y="5074920"/>
+            <a:off x="594360" y="5943600"/>
             <a:ext cx="969264" cy="411480"/>
           </a:xfrm>
           <a:prstGeom prst="roundRect">
@@ -12608,7 +12741,7 @@
         </p:nvSpPr>
         <p:spPr>
           <a:xfrm>
-            <a:off x="594360" y="5074920"/>
+            <a:off x="594360" y="5943600"/>
             <a:ext cx="969264" cy="411480"/>
           </a:xfrm>
           <a:prstGeom prst="rect">
@@ -12647,7 +12780,7 @@
         </p:nvSpPr>
         <p:spPr>
           <a:xfrm>
-            <a:off x="1792224" y="5074920"/>
+            <a:off x="1792224" y="5943600"/>
             <a:ext cx="2505456" cy="411480"/>
           </a:xfrm>
           <a:prstGeom prst="roundRect">
@@ -12681,7 +12814,7 @@
         </p:nvSpPr>
         <p:spPr>
           <a:xfrm>
-            <a:off x="1792224" y="5074920"/>
+            <a:off x="1792224" y="5943600"/>
             <a:ext cx="2505456" cy="411480"/>
           </a:xfrm>
           <a:prstGeom prst="rect">
@@ -12720,7 +12853,7 @@
         </p:nvSpPr>
         <p:spPr>
           <a:xfrm>
-            <a:off x="4526280" y="5074920"/>
+            <a:off x="4526280" y="5943600"/>
             <a:ext cx="2176272" cy="411480"/>
           </a:xfrm>
           <a:prstGeom prst="roundRect">
@@ -12754,7 +12887,7 @@
         </p:nvSpPr>
         <p:spPr>
           <a:xfrm>
-            <a:off x="4526280" y="5074920"/>
+            <a:off x="4526280" y="5943600"/>
             <a:ext cx="2176272" cy="411480"/>
           </a:xfrm>
           <a:prstGeom prst="rect">
@@ -12793,7 +12926,7 @@
         </p:nvSpPr>
         <p:spPr>
           <a:xfrm>
-            <a:off x="6931152" y="5074920"/>
+            <a:off x="6931152" y="5943600"/>
             <a:ext cx="1627632" cy="411480"/>
           </a:xfrm>
           <a:prstGeom prst="roundRect">
@@ -12827,7 +12960,7 @@
         </p:nvSpPr>
         <p:spPr>
           <a:xfrm>
-            <a:off x="6931152" y="5074920"/>
+            <a:off x="6931152" y="5943600"/>
             <a:ext cx="1627632" cy="411480"/>
           </a:xfrm>
           <a:prstGeom prst="rect">
@@ -13311,7 +13444,7 @@
               <a:buNone/>
             </a:pPr>
             <a:r>
-              <a:rPr lang="en-US" sz="1500" dirty="0">
+              <a:rPr lang="en-US" sz="1600" dirty="0">
                 <a:solidFill>
                   <a:srgbClr val="A6A6A6"/>
                 </a:solidFill>
@@ -13321,7 +13454,7 @@
               </a:rPr>
               <a:t>→ open the cva Button playground   ·   then show IntelliSense on  &lt;Button variant="</a:t>
             </a:r>
-            <a:endParaRPr lang="en-US" sz="1500" dirty="0"/>
+            <a:endParaRPr lang="en-US" sz="1600" dirty="0"/>
           </a:p>
         </p:txBody>
       </p:sp>
@@ -14258,7 +14391,7 @@
                 <a:ea typeface="Arial" pitchFamily="34" charset="-122"/>
                 <a:cs typeface="Arial" pitchFamily="34" charset="-120"/>
               </a:rPr>
-              <a:t xml:space="preserve">One stack: </a:t>
+              <a:t>One stack: </a:t>
             </a:r>
             <a:r>
               <a:rPr lang="en-US" sz="2600" b="1" dirty="0">
@@ -14540,7 +14673,7 @@
               <a:buNone/>
             </a:pPr>
             <a:r>
-              <a:rPr lang="en-US" sz="1800" b="1" dirty="0">
+              <a:rPr lang="en-US" b="1" dirty="0">
                 <a:solidFill>
                   <a:srgbClr val="FF6A4C"/>
                 </a:solidFill>
@@ -14550,7 +14683,7 @@
               </a:rPr>
               <a:t>“ugly class soup”</a:t>
             </a:r>
-            <a:endParaRPr lang="en-US" sz="1800" dirty="0"/>
+            <a:endParaRPr lang="en-US" dirty="0"/>
           </a:p>
         </p:txBody>
       </p:sp>
@@ -14582,7 +14715,7 @@
               <a:buNone/>
             </a:pPr>
             <a:r>
-              <a:rPr lang="en-US" sz="1500" dirty="0">
+              <a:rPr lang="en-US" dirty="0">
                 <a:solidFill>
                   <a:srgbClr val="FFFFFF"/>
                 </a:solidFill>
@@ -14592,7 +14725,7 @@
               </a:rPr>
               <a:t>Extract components in your framework, not @apply. The soup lives in ONE place you rarely re-read.</a:t>
             </a:r>
-            <a:endParaRPr lang="en-US" sz="1500" dirty="0"/>
+            <a:endParaRPr lang="en-US" dirty="0"/>
           </a:p>
         </p:txBody>
       </p:sp>
@@ -14658,7 +14791,7 @@
               <a:buNone/>
             </a:pPr>
             <a:r>
-              <a:rPr lang="en-US" sz="1800" b="1" dirty="0">
+              <a:rPr lang="en-US" b="1" dirty="0">
                 <a:solidFill>
                   <a:srgbClr val="F1CF25"/>
                 </a:solidFill>
@@ -14668,7 +14801,7 @@
               </a:rPr>
               <a:t>“a steep learning curve”</a:t>
             </a:r>
-            <a:endParaRPr lang="en-US" sz="1800" dirty="0"/>
+            <a:endParaRPr lang="en-US" dirty="0"/>
           </a:p>
         </p:txBody>
       </p:sp>
@@ -14700,7 +14833,7 @@
               <a:buNone/>
             </a:pPr>
             <a:r>
-              <a:rPr lang="en-US" sz="1500" dirty="0">
+              <a:rPr lang="en-US" dirty="0">
                 <a:solidFill>
                   <a:srgbClr val="FFFFFF"/>
                 </a:solidFill>
@@ -14710,7 +14843,7 @@
               </a:rPr>
               <a:t>It's a closed set + IntelliSense. Learn it once; it transfers to every project and every model.</a:t>
             </a:r>
-            <a:endParaRPr lang="en-US" sz="1500" dirty="0"/>
+            <a:endParaRPr lang="en-US" dirty="0"/>
           </a:p>
         </p:txBody>
       </p:sp>
@@ -14776,7 +14909,7 @@
               <a:buNone/>
             </a:pPr>
             <a:r>
-              <a:rPr lang="en-US" sz="1800" b="1" dirty="0">
+              <a:rPr lang="en-US" b="1" dirty="0">
                 <a:solidFill>
                   <a:srgbClr val="75DFBC"/>
                 </a:solidFill>
@@ -14786,7 +14919,7 @@
               </a:rPr>
               <a:t>“just inline styles”</a:t>
             </a:r>
-            <a:endParaRPr lang="en-US" sz="1800" dirty="0"/>
+            <a:endParaRPr lang="en-US" dirty="0"/>
           </a:p>
         </p:txBody>
       </p:sp>
@@ -14818,7 +14951,7 @@
               <a:buNone/>
             </a:pPr>
             <a:r>
-              <a:rPr lang="en-US" sz="1500" dirty="0">
+              <a:rPr lang="en-US" dirty="0">
                 <a:solidFill>
                   <a:srgbClr val="FFFFFF"/>
                 </a:solidFill>
@@ -14828,7 +14961,7 @@
               </a:rPr>
               <a:t>No: design tokens + hover: / md: / dark: variants + purge. Inline styles can't do any of that.</a:t>
             </a:r>
-            <a:endParaRPr lang="en-US" sz="1500" dirty="0"/>
+            <a:endParaRPr lang="en-US" dirty="0"/>
           </a:p>
         </p:txBody>
       </p:sp>
@@ -16388,7 +16521,7 @@
           <a:bodyPr/>
           <a:lstStyle/>
           <a:p>
-            <a:endParaRPr lang="en-US"/>
+            <a:endParaRPr lang="en-US" sz="2400"/>
           </a:p>
         </p:txBody>
       </p:sp>
@@ -16417,7 +16550,7 @@
               <a:buNone/>
             </a:pPr>
             <a:r>
-              <a:rPr lang="en-US" sz="1500" b="1" dirty="0">
+              <a:rPr lang="en-US" b="1" dirty="0">
                 <a:solidFill>
                   <a:srgbClr val="75DFBC"/>
                 </a:solidFill>
@@ -16427,7 +16560,7 @@
               </a:rPr>
               <a:t>tailwindcss.com</a:t>
             </a:r>
-            <a:endParaRPr lang="en-US" sz="1500" dirty="0"/>
+            <a:endParaRPr lang="en-US" dirty="0"/>
           </a:p>
         </p:txBody>
       </p:sp>
@@ -16456,7 +16589,7 @@
               <a:buNone/>
             </a:pPr>
             <a:r>
-              <a:rPr lang="en-US" sz="1300" dirty="0">
+              <a:rPr lang="en-US" sz="1600" dirty="0">
                 <a:solidFill>
                   <a:srgbClr val="A6A6A6"/>
                 </a:solidFill>
@@ -16466,7 +16599,7 @@
               </a:rPr>
               <a:t>docs + the JIT engine</a:t>
             </a:r>
-            <a:endParaRPr lang="en-US" sz="1300" dirty="0"/>
+            <a:endParaRPr lang="en-US" sz="1600" dirty="0"/>
           </a:p>
         </p:txBody>
       </p:sp>
@@ -16493,7 +16626,7 @@
           <a:bodyPr/>
           <a:lstStyle/>
           <a:p>
-            <a:endParaRPr lang="en-US"/>
+            <a:endParaRPr lang="en-US" sz="2400"/>
           </a:p>
         </p:txBody>
       </p:sp>
@@ -16522,7 +16655,7 @@
               <a:buNone/>
             </a:pPr>
             <a:r>
-              <a:rPr lang="en-US" sz="1500" b="1" dirty="0">
+              <a:rPr lang="en-US" b="1" dirty="0">
                 <a:solidFill>
                   <a:srgbClr val="75DFBC"/>
                 </a:solidFill>
@@ -16532,7 +16665,7 @@
               </a:rPr>
               <a:t>ui.shadcn.com</a:t>
             </a:r>
-            <a:endParaRPr lang="en-US" sz="1500" dirty="0"/>
+            <a:endParaRPr lang="en-US" dirty="0"/>
           </a:p>
         </p:txBody>
       </p:sp>
@@ -16561,7 +16694,7 @@
               <a:buNone/>
             </a:pPr>
             <a:r>
-              <a:rPr lang="en-US" sz="1300" dirty="0">
+              <a:rPr lang="en-US" sz="1600" dirty="0">
                 <a:solidFill>
                   <a:srgbClr val="A6A6A6"/>
                 </a:solidFill>
@@ -16571,7 +16704,7 @@
               </a:rPr>
               <a:t>the copy-paste component standard</a:t>
             </a:r>
-            <a:endParaRPr lang="en-US" sz="1300" dirty="0"/>
+            <a:endParaRPr lang="en-US" sz="1600" dirty="0"/>
           </a:p>
         </p:txBody>
       </p:sp>
@@ -16598,7 +16731,7 @@
           <a:bodyPr/>
           <a:lstStyle/>
           <a:p>
-            <a:endParaRPr lang="en-US"/>
+            <a:endParaRPr lang="en-US" sz="2400"/>
           </a:p>
         </p:txBody>
       </p:sp>
@@ -16627,7 +16760,7 @@
               <a:buNone/>
             </a:pPr>
             <a:r>
-              <a:rPr lang="en-US" sz="1500" b="1" dirty="0">
+              <a:rPr lang="en-US" b="1" dirty="0">
                 <a:solidFill>
                   <a:srgbClr val="75DFBC"/>
                 </a:solidFill>
@@ -16637,7 +16770,7 @@
               </a:rPr>
               <a:t>cva.style</a:t>
             </a:r>
-            <a:endParaRPr lang="en-US" sz="1500" dirty="0"/>
+            <a:endParaRPr lang="en-US" dirty="0"/>
           </a:p>
         </p:txBody>
       </p:sp>
@@ -16666,7 +16799,7 @@
               <a:buNone/>
             </a:pPr>
             <a:r>
-              <a:rPr lang="en-US" sz="1300" dirty="0">
+              <a:rPr lang="en-US" sz="1600" dirty="0">
                 <a:solidFill>
                   <a:srgbClr val="A6A6A6"/>
                 </a:solidFill>
@@ -16676,7 +16809,7 @@
               </a:rPr>
               <a:t>class-variance-authority</a:t>
             </a:r>
-            <a:endParaRPr lang="en-US" sz="1300" dirty="0"/>
+            <a:endParaRPr lang="en-US" sz="1600" dirty="0"/>
           </a:p>
         </p:txBody>
       </p:sp>
@@ -16703,7 +16836,7 @@
           <a:bodyPr/>
           <a:lstStyle/>
           <a:p>
-            <a:endParaRPr lang="en-US"/>
+            <a:endParaRPr lang="en-US" sz="2400"/>
           </a:p>
         </p:txBody>
       </p:sp>
@@ -16732,7 +16865,7 @@
               <a:buNone/>
             </a:pPr>
             <a:r>
-              <a:rPr lang="en-US" sz="1500" b="1" dirty="0">
+              <a:rPr lang="en-US" b="1" dirty="0">
                 <a:solidFill>
                   <a:srgbClr val="75DFBC"/>
                 </a:solidFill>
@@ -16742,7 +16875,7 @@
               </a:rPr>
               <a:t>github.com/dcastil/tailwind-merge</a:t>
             </a:r>
-            <a:endParaRPr lang="en-US" sz="1500" dirty="0"/>
+            <a:endParaRPr lang="en-US" dirty="0"/>
           </a:p>
         </p:txBody>
       </p:sp>
@@ -16771,7 +16904,7 @@
               <a:buNone/>
             </a:pPr>
             <a:r>
-              <a:rPr lang="en-US" sz="1300" dirty="0">
+              <a:rPr lang="en-US" sz="1600" dirty="0">
                 <a:solidFill>
                   <a:srgbClr val="A6A6A6"/>
                 </a:solidFill>
@@ -16781,7 +16914,7 @@
               </a:rPr>
               <a:t>conflict-safe class merging</a:t>
             </a:r>
-            <a:endParaRPr lang="en-US" sz="1300" dirty="0"/>
+            <a:endParaRPr lang="en-US" sz="1600" dirty="0"/>
           </a:p>
         </p:txBody>
       </p:sp>
@@ -16808,7 +16941,7 @@
           <a:bodyPr/>
           <a:lstStyle/>
           <a:p>
-            <a:endParaRPr lang="en-US"/>
+            <a:endParaRPr lang="en-US" sz="2400"/>
           </a:p>
         </p:txBody>
       </p:sp>
@@ -16837,7 +16970,7 @@
               <a:buNone/>
             </a:pPr>
             <a:r>
-              <a:rPr lang="en-US" sz="1500" b="1" dirty="0">
+              <a:rPr lang="en-US" b="1" dirty="0">
                 <a:solidFill>
                   <a:srgbClr val="75DFBC"/>
                 </a:solidFill>
@@ -16847,7 +16980,7 @@
               </a:rPr>
               <a:t>htmx.org/essays/locality-of-behaviour</a:t>
             </a:r>
-            <a:endParaRPr lang="en-US" sz="1500" dirty="0"/>
+            <a:endParaRPr lang="en-US" dirty="0"/>
           </a:p>
         </p:txBody>
       </p:sp>
@@ -16876,7 +17009,7 @@
               <a:buNone/>
             </a:pPr>
             <a:r>
-              <a:rPr lang="en-US" sz="1300" dirty="0">
+              <a:rPr lang="en-US" sz="1600" dirty="0">
                 <a:solidFill>
                   <a:srgbClr val="A6A6A6"/>
                 </a:solidFill>
@@ -16886,7 +17019,7 @@
               </a:rPr>
               <a:t>the locality essay</a:t>
             </a:r>
-            <a:endParaRPr lang="en-US" sz="1300" dirty="0"/>
+            <a:endParaRPr lang="en-US" sz="1600" dirty="0"/>
           </a:p>
         </p:txBody>
       </p:sp>
@@ -16913,7 +17046,7 @@
           <a:bodyPr/>
           <a:lstStyle/>
           <a:p>
-            <a:endParaRPr lang="en-US"/>
+            <a:endParaRPr lang="en-US" sz="2400"/>
           </a:p>
         </p:txBody>
       </p:sp>
@@ -16942,7 +17075,7 @@
               <a:buNone/>
             </a:pPr>
             <a:r>
-              <a:rPr lang="en-US" sz="1500" b="1" dirty="0">
+              <a:rPr lang="en-US" b="1" dirty="0">
                 <a:solidFill>
                   <a:srgbClr val="75DFBC"/>
                 </a:solidFill>
@@ -16952,7 +17085,7 @@
               </a:rPr>
               <a:t>v0.dev</a:t>
             </a:r>
-            <a:endParaRPr lang="en-US" sz="1500" dirty="0"/>
+            <a:endParaRPr lang="en-US" dirty="0"/>
           </a:p>
         </p:txBody>
       </p:sp>
@@ -16981,7 +17114,7 @@
               <a:buNone/>
             </a:pPr>
             <a:r>
-              <a:rPr lang="en-US" sz="1300" dirty="0">
+              <a:rPr lang="en-US" sz="1600" dirty="0">
                 <a:solidFill>
                   <a:srgbClr val="A6A6A6"/>
                 </a:solidFill>
@@ -16991,7 +17124,7 @@
               </a:rPr>
               <a:t>see the machines vote, live</a:t>
             </a:r>
-            <a:endParaRPr lang="en-US" sz="1300" dirty="0"/>
+            <a:endParaRPr lang="en-US" sz="1600" dirty="0"/>
           </a:p>
         </p:txBody>
       </p:sp>
@@ -17247,7 +17380,7 @@
                 <a:ea typeface="Arial" pitchFamily="34" charset="-122"/>
                 <a:cs typeface="Arial" pitchFamily="34" charset="-120"/>
               </a:rPr>
-              <a:t xml:space="preserve">Demo repo:  </a:t>
+              <a:t>Demo repo:  </a:t>
             </a:r>
             <a:r>
               <a:rPr lang="en-US" sz="1600" dirty="0" err="1">
@@ -17870,7 +18003,7 @@
               <a:buNone/>
             </a:pPr>
             <a:r>
-              <a:rPr lang="en-US" sz="2400" i="1" dirty="0">
+              <a:rPr lang="en-US" sz="2800" i="1" dirty="0">
                 <a:solidFill>
                   <a:srgbClr val="A6A6A6"/>
                 </a:solidFill>
@@ -17880,7 +18013,7 @@
               </a:rPr>
               <a:t>…and why you should too</a:t>
             </a:r>
-            <a:endParaRPr lang="en-US" sz="2400" dirty="0"/>
+            <a:endParaRPr lang="en-US" sz="2800" dirty="0"/>
           </a:p>
         </p:txBody>
       </p:sp>
@@ -17919,368 +18052,7 @@
               </a:rPr>
               <a:t>Devlin Duldulao</a:t>
             </a:r>
-            <a:r>
-              <a:rPr lang="en-US" sz="1600" dirty="0">
-                <a:solidFill>
-                  <a:srgbClr val="A6A6A6"/>
-                </a:solidFill>
-                <a:latin typeface="Arial" pitchFamily="34" charset="0"/>
-                <a:ea typeface="Arial" pitchFamily="34" charset="-122"/>
-                <a:cs typeface="Arial" pitchFamily="34" charset="-120"/>
-              </a:rPr>
-              <a:t xml:space="preserve">   •   Web Developer Conference   •   2025</a:t>
-            </a:r>
             <a:endParaRPr lang="en-US" sz="1600" dirty="0"/>
-          </a:p>
-        </p:txBody>
-      </p:sp>
-      <p:sp>
-        <p:nvSpPr>
-          <p:cNvPr id="5" name="Shape 3"/>
-          <p:cNvSpPr/>
-          <p:nvPr/>
-        </p:nvSpPr>
-        <p:spPr>
-          <a:xfrm>
-            <a:off x="594360" y="5715000"/>
-            <a:ext cx="923544" cy="365760"/>
-          </a:xfrm>
-          <a:prstGeom prst="roundRect">
-            <a:avLst>
-              <a:gd name="adj" fmla="val 50000"/>
-            </a:avLst>
-          </a:prstGeom>
-          <a:ln w="12700">
-            <a:solidFill>
-              <a:srgbClr val="3A3A3A"/>
-            </a:solidFill>
-            <a:prstDash val="solid"/>
-          </a:ln>
-        </p:spPr>
-        <p:txBody>
-          <a:bodyPr/>
-          <a:lstStyle/>
-          <a:p>
-            <a:endParaRPr lang="en-US"/>
-          </a:p>
-        </p:txBody>
-      </p:sp>
-      <p:sp>
-        <p:nvSpPr>
-          <p:cNvPr id="6" name="Text 4"/>
-          <p:cNvSpPr/>
-          <p:nvPr/>
-        </p:nvSpPr>
-        <p:spPr>
-          <a:xfrm>
-            <a:off x="594360" y="5715000"/>
-            <a:ext cx="923544" cy="365760"/>
-          </a:xfrm>
-          <a:prstGeom prst="rect">
-            <a:avLst/>
-          </a:prstGeom>
-          <a:noFill/>
-          <a:ln/>
-        </p:spPr>
-        <p:txBody>
-          <a:bodyPr wrap="square" lIns="0" tIns="0" rIns="0" bIns="0" rtlCol="0" anchor="ctr"/>
-          <a:lstStyle/>
-          <a:p>
-            <a:pPr marL="0" indent="0" algn="ctr">
-              <a:buNone/>
-            </a:pPr>
-            <a:r>
-              <a:rPr lang="en-US" sz="1200" b="1" dirty="0">
-                <a:solidFill>
-                  <a:srgbClr val="75DFBC"/>
-                </a:solidFill>
-                <a:latin typeface="Arial" pitchFamily="34" charset="0"/>
-                <a:ea typeface="Arial" pitchFamily="34" charset="-122"/>
-                <a:cs typeface="Arial" pitchFamily="34" charset="-120"/>
-              </a:rPr>
-              <a:t>flex</a:t>
-            </a:r>
-            <a:endParaRPr lang="en-US" sz="1200" dirty="0"/>
-          </a:p>
-        </p:txBody>
-      </p:sp>
-      <p:sp>
-        <p:nvSpPr>
-          <p:cNvPr id="7" name="Shape 5"/>
-          <p:cNvSpPr/>
-          <p:nvPr/>
-        </p:nvSpPr>
-        <p:spPr>
-          <a:xfrm>
-            <a:off x="1700784" y="5715000"/>
-            <a:ext cx="1764792" cy="365760"/>
-          </a:xfrm>
-          <a:prstGeom prst="roundRect">
-            <a:avLst>
-              <a:gd name="adj" fmla="val 50000"/>
-            </a:avLst>
-          </a:prstGeom>
-          <a:ln w="12700">
-            <a:solidFill>
-              <a:srgbClr val="3A3A3A"/>
-            </a:solidFill>
-            <a:prstDash val="solid"/>
-          </a:ln>
-        </p:spPr>
-        <p:txBody>
-          <a:bodyPr/>
-          <a:lstStyle/>
-          <a:p>
-            <a:endParaRPr lang="en-US"/>
-          </a:p>
-        </p:txBody>
-      </p:sp>
-      <p:sp>
-        <p:nvSpPr>
-          <p:cNvPr id="8" name="Text 6"/>
-          <p:cNvSpPr/>
-          <p:nvPr/>
-        </p:nvSpPr>
-        <p:spPr>
-          <a:xfrm>
-            <a:off x="1700784" y="5715000"/>
-            <a:ext cx="1764792" cy="365760"/>
-          </a:xfrm>
-          <a:prstGeom prst="rect">
-            <a:avLst/>
-          </a:prstGeom>
-          <a:noFill/>
-          <a:ln/>
-        </p:spPr>
-        <p:txBody>
-          <a:bodyPr wrap="square" lIns="0" tIns="0" rIns="0" bIns="0" rtlCol="0" anchor="ctr"/>
-          <a:lstStyle/>
-          <a:p>
-            <a:pPr marL="0" indent="0" algn="ctr">
-              <a:buNone/>
-            </a:pPr>
-            <a:r>
-              <a:rPr lang="en-US" sz="1200" b="1" dirty="0">
-                <a:solidFill>
-                  <a:srgbClr val="F1CF25"/>
-                </a:solidFill>
-                <a:latin typeface="Arial" pitchFamily="34" charset="0"/>
-                <a:ea typeface="Arial" pitchFamily="34" charset="-122"/>
-                <a:cs typeface="Arial" pitchFamily="34" charset="-120"/>
-              </a:rPr>
-              <a:t>items-center</a:t>
-            </a:r>
-            <a:endParaRPr lang="en-US" sz="1200" dirty="0"/>
-          </a:p>
-        </p:txBody>
-      </p:sp>
-      <p:sp>
-        <p:nvSpPr>
-          <p:cNvPr id="9" name="Shape 7"/>
-          <p:cNvSpPr/>
-          <p:nvPr/>
-        </p:nvSpPr>
-        <p:spPr>
-          <a:xfrm>
-            <a:off x="3648456" y="5715000"/>
-            <a:ext cx="1028700" cy="365760"/>
-          </a:xfrm>
-          <a:prstGeom prst="roundRect">
-            <a:avLst>
-              <a:gd name="adj" fmla="val 50000"/>
-            </a:avLst>
-          </a:prstGeom>
-          <a:ln w="12700">
-            <a:solidFill>
-              <a:srgbClr val="3A3A3A"/>
-            </a:solidFill>
-            <a:prstDash val="solid"/>
-          </a:ln>
-        </p:spPr>
-        <p:txBody>
-          <a:bodyPr/>
-          <a:lstStyle/>
-          <a:p>
-            <a:endParaRPr lang="en-US"/>
-          </a:p>
-        </p:txBody>
-      </p:sp>
-      <p:sp>
-        <p:nvSpPr>
-          <p:cNvPr id="10" name="Text 8"/>
-          <p:cNvSpPr/>
-          <p:nvPr/>
-        </p:nvSpPr>
-        <p:spPr>
-          <a:xfrm>
-            <a:off x="3648456" y="5715000"/>
-            <a:ext cx="1028700" cy="365760"/>
-          </a:xfrm>
-          <a:prstGeom prst="rect">
-            <a:avLst/>
-          </a:prstGeom>
-          <a:noFill/>
-          <a:ln/>
-        </p:spPr>
-        <p:txBody>
-          <a:bodyPr wrap="square" lIns="0" tIns="0" rIns="0" bIns="0" rtlCol="0" anchor="ctr"/>
-          <a:lstStyle/>
-          <a:p>
-            <a:pPr marL="0" indent="0" algn="ctr">
-              <a:buNone/>
-            </a:pPr>
-            <a:r>
-              <a:rPr lang="en-US" sz="1200" b="1" dirty="0">
-                <a:solidFill>
-                  <a:srgbClr val="75DFBC"/>
-                </a:solidFill>
-                <a:latin typeface="Arial" pitchFamily="34" charset="0"/>
-                <a:ea typeface="Arial" pitchFamily="34" charset="-122"/>
-                <a:cs typeface="Arial" pitchFamily="34" charset="-120"/>
-              </a:rPr>
-              <a:t>gap-4</a:t>
-            </a:r>
-            <a:endParaRPr lang="en-US" sz="1200" dirty="0"/>
-          </a:p>
-        </p:txBody>
-      </p:sp>
-      <p:sp>
-        <p:nvSpPr>
-          <p:cNvPr id="11" name="Shape 9"/>
-          <p:cNvSpPr/>
-          <p:nvPr/>
-        </p:nvSpPr>
-        <p:spPr>
-          <a:xfrm>
-            <a:off x="4860036" y="5715000"/>
-            <a:ext cx="1659636" cy="365760"/>
-          </a:xfrm>
-          <a:prstGeom prst="roundRect">
-            <a:avLst>
-              <a:gd name="adj" fmla="val 50000"/>
-            </a:avLst>
-          </a:prstGeom>
-          <a:ln w="12700">
-            <a:solidFill>
-              <a:srgbClr val="3A3A3A"/>
-            </a:solidFill>
-            <a:prstDash val="solid"/>
-          </a:ln>
-        </p:spPr>
-        <p:txBody>
-          <a:bodyPr/>
-          <a:lstStyle/>
-          <a:p>
-            <a:endParaRPr lang="en-US"/>
-          </a:p>
-        </p:txBody>
-      </p:sp>
-      <p:sp>
-        <p:nvSpPr>
-          <p:cNvPr id="12" name="Text 10"/>
-          <p:cNvSpPr/>
-          <p:nvPr/>
-        </p:nvSpPr>
-        <p:spPr>
-          <a:xfrm>
-            <a:off x="4860036" y="5715000"/>
-            <a:ext cx="1659636" cy="365760"/>
-          </a:xfrm>
-          <a:prstGeom prst="rect">
-            <a:avLst/>
-          </a:prstGeom>
-          <a:noFill/>
-          <a:ln/>
-        </p:spPr>
-        <p:txBody>
-          <a:bodyPr wrap="square" lIns="0" tIns="0" rIns="0" bIns="0" rtlCol="0" anchor="ctr"/>
-          <a:lstStyle/>
-          <a:p>
-            <a:pPr marL="0" indent="0" algn="ctr">
-              <a:buNone/>
-            </a:pPr>
-            <a:r>
-              <a:rPr lang="en-US" sz="1200" b="1" dirty="0">
-                <a:solidFill>
-                  <a:srgbClr val="F1CF25"/>
-                </a:solidFill>
-                <a:latin typeface="Arial" pitchFamily="34" charset="0"/>
-                <a:ea typeface="Arial" pitchFamily="34" charset="-122"/>
-                <a:cs typeface="Arial" pitchFamily="34" charset="-120"/>
-              </a:rPr>
-              <a:t>rounded-2xl</a:t>
-            </a:r>
-            <a:endParaRPr lang="en-US" sz="1200" dirty="0"/>
-          </a:p>
-        </p:txBody>
-      </p:sp>
-      <p:sp>
-        <p:nvSpPr>
-          <p:cNvPr id="13" name="Shape 11"/>
-          <p:cNvSpPr/>
-          <p:nvPr/>
-        </p:nvSpPr>
-        <p:spPr>
-          <a:xfrm>
-            <a:off x="6702552" y="5715000"/>
-            <a:ext cx="1869948" cy="365760"/>
-          </a:xfrm>
-          <a:prstGeom prst="roundRect">
-            <a:avLst>
-              <a:gd name="adj" fmla="val 50000"/>
-            </a:avLst>
-          </a:prstGeom>
-          <a:ln w="12700">
-            <a:solidFill>
-              <a:srgbClr val="3A3A3A"/>
-            </a:solidFill>
-            <a:prstDash val="solid"/>
-          </a:ln>
-        </p:spPr>
-        <p:txBody>
-          <a:bodyPr/>
-          <a:lstStyle/>
-          <a:p>
-            <a:endParaRPr lang="en-US"/>
-          </a:p>
-        </p:txBody>
-      </p:sp>
-      <p:sp>
-        <p:nvSpPr>
-          <p:cNvPr id="14" name="Text 12"/>
-          <p:cNvSpPr/>
-          <p:nvPr/>
-        </p:nvSpPr>
-        <p:spPr>
-          <a:xfrm>
-            <a:off x="6702552" y="5715000"/>
-            <a:ext cx="1869948" cy="365760"/>
-          </a:xfrm>
-          <a:prstGeom prst="rect">
-            <a:avLst/>
-          </a:prstGeom>
-          <a:noFill/>
-          <a:ln/>
-        </p:spPr>
-        <p:txBody>
-          <a:bodyPr wrap="square" lIns="0" tIns="0" rIns="0" bIns="0" rtlCol="0" anchor="ctr"/>
-          <a:lstStyle/>
-          <a:p>
-            <a:pPr marL="0" indent="0" algn="ctr">
-              <a:buNone/>
-            </a:pPr>
-            <a:r>
-              <a:rPr lang="en-US" sz="1200" b="1" dirty="0">
-                <a:solidFill>
-                  <a:srgbClr val="75DFBC"/>
-                </a:solidFill>
-                <a:latin typeface="Arial" pitchFamily="34" charset="0"/>
-                <a:ea typeface="Arial" pitchFamily="34" charset="-122"/>
-                <a:cs typeface="Arial" pitchFamily="34" charset="-120"/>
-              </a:rPr>
-              <a:t>hover:bg-mint</a:t>
-            </a:r>
-            <a:endParaRPr lang="en-US" sz="1200" dirty="0"/>
           </a:p>
         </p:txBody>
       </p:sp>
@@ -18367,6 +18139,469 @@
   <p:clrMapOvr>
     <a:masterClrMapping/>
   </p:clrMapOvr>
+</p:sld>
+</file>
+
+<file path=ppt/slides/slide30.xml><?xml version="1.0" encoding="utf-8"?>
+<p:sld xmlns:a="http://schemas.openxmlformats.org/drawingml/2006/main" xmlns:r="http://schemas.openxmlformats.org/officeDocument/2006/relationships" xmlns:p="http://schemas.openxmlformats.org/presentationml/2006/main">
+  <p:cSld>
+    <p:spTree>
+      <p:nvGrpSpPr>
+        <p:cNvPr id="1" name=""/>
+        <p:cNvGrpSpPr/>
+        <p:nvPr/>
+      </p:nvGrpSpPr>
+      <p:grpSpPr>
+        <a:xfrm>
+          <a:off x="0" y="0"/>
+          <a:ext cx="0" cy="0"/>
+          <a:chOff x="0" y="0"/>
+          <a:chExt cx="0" cy="0"/>
+        </a:xfrm>
+      </p:grpSpPr>
+      <p:sp>
+        <p:nvSpPr>
+          <p:cNvPr id="3" name="TextBox 2">
+            <a:extLst>
+              <a:ext uri="{FF2B5EF4-FFF2-40B4-BE49-F238E27FC236}">
+                <a16:creationId xmlns:a16="http://schemas.microsoft.com/office/drawing/2014/main" id="{56B4D6A6-A061-9EE8-289A-08D42F3815C3}"/>
+              </a:ext>
+            </a:extLst>
+          </p:cNvPr>
+          <p:cNvSpPr txBox="1"/>
+          <p:nvPr/>
+        </p:nvSpPr>
+        <p:spPr>
+          <a:xfrm>
+            <a:off x="1377244" y="3075057"/>
+            <a:ext cx="4616071" cy="1938992"/>
+          </a:xfrm>
+          <a:prstGeom prst="rect">
+            <a:avLst/>
+          </a:prstGeom>
+          <a:noFill/>
+        </p:spPr>
+        <p:txBody>
+          <a:bodyPr wrap="square" rtlCol="0">
+            <a:spAutoFit/>
+          </a:bodyPr>
+          <a:lstStyle/>
+          <a:p>
+            <a:pPr algn="ctr"/>
+            <a:r>
+              <a:rPr lang="en-US" sz="4000" dirty="0">
+                <a:solidFill>
+                  <a:schemeClr val="tx2">
+                    <a:lumMod val="90000"/>
+                    <a:lumOff val="10000"/>
+                  </a:schemeClr>
+                </a:solidFill>
+              </a:rPr>
+              <a:t>Thank you!</a:t>
+            </a:r>
+          </a:p>
+          <a:p>
+            <a:pPr algn="ctr"/>
+            <a:endParaRPr lang="en-US" sz="4000" dirty="0">
+              <a:solidFill>
+                <a:schemeClr val="tx2">
+                  <a:lumMod val="90000"/>
+                  <a:lumOff val="10000"/>
+                </a:schemeClr>
+              </a:solidFill>
+            </a:endParaRPr>
+          </a:p>
+          <a:p>
+            <a:pPr algn="ctr"/>
+            <a:r>
+              <a:rPr lang="en-US" sz="4000" dirty="0">
+                <a:solidFill>
+                  <a:schemeClr val="tx2">
+                    <a:lumMod val="90000"/>
+                    <a:lumOff val="10000"/>
+                  </a:schemeClr>
+                </a:solidFill>
+              </a:rPr>
+              <a:t>@DevlinDuldulao</a:t>
+            </a:r>
+          </a:p>
+        </p:txBody>
+      </p:sp>
+      <p:sp>
+        <p:nvSpPr>
+          <p:cNvPr id="4" name="TextBox 3">
+            <a:extLst>
+              <a:ext uri="{FF2B5EF4-FFF2-40B4-BE49-F238E27FC236}">
+                <a16:creationId xmlns:a16="http://schemas.microsoft.com/office/drawing/2014/main" id="{5904F4B3-E994-6BEE-60A6-D12023533FAF}"/>
+              </a:ext>
+            </a:extLst>
+          </p:cNvPr>
+          <p:cNvSpPr txBox="1"/>
+          <p:nvPr/>
+        </p:nvSpPr>
+        <p:spPr>
+          <a:xfrm>
+            <a:off x="8136190" y="5852011"/>
+            <a:ext cx="1959428" cy="369332"/>
+          </a:xfrm>
+          <a:prstGeom prst="rect">
+            <a:avLst/>
+          </a:prstGeom>
+          <a:noFill/>
+        </p:spPr>
+        <p:txBody>
+          <a:bodyPr wrap="square" rtlCol="0">
+            <a:spAutoFit/>
+          </a:bodyPr>
+          <a:lstStyle/>
+          <a:p>
+            <a:pPr algn="ctr"/>
+            <a:r>
+              <a:rPr lang="en-US" dirty="0">
+                <a:solidFill>
+                  <a:schemeClr val="tx2">
+                    <a:lumMod val="90000"/>
+                    <a:lumOff val="10000"/>
+                  </a:schemeClr>
+                </a:solidFill>
+              </a:rPr>
+              <a:t>Social Links</a:t>
+            </a:r>
+          </a:p>
+        </p:txBody>
+      </p:sp>
+      <p:pic>
+        <p:nvPicPr>
+          <p:cNvPr id="6" name="Picture 5">
+            <a:extLst>
+              <a:ext uri="{FF2B5EF4-FFF2-40B4-BE49-F238E27FC236}">
+                <a16:creationId xmlns:a16="http://schemas.microsoft.com/office/drawing/2014/main" id="{39B6EB2D-569B-CB31-99FE-EFA1309A3407}"/>
+              </a:ext>
+            </a:extLst>
+          </p:cNvPr>
+          <p:cNvPicPr>
+            <a:picLocks noChangeAspect="1"/>
+          </p:cNvPicPr>
+          <p:nvPr/>
+        </p:nvPicPr>
+        <p:blipFill>
+          <a:blip r:embed="rId3">
+            <a:extLst>
+              <a:ext uri="{28A0092B-C50C-407E-A947-70E740481C1C}">
+                <a14:useLocalDpi xmlns:a14="http://schemas.microsoft.com/office/drawing/2010/main" val="0"/>
+              </a:ext>
+            </a:extLst>
+          </a:blip>
+          <a:stretch>
+            <a:fillRect/>
+          </a:stretch>
+        </p:blipFill>
+        <p:spPr>
+          <a:xfrm>
+            <a:off x="6677809" y="886733"/>
+            <a:ext cx="4876190" cy="4876190"/>
+          </a:xfrm>
+          <a:prstGeom prst="rect">
+            <a:avLst/>
+          </a:prstGeom>
+        </p:spPr>
+      </p:pic>
+    </p:spTree>
+    <p:extLst>
+      <p:ext uri="{BB962C8B-B14F-4D97-AF65-F5344CB8AC3E}">
+        <p14:creationId xmlns:p14="http://schemas.microsoft.com/office/powerpoint/2010/main" val="2188755814"/>
+      </p:ext>
+    </p:extLst>
+  </p:cSld>
+  <p:clrMapOvr>
+    <a:masterClrMapping/>
+  </p:clrMapOvr>
+  <p:timing>
+    <p:tnLst>
+      <p:par>
+        <p:cTn id="1" dur="indefinite" restart="never" nodeType="tmRoot">
+          <p:childTnLst>
+            <p:seq concurrent="1" nextAc="seek">
+              <p:cTn id="2" dur="indefinite" nodeType="mainSeq">
+                <p:childTnLst>
+                  <p:par>
+                    <p:cTn id="3" fill="hold">
+                      <p:stCondLst>
+                        <p:cond delay="indefinite"/>
+                      </p:stCondLst>
+                      <p:childTnLst>
+                        <p:par>
+                          <p:cTn id="4" fill="hold">
+                            <p:stCondLst>
+                              <p:cond delay="0"/>
+                            </p:stCondLst>
+                            <p:childTnLst>
+                              <p:par>
+                                <p:cTn id="5" presetID="56" presetClass="entr" presetSubtype="0" fill="hold" nodeType="clickEffect">
+                                  <p:stCondLst>
+                                    <p:cond delay="0"/>
+                                  </p:stCondLst>
+                                  <p:iterate type="lt">
+                                    <p:tmPct val="10000"/>
+                                  </p:iterate>
+                                  <p:childTnLst>
+                                    <p:set>
+                                      <p:cBhvr>
+                                        <p:cTn id="6" dur="1" fill="hold">
+                                          <p:stCondLst>
+                                            <p:cond delay="0"/>
+                                          </p:stCondLst>
+                                        </p:cTn>
+                                        <p:tgtEl>
+                                          <p:spTgt spid="3">
+                                            <p:txEl>
+                                              <p:pRg st="0" end="0"/>
+                                            </p:txEl>
+                                          </p:spTgt>
+                                        </p:tgtEl>
+                                        <p:attrNameLst>
+                                          <p:attrName>style.visibility</p:attrName>
+                                        </p:attrNameLst>
+                                      </p:cBhvr>
+                                      <p:to>
+                                        <p:strVal val="visible"/>
+                                      </p:to>
+                                    </p:set>
+                                    <p:anim by="(-#ppt_w*2)" calcmode="lin" valueType="num">
+                                      <p:cBhvr rctx="PPT">
+                                        <p:cTn id="7" dur="500" autoRev="1" fill="hold">
+                                          <p:stCondLst>
+                                            <p:cond delay="0"/>
+                                          </p:stCondLst>
+                                        </p:cTn>
+                                        <p:tgtEl>
+                                          <p:spTgt spid="3">
+                                            <p:txEl>
+                                              <p:pRg st="0" end="0"/>
+                                            </p:txEl>
+                                          </p:spTgt>
+                                        </p:tgtEl>
+                                        <p:attrNameLst>
+                                          <p:attrName>ppt_w</p:attrName>
+                                        </p:attrNameLst>
+                                      </p:cBhvr>
+                                    </p:anim>
+                                    <p:anim by="(#ppt_w*0.50)" calcmode="lin" valueType="num">
+                                      <p:cBhvr>
+                                        <p:cTn id="8" dur="500" decel="50000" autoRev="1" fill="hold">
+                                          <p:stCondLst>
+                                            <p:cond delay="0"/>
+                                          </p:stCondLst>
+                                        </p:cTn>
+                                        <p:tgtEl>
+                                          <p:spTgt spid="3">
+                                            <p:txEl>
+                                              <p:pRg st="0" end="0"/>
+                                            </p:txEl>
+                                          </p:spTgt>
+                                        </p:tgtEl>
+                                        <p:attrNameLst>
+                                          <p:attrName>ppt_x</p:attrName>
+                                        </p:attrNameLst>
+                                      </p:cBhvr>
+                                    </p:anim>
+                                    <p:anim from="(-#ppt_h/2)" to="(#ppt_y)" calcmode="lin" valueType="num">
+                                      <p:cBhvr>
+                                        <p:cTn id="9" dur="1000" fill="hold">
+                                          <p:stCondLst>
+                                            <p:cond delay="0"/>
+                                          </p:stCondLst>
+                                        </p:cTn>
+                                        <p:tgtEl>
+                                          <p:spTgt spid="3">
+                                            <p:txEl>
+                                              <p:pRg st="0" end="0"/>
+                                            </p:txEl>
+                                          </p:spTgt>
+                                        </p:tgtEl>
+                                        <p:attrNameLst>
+                                          <p:attrName>ppt_y</p:attrName>
+                                        </p:attrNameLst>
+                                      </p:cBhvr>
+                                    </p:anim>
+                                    <p:animRot by="21600000">
+                                      <p:cBhvr>
+                                        <p:cTn id="10" dur="1000" fill="hold">
+                                          <p:stCondLst>
+                                            <p:cond delay="0"/>
+                                          </p:stCondLst>
+                                        </p:cTn>
+                                        <p:tgtEl>
+                                          <p:spTgt spid="3">
+                                            <p:txEl>
+                                              <p:pRg st="0" end="0"/>
+                                            </p:txEl>
+                                          </p:spTgt>
+                                        </p:tgtEl>
+                                        <p:attrNameLst>
+                                          <p:attrName>r</p:attrName>
+                                        </p:attrNameLst>
+                                      </p:cBhvr>
+                                    </p:animRot>
+                                  </p:childTnLst>
+                                </p:cTn>
+                              </p:par>
+                            </p:childTnLst>
+                          </p:cTn>
+                        </p:par>
+                      </p:childTnLst>
+                    </p:cTn>
+                  </p:par>
+                  <p:par>
+                    <p:cTn id="11" fill="hold">
+                      <p:stCondLst>
+                        <p:cond delay="indefinite"/>
+                      </p:stCondLst>
+                      <p:childTnLst>
+                        <p:par>
+                          <p:cTn id="12" fill="hold">
+                            <p:stCondLst>
+                              <p:cond delay="0"/>
+                            </p:stCondLst>
+                            <p:childTnLst>
+                              <p:par>
+                                <p:cTn id="13" presetID="56" presetClass="entr" presetSubtype="0" fill="hold" nodeType="clickEffect">
+                                  <p:stCondLst>
+                                    <p:cond delay="0"/>
+                                  </p:stCondLst>
+                                  <p:iterate type="lt">
+                                    <p:tmPct val="10000"/>
+                                  </p:iterate>
+                                  <p:childTnLst>
+                                    <p:set>
+                                      <p:cBhvr>
+                                        <p:cTn id="14" dur="1" fill="hold">
+                                          <p:stCondLst>
+                                            <p:cond delay="0"/>
+                                          </p:stCondLst>
+                                        </p:cTn>
+                                        <p:tgtEl>
+                                          <p:spTgt spid="3">
+                                            <p:txEl>
+                                              <p:pRg st="2" end="2"/>
+                                            </p:txEl>
+                                          </p:spTgt>
+                                        </p:tgtEl>
+                                        <p:attrNameLst>
+                                          <p:attrName>style.visibility</p:attrName>
+                                        </p:attrNameLst>
+                                      </p:cBhvr>
+                                      <p:to>
+                                        <p:strVal val="visible"/>
+                                      </p:to>
+                                    </p:set>
+                                    <p:anim by="(-#ppt_w*2)" calcmode="lin" valueType="num">
+                                      <p:cBhvr rctx="PPT">
+                                        <p:cTn id="15" dur="500" autoRev="1" fill="hold">
+                                          <p:stCondLst>
+                                            <p:cond delay="0"/>
+                                          </p:stCondLst>
+                                        </p:cTn>
+                                        <p:tgtEl>
+                                          <p:spTgt spid="3">
+                                            <p:txEl>
+                                              <p:pRg st="2" end="2"/>
+                                            </p:txEl>
+                                          </p:spTgt>
+                                        </p:tgtEl>
+                                        <p:attrNameLst>
+                                          <p:attrName>ppt_w</p:attrName>
+                                        </p:attrNameLst>
+                                      </p:cBhvr>
+                                    </p:anim>
+                                    <p:anim by="(#ppt_w*0.50)" calcmode="lin" valueType="num">
+                                      <p:cBhvr>
+                                        <p:cTn id="16" dur="500" decel="50000" autoRev="1" fill="hold">
+                                          <p:stCondLst>
+                                            <p:cond delay="0"/>
+                                          </p:stCondLst>
+                                        </p:cTn>
+                                        <p:tgtEl>
+                                          <p:spTgt spid="3">
+                                            <p:txEl>
+                                              <p:pRg st="2" end="2"/>
+                                            </p:txEl>
+                                          </p:spTgt>
+                                        </p:tgtEl>
+                                        <p:attrNameLst>
+                                          <p:attrName>ppt_x</p:attrName>
+                                        </p:attrNameLst>
+                                      </p:cBhvr>
+                                    </p:anim>
+                                    <p:anim from="(-#ppt_h/2)" to="(#ppt_y)" calcmode="lin" valueType="num">
+                                      <p:cBhvr>
+                                        <p:cTn id="17" dur="1000" fill="hold">
+                                          <p:stCondLst>
+                                            <p:cond delay="0"/>
+                                          </p:stCondLst>
+                                        </p:cTn>
+                                        <p:tgtEl>
+                                          <p:spTgt spid="3">
+                                            <p:txEl>
+                                              <p:pRg st="2" end="2"/>
+                                            </p:txEl>
+                                          </p:spTgt>
+                                        </p:tgtEl>
+                                        <p:attrNameLst>
+                                          <p:attrName>ppt_y</p:attrName>
+                                        </p:attrNameLst>
+                                      </p:cBhvr>
+                                    </p:anim>
+                                    <p:animRot by="21600000">
+                                      <p:cBhvr>
+                                        <p:cTn id="18" dur="1000" fill="hold">
+                                          <p:stCondLst>
+                                            <p:cond delay="0"/>
+                                          </p:stCondLst>
+                                        </p:cTn>
+                                        <p:tgtEl>
+                                          <p:spTgt spid="3">
+                                            <p:txEl>
+                                              <p:pRg st="2" end="2"/>
+                                            </p:txEl>
+                                          </p:spTgt>
+                                        </p:tgtEl>
+                                        <p:attrNameLst>
+                                          <p:attrName>r</p:attrName>
+                                        </p:attrNameLst>
+                                      </p:cBhvr>
+                                    </p:animRot>
+                                  </p:childTnLst>
+                                </p:cTn>
+                              </p:par>
+                            </p:childTnLst>
+                          </p:cTn>
+                        </p:par>
+                      </p:childTnLst>
+                    </p:cTn>
+                  </p:par>
+                </p:childTnLst>
+              </p:cTn>
+              <p:prevCondLst>
+                <p:cond evt="onPrev" delay="0">
+                  <p:tgtEl>
+                    <p:sldTgt/>
+                  </p:tgtEl>
+                </p:cond>
+              </p:prevCondLst>
+              <p:nextCondLst>
+                <p:cond evt="onNext" delay="0">
+                  <p:tgtEl>
+                    <p:sldTgt/>
+                  </p:tgtEl>
+                </p:cond>
+              </p:nextCondLst>
+            </p:seq>
+          </p:childTnLst>
+        </p:cTn>
+      </p:par>
+    </p:tnLst>
+  </p:timing>
 </p:sld>
 </file>
 
@@ -18499,7 +18734,7 @@
           <a:bodyPr/>
           <a:lstStyle/>
           <a:p>
-            <a:endParaRPr lang="en-US"/>
+            <a:endParaRPr lang="en-US" sz="2000"/>
           </a:p>
         </p:txBody>
       </p:sp>
@@ -18530,7 +18765,7 @@
               </a:lnSpc>
             </a:pPr>
             <a:r>
-              <a:rPr lang="en-US" sz="1700" dirty="0">
+              <a:rPr lang="en-US" dirty="0">
                 <a:solidFill>
                   <a:srgbClr val="FFFFFF"/>
                 </a:solidFill>
@@ -18540,7 +18775,7 @@
               </a:rPr>
               <a:t>Full-stack developer from Oslo Norway</a:t>
             </a:r>
-            <a:endParaRPr lang="en-US" sz="1700" dirty="0"/>
+            <a:endParaRPr lang="en-US" dirty="0"/>
           </a:p>
         </p:txBody>
       </p:sp>
@@ -18567,7 +18802,7 @@
           <a:bodyPr/>
           <a:lstStyle/>
           <a:p>
-            <a:endParaRPr lang="en-US"/>
+            <a:endParaRPr lang="en-US" sz="2000"/>
           </a:p>
         </p:txBody>
       </p:sp>
@@ -18599,7 +18834,7 @@
               <a:buNone/>
             </a:pPr>
             <a:r>
-              <a:rPr lang="en-US" sz="1700" dirty="0">
+              <a:rPr lang="en-US" dirty="0">
                 <a:solidFill>
                   <a:srgbClr val="FFFFFF"/>
                 </a:solidFill>
@@ -18607,10 +18842,10 @@
                 <a:ea typeface="Arial" pitchFamily="34" charset="-122"/>
                 <a:cs typeface="Arial" pitchFamily="34" charset="-120"/>
               </a:rPr>
-              <a:t xml:space="preserve">Creator of </a:t>
-            </a:r>
-            <a:r>
-              <a:rPr lang="en-US" sz="1700" dirty="0" err="1">
+              <a:t>Creator of </a:t>
+            </a:r>
+            <a:r>
+              <a:rPr lang="en-US" dirty="0" err="1">
                 <a:solidFill>
                   <a:srgbClr val="FFFFFF"/>
                 </a:solidFill>
@@ -18620,7 +18855,7 @@
               </a:rPr>
               <a:t>DaloyJS</a:t>
             </a:r>
-            <a:endParaRPr lang="en-US" sz="1700" dirty="0"/>
+            <a:endParaRPr lang="en-US" dirty="0"/>
           </a:p>
         </p:txBody>
       </p:sp>
@@ -18877,7 +19112,7 @@
           <a:bodyPr/>
           <a:lstStyle/>
           <a:p>
-            <a:endParaRPr lang="en-US"/>
+            <a:endParaRPr lang="en-US" sz="2400"/>
           </a:p>
         </p:txBody>
       </p:sp>
@@ -18906,7 +19141,7 @@
               <a:buNone/>
             </a:pPr>
             <a:r>
-              <a:rPr lang="en-US" sz="1400" b="1" dirty="0">
+              <a:rPr lang="en-US" b="1" dirty="0">
                 <a:solidFill>
                   <a:srgbClr val="FFFFFF"/>
                 </a:solidFill>
@@ -18916,7 +19151,7 @@
               </a:rPr>
               <a:t>Vanilla</a:t>
             </a:r>
-            <a:endParaRPr lang="en-US" sz="1400" dirty="0"/>
+            <a:endParaRPr lang="en-US" dirty="0"/>
           </a:p>
         </p:txBody>
       </p:sp>
@@ -18945,7 +19180,7 @@
               <a:buNone/>
             </a:pPr>
             <a:r>
-              <a:rPr lang="en-US" sz="1200" dirty="0">
+              <a:rPr lang="en-US" sz="1600" dirty="0">
                 <a:solidFill>
                   <a:srgbClr val="6E6E6E"/>
                 </a:solidFill>
@@ -18955,7 +19190,7 @@
               </a:rPr>
               <a:t>2005</a:t>
             </a:r>
-            <a:endParaRPr lang="en-US" sz="1200" dirty="0"/>
+            <a:endParaRPr lang="en-US" sz="1600" dirty="0"/>
           </a:p>
         </p:txBody>
       </p:sp>
@@ -18989,7 +19224,7 @@
           <a:bodyPr/>
           <a:lstStyle/>
           <a:p>
-            <a:endParaRPr lang="en-US"/>
+            <a:endParaRPr lang="en-US" sz="2400"/>
           </a:p>
         </p:txBody>
       </p:sp>
@@ -19018,7 +19253,7 @@
               <a:buNone/>
             </a:pPr>
             <a:r>
-              <a:rPr lang="en-US" sz="1400" b="1" dirty="0">
+              <a:rPr lang="en-US" b="1" dirty="0">
                 <a:solidFill>
                   <a:srgbClr val="FFFFFF"/>
                 </a:solidFill>
@@ -19028,7 +19263,7 @@
               </a:rPr>
               <a:t>OOCSS</a:t>
             </a:r>
-            <a:endParaRPr lang="en-US" sz="1400" dirty="0"/>
+            <a:endParaRPr lang="en-US" dirty="0"/>
           </a:p>
         </p:txBody>
       </p:sp>
@@ -19057,7 +19292,7 @@
               <a:buNone/>
             </a:pPr>
             <a:r>
-              <a:rPr lang="en-US" sz="1200" dirty="0">
+              <a:rPr lang="en-US" sz="1600" dirty="0">
                 <a:solidFill>
                   <a:srgbClr val="6E6E6E"/>
                 </a:solidFill>
@@ -19067,7 +19302,7 @@
               </a:rPr>
               <a:t>2009</a:t>
             </a:r>
-            <a:endParaRPr lang="en-US" sz="1200" dirty="0"/>
+            <a:endParaRPr lang="en-US" sz="1600" dirty="0"/>
           </a:p>
         </p:txBody>
       </p:sp>
@@ -19101,7 +19336,7 @@
           <a:bodyPr/>
           <a:lstStyle/>
           <a:p>
-            <a:endParaRPr lang="en-US"/>
+            <a:endParaRPr lang="en-US" sz="2400"/>
           </a:p>
         </p:txBody>
       </p:sp>
@@ -19130,7 +19365,7 @@
               <a:buNone/>
             </a:pPr>
             <a:r>
-              <a:rPr lang="en-US" sz="1400" b="1" dirty="0">
+              <a:rPr lang="en-US" b="1" dirty="0">
                 <a:solidFill>
                   <a:srgbClr val="FFFFFF"/>
                 </a:solidFill>
@@ -19140,7 +19375,7 @@
               </a:rPr>
               <a:t>BEM</a:t>
             </a:r>
-            <a:endParaRPr lang="en-US" sz="1400" dirty="0"/>
+            <a:endParaRPr lang="en-US" dirty="0"/>
           </a:p>
         </p:txBody>
       </p:sp>
@@ -19169,7 +19404,7 @@
               <a:buNone/>
             </a:pPr>
             <a:r>
-              <a:rPr lang="en-US" sz="1200" dirty="0">
+              <a:rPr lang="en-US" sz="1600" dirty="0">
                 <a:solidFill>
                   <a:srgbClr val="6E6E6E"/>
                 </a:solidFill>
@@ -19179,7 +19414,7 @@
               </a:rPr>
               <a:t>2010</a:t>
             </a:r>
-            <a:endParaRPr lang="en-US" sz="1200" dirty="0"/>
+            <a:endParaRPr lang="en-US" sz="1600" dirty="0"/>
           </a:p>
         </p:txBody>
       </p:sp>
@@ -19213,7 +19448,7 @@
           <a:bodyPr/>
           <a:lstStyle/>
           <a:p>
-            <a:endParaRPr lang="en-US"/>
+            <a:endParaRPr lang="en-US" sz="2400"/>
           </a:p>
         </p:txBody>
       </p:sp>
@@ -19242,7 +19477,7 @@
               <a:buNone/>
             </a:pPr>
             <a:r>
-              <a:rPr lang="en-US" sz="1400" b="1" dirty="0">
+              <a:rPr lang="en-US" b="1" dirty="0">
                 <a:solidFill>
                   <a:srgbClr val="FFFFFF"/>
                 </a:solidFill>
@@ -19252,7 +19487,7 @@
               </a:rPr>
               <a:t>SMACSS</a:t>
             </a:r>
-            <a:endParaRPr lang="en-US" sz="1400" dirty="0"/>
+            <a:endParaRPr lang="en-US" dirty="0"/>
           </a:p>
         </p:txBody>
       </p:sp>
@@ -19281,7 +19516,7 @@
               <a:buNone/>
             </a:pPr>
             <a:r>
-              <a:rPr lang="en-US" sz="1200" dirty="0">
+              <a:rPr lang="en-US" sz="1600" dirty="0">
                 <a:solidFill>
                   <a:srgbClr val="6E6E6E"/>
                 </a:solidFill>
@@ -19291,7 +19526,7 @@
               </a:rPr>
               <a:t>2011</a:t>
             </a:r>
-            <a:endParaRPr lang="en-US" sz="1200" dirty="0"/>
+            <a:endParaRPr lang="en-US" sz="1600" dirty="0"/>
           </a:p>
         </p:txBody>
       </p:sp>
@@ -19325,7 +19560,7 @@
           <a:bodyPr/>
           <a:lstStyle/>
           <a:p>
-            <a:endParaRPr lang="en-US"/>
+            <a:endParaRPr lang="en-US" sz="2400"/>
           </a:p>
         </p:txBody>
       </p:sp>
@@ -19354,7 +19589,7 @@
               <a:buNone/>
             </a:pPr>
             <a:r>
-              <a:rPr lang="en-US" sz="1400" b="1" dirty="0">
+              <a:rPr lang="en-US" b="1" dirty="0">
                 <a:solidFill>
                   <a:srgbClr val="FFFFFF"/>
                 </a:solidFill>
@@ -19364,7 +19599,7 @@
               </a:rPr>
               <a:t>Atomic</a:t>
             </a:r>
-            <a:endParaRPr lang="en-US" sz="1400" dirty="0"/>
+            <a:endParaRPr lang="en-US" dirty="0"/>
           </a:p>
         </p:txBody>
       </p:sp>
@@ -19393,7 +19628,7 @@
               <a:buNone/>
             </a:pPr>
             <a:r>
-              <a:rPr lang="en-US" sz="1200" dirty="0">
+              <a:rPr lang="en-US" sz="1600" dirty="0">
                 <a:solidFill>
                   <a:srgbClr val="6E6E6E"/>
                 </a:solidFill>
@@ -19403,7 +19638,7 @@
               </a:rPr>
               <a:t>2013</a:t>
             </a:r>
-            <a:endParaRPr lang="en-US" sz="1200" dirty="0"/>
+            <a:endParaRPr lang="en-US" sz="1600" dirty="0"/>
           </a:p>
         </p:txBody>
       </p:sp>
@@ -19437,7 +19672,7 @@
           <a:bodyPr/>
           <a:lstStyle/>
           <a:p>
-            <a:endParaRPr lang="en-US"/>
+            <a:endParaRPr lang="en-US" sz="2400"/>
           </a:p>
         </p:txBody>
       </p:sp>
@@ -19466,7 +19701,7 @@
               <a:buNone/>
             </a:pPr>
             <a:r>
-              <a:rPr lang="en-US" sz="1400" b="1" dirty="0">
+              <a:rPr lang="en-US" b="1" dirty="0">
                 <a:solidFill>
                   <a:srgbClr val="FFFFFF"/>
                 </a:solidFill>
@@ -19476,7 +19711,7 @@
               </a:rPr>
               <a:t>CSS Modules</a:t>
             </a:r>
-            <a:endParaRPr lang="en-US" sz="1400" dirty="0"/>
+            <a:endParaRPr lang="en-US" dirty="0"/>
           </a:p>
         </p:txBody>
       </p:sp>
@@ -19505,7 +19740,7 @@
               <a:buNone/>
             </a:pPr>
             <a:r>
-              <a:rPr lang="en-US" sz="1200" dirty="0">
+              <a:rPr lang="en-US" sz="1600" dirty="0">
                 <a:solidFill>
                   <a:srgbClr val="6E6E6E"/>
                 </a:solidFill>
@@ -19515,7 +19750,7 @@
               </a:rPr>
               <a:t>2015</a:t>
             </a:r>
-            <a:endParaRPr lang="en-US" sz="1200" dirty="0"/>
+            <a:endParaRPr lang="en-US" sz="1600" dirty="0"/>
           </a:p>
         </p:txBody>
       </p:sp>
@@ -19549,7 +19784,7 @@
           <a:bodyPr/>
           <a:lstStyle/>
           <a:p>
-            <a:endParaRPr lang="en-US"/>
+            <a:endParaRPr lang="en-US" sz="2400"/>
           </a:p>
         </p:txBody>
       </p:sp>
@@ -19578,7 +19813,7 @@
               <a:buNone/>
             </a:pPr>
             <a:r>
-              <a:rPr lang="en-US" sz="1400" b="1" dirty="0">
+              <a:rPr lang="en-US" b="1" dirty="0">
                 <a:solidFill>
                   <a:srgbClr val="FFFFFF"/>
                 </a:solidFill>
@@ -19588,7 +19823,7 @@
               </a:rPr>
               <a:t>CSS-in-JS</a:t>
             </a:r>
-            <a:endParaRPr lang="en-US" sz="1400" dirty="0"/>
+            <a:endParaRPr lang="en-US" dirty="0"/>
           </a:p>
         </p:txBody>
       </p:sp>
@@ -19617,7 +19852,7 @@
               <a:buNone/>
             </a:pPr>
             <a:r>
-              <a:rPr lang="en-US" sz="1200" dirty="0">
+              <a:rPr lang="en-US" sz="1600" dirty="0">
                 <a:solidFill>
                   <a:srgbClr val="6E6E6E"/>
                 </a:solidFill>
@@ -19627,7 +19862,7 @@
               </a:rPr>
               <a:t>2016</a:t>
             </a:r>
-            <a:endParaRPr lang="en-US" sz="1200" dirty="0"/>
+            <a:endParaRPr lang="en-US" sz="1600" dirty="0"/>
           </a:p>
         </p:txBody>
       </p:sp>
@@ -19661,7 +19896,7 @@
           <a:bodyPr/>
           <a:lstStyle/>
           <a:p>
-            <a:endParaRPr lang="en-US"/>
+            <a:endParaRPr lang="en-US" sz="2400"/>
           </a:p>
         </p:txBody>
       </p:sp>
@@ -19690,7 +19925,7 @@
               <a:buNone/>
             </a:pPr>
             <a:r>
-              <a:rPr lang="en-US" sz="1400" b="1" dirty="0">
+              <a:rPr lang="en-US" b="1" dirty="0">
                 <a:solidFill>
                   <a:srgbClr val="75DFBC"/>
                 </a:solidFill>
@@ -19700,7 +19935,7 @@
               </a:rPr>
               <a:t>Tailwind</a:t>
             </a:r>
-            <a:endParaRPr lang="en-US" sz="1400" dirty="0"/>
+            <a:endParaRPr lang="en-US" dirty="0"/>
           </a:p>
         </p:txBody>
       </p:sp>
@@ -19729,7 +19964,7 @@
               <a:buNone/>
             </a:pPr>
             <a:r>
-              <a:rPr lang="en-US" sz="1200" dirty="0">
+              <a:rPr lang="en-US" sz="1600" dirty="0">
                 <a:solidFill>
                   <a:srgbClr val="F1CF25"/>
                 </a:solidFill>
@@ -19739,7 +19974,7 @@
               </a:rPr>
               <a:t>2017→</a:t>
             </a:r>
-            <a:endParaRPr lang="en-US" sz="1200" dirty="0"/>
+            <a:endParaRPr lang="en-US" sz="1600" dirty="0"/>
           </a:p>
         </p:txBody>
       </p:sp>
@@ -19751,7 +19986,7 @@
         </p:nvSpPr>
         <p:spPr>
           <a:xfrm>
-            <a:off x="594360" y="4663440"/>
+            <a:off x="595333" y="5120640"/>
             <a:ext cx="11002975" cy="640080"/>
           </a:xfrm>
           <a:prstGeom prst="rect">
@@ -19771,7 +20006,7 @@
               <a:buNone/>
             </a:pPr>
             <a:r>
-              <a:rPr lang="en-US" sz="1800" dirty="0">
+              <a:rPr lang="en-US" sz="2000" dirty="0">
                 <a:solidFill>
                   <a:srgbClr val="A6A6A6"/>
                 </a:solidFill>
@@ -19781,7 +20016,7 @@
               </a:rPr>
               <a:t>Every one of these tried to answer the same two questions: where do styles live, and what do we name them?</a:t>
             </a:r>
-            <a:endParaRPr lang="en-US" sz="1800" dirty="0"/>
+            <a:endParaRPr lang="en-US" sz="2000" dirty="0"/>
           </a:p>
         </p:txBody>
       </p:sp>
@@ -20075,7 +20310,7 @@
               <a:buNone/>
             </a:pPr>
             <a:r>
-              <a:rPr lang="en-US" sz="1300" dirty="0">
+              <a:rPr lang="en-US" dirty="0">
                 <a:solidFill>
                   <a:srgbClr val="A6A6A6"/>
                 </a:solidFill>
@@ -20085,7 +20320,7 @@
               </a:rPr>
               <a:t>Vercel</a:t>
             </a:r>
-            <a:endParaRPr lang="en-US" sz="1300" dirty="0"/>
+            <a:endParaRPr lang="en-US" dirty="0"/>
           </a:p>
         </p:txBody>
       </p:sp>
@@ -20187,7 +20422,7 @@
               <a:buNone/>
             </a:pPr>
             <a:r>
-              <a:rPr lang="en-US" sz="1300" dirty="0">
+              <a:rPr lang="en-US" sz="1600" dirty="0">
                 <a:solidFill>
                   <a:srgbClr val="A6A6A6"/>
                 </a:solidFill>
@@ -20197,7 +20432,7 @@
               </a:rPr>
               <a:t>StackBlitz</a:t>
             </a:r>
-            <a:endParaRPr lang="en-US" sz="1300" dirty="0"/>
+            <a:endParaRPr lang="en-US" sz="1600" dirty="0"/>
           </a:p>
         </p:txBody>
       </p:sp>
@@ -20299,7 +20534,7 @@
               <a:buNone/>
             </a:pPr>
             <a:r>
-              <a:rPr lang="en-US" sz="1300" dirty="0">
+              <a:rPr lang="en-US" sz="1600" dirty="0">
                 <a:solidFill>
                   <a:srgbClr val="A6A6A6"/>
                 </a:solidFill>
@@ -20309,7 +20544,7 @@
               </a:rPr>
               <a:t>full-app gen</a:t>
             </a:r>
-            <a:endParaRPr lang="en-US" sz="1300" dirty="0"/>
+            <a:endParaRPr lang="en-US" sz="1600" dirty="0"/>
           </a:p>
         </p:txBody>
       </p:sp>
@@ -20411,7 +20646,7 @@
               <a:buNone/>
             </a:pPr>
             <a:r>
-              <a:rPr lang="en-US" sz="1300" dirty="0">
+              <a:rPr lang="en-US" sz="1600" dirty="0">
                 <a:solidFill>
                   <a:srgbClr val="A6A6A6"/>
                 </a:solidFill>
@@ -20421,7 +20656,7 @@
               </a:rPr>
               <a:t>Anthropic</a:t>
             </a:r>
-            <a:endParaRPr lang="en-US" sz="1300" dirty="0"/>
+            <a:endParaRPr lang="en-US" sz="1600" dirty="0"/>
           </a:p>
         </p:txBody>
       </p:sp>
@@ -20523,7 +20758,7 @@
               <a:buNone/>
             </a:pPr>
             <a:r>
-              <a:rPr lang="en-US" sz="1300" dirty="0">
+              <a:rPr lang="en-US" sz="1600" dirty="0">
                 <a:solidFill>
                   <a:srgbClr val="A6A6A6"/>
                 </a:solidFill>
@@ -20533,7 +20768,7 @@
               </a:rPr>
               <a:t>default for AI tools</a:t>
             </a:r>
-            <a:endParaRPr lang="en-US" sz="1300" dirty="0"/>
+            <a:endParaRPr lang="en-US" sz="1600" dirty="0"/>
           </a:p>
         </p:txBody>
       </p:sp>
@@ -20635,7 +20870,7 @@
               <a:buNone/>
             </a:pPr>
             <a:r>
-              <a:rPr lang="en-US" sz="1300" dirty="0">
+              <a:rPr lang="en-US" sz="1600" dirty="0">
                 <a:solidFill>
                   <a:srgbClr val="A6A6A6"/>
                 </a:solidFill>
@@ -20645,7 +20880,7 @@
               </a:rPr>
               <a:t>lean Tailwind</a:t>
             </a:r>
-            <a:endParaRPr lang="en-US" sz="1300" dirty="0"/>
+            <a:endParaRPr lang="en-US" sz="1600" dirty="0"/>
           </a:p>
         </p:txBody>
       </p:sp>
@@ -20674,7 +20909,7 @@
               <a:buNone/>
             </a:pPr>
             <a:r>
-              <a:rPr lang="en-US" sz="1700" i="1" dirty="0">
+              <a:rPr lang="en-US" i="1" dirty="0">
                 <a:solidFill>
                   <a:srgbClr val="FFFFFF"/>
                 </a:solidFill>
@@ -20684,7 +20919,7 @@
               </a:rPr>
               <a:t>Every major AI UI generator defaults to Tailwind. That's revealed preference.</a:t>
             </a:r>
-            <a:endParaRPr lang="en-US" sz="1700" dirty="0"/>
+            <a:endParaRPr lang="en-US" dirty="0"/>
           </a:p>
         </p:txBody>
       </p:sp>
@@ -20871,7 +21106,7 @@
                 <a:ea typeface="Arial" pitchFamily="34" charset="-122"/>
                 <a:cs typeface="Arial" pitchFamily="34" charset="-120"/>
               </a:rPr>
-              <a:t xml:space="preserve">How code is </a:t>
+              <a:t>How code is </a:t>
             </a:r>
             <a:r>
               <a:rPr lang="en-US" sz="3800" b="1" dirty="0">
@@ -20935,7 +21170,7 @@
                 <a:ea typeface="Arial" pitchFamily="34" charset="-122"/>
                 <a:cs typeface="Arial" pitchFamily="34" charset="-120"/>
               </a:rPr>
-              <a:t xml:space="preserve">By a </a:t>
+              <a:t>By a </a:t>
             </a:r>
             <a:r>
               <a:rPr lang="en-US" sz="3000" b="1" dirty="0">
@@ -20977,7 +21212,7 @@
                 <a:ea typeface="Arial" pitchFamily="34" charset="-122"/>
                 <a:cs typeface="Arial" pitchFamily="34" charset="-120"/>
               </a:rPr>
-              <a:t xml:space="preserve"> and by a next-token predictor.</a:t>
+              <a:t> and by a next-token predictor.</a:t>
             </a:r>
             <a:endParaRPr lang="en-US" sz="3000" dirty="0"/>
           </a:p>
@@ -21276,7 +21511,7 @@
               <a:buNone/>
             </a:pPr>
             <a:r>
-              <a:rPr lang="en-US" sz="1900" i="1" dirty="0">
+              <a:rPr lang="en-US" sz="2000" i="1" dirty="0">
                 <a:solidFill>
                   <a:srgbClr val="FFFFFF"/>
                 </a:solidFill>
@@ -21286,7 +21521,7 @@
               </a:rPr>
               <a:t>“There are only two hard things in computer science: cache invalidation and naming things.”</a:t>
             </a:r>
-            <a:endParaRPr lang="en-US" sz="1900" dirty="0"/>
+            <a:endParaRPr lang="en-US" sz="2000" dirty="0"/>
           </a:p>
         </p:txBody>
       </p:sp>
@@ -21313,7 +21548,7 @@
           <a:bodyPr/>
           <a:lstStyle/>
           <a:p>
-            <a:endParaRPr lang="en-US"/>
+            <a:endParaRPr lang="en-US" sz="2400"/>
           </a:p>
         </p:txBody>
       </p:sp>
@@ -21325,8 +21560,8 @@
         </p:nvSpPr>
         <p:spPr>
           <a:xfrm>
-            <a:off x="886968" y="3383280"/>
-            <a:ext cx="5468112" cy="457200"/>
+            <a:off x="886967" y="3383280"/>
+            <a:ext cx="5760719" cy="457200"/>
           </a:xfrm>
           <a:prstGeom prst="rect">
             <a:avLst/>
@@ -21345,7 +21580,7 @@
               <a:buNone/>
             </a:pPr>
             <a:r>
-              <a:rPr lang="en-US" sz="1500" dirty="0">
+              <a:rPr lang="en-US" dirty="0">
                 <a:solidFill>
                   <a:srgbClr val="FFFFFF"/>
                 </a:solidFill>
@@ -21355,7 +21590,7 @@
               </a:rPr>
               <a:t>Every element needs an invented, project-specific name</a:t>
             </a:r>
-            <a:endParaRPr lang="en-US" sz="1500" dirty="0"/>
+            <a:endParaRPr lang="en-US" dirty="0"/>
           </a:p>
         </p:txBody>
       </p:sp>
@@ -21367,7 +21602,7 @@
         </p:nvSpPr>
         <p:spPr>
           <a:xfrm>
-            <a:off x="594360" y="4059936"/>
+            <a:off x="594360" y="4352544"/>
             <a:ext cx="118872" cy="118872"/>
           </a:xfrm>
           <a:prstGeom prst="rect">
@@ -21382,7 +21617,7 @@
           <a:bodyPr/>
           <a:lstStyle/>
           <a:p>
-            <a:endParaRPr lang="en-US"/>
+            <a:endParaRPr lang="en-US" sz="2400"/>
           </a:p>
         </p:txBody>
       </p:sp>
@@ -21394,7 +21629,7 @@
         </p:nvSpPr>
         <p:spPr>
           <a:xfrm>
-            <a:off x="886968" y="3977640"/>
+            <a:off x="886968" y="4270248"/>
             <a:ext cx="5468112" cy="457200"/>
           </a:xfrm>
           <a:prstGeom prst="rect">
@@ -21414,7 +21649,7 @@
               <a:buNone/>
             </a:pPr>
             <a:r>
-              <a:rPr lang="en-US" sz="1500" dirty="0">
+              <a:rPr lang="en-US" dirty="0">
                 <a:solidFill>
                   <a:srgbClr val="FFFFFF"/>
                 </a:solidFill>
@@ -21424,7 +21659,7 @@
               </a:rPr>
               <a:t>Names drift: card / Card / cardWrapper / card-box</a:t>
             </a:r>
-            <a:endParaRPr lang="en-US" sz="1500" dirty="0"/>
+            <a:endParaRPr lang="en-US" dirty="0"/>
           </a:p>
         </p:txBody>
       </p:sp>
@@ -21436,7 +21671,7 @@
         </p:nvSpPr>
         <p:spPr>
           <a:xfrm>
-            <a:off x="594360" y="4654296"/>
+            <a:off x="594360" y="5269473"/>
             <a:ext cx="118872" cy="118872"/>
           </a:xfrm>
           <a:prstGeom prst="rect">
@@ -21451,7 +21686,7 @@
           <a:bodyPr/>
           <a:lstStyle/>
           <a:p>
-            <a:endParaRPr lang="en-US"/>
+            <a:endParaRPr lang="en-US" sz="2400"/>
           </a:p>
         </p:txBody>
       </p:sp>
@@ -21463,7 +21698,7 @@
         </p:nvSpPr>
         <p:spPr>
           <a:xfrm>
-            <a:off x="886968" y="4572000"/>
+            <a:off x="886968" y="5187177"/>
             <a:ext cx="5468112" cy="457200"/>
           </a:xfrm>
           <a:prstGeom prst="rect">
@@ -21483,7 +21718,7 @@
               <a:buNone/>
             </a:pPr>
             <a:r>
-              <a:rPr lang="en-US" sz="1500" dirty="0">
+              <a:rPr lang="en-US" dirty="0">
                 <a:solidFill>
                   <a:srgbClr val="FFFFFF"/>
                 </a:solidFill>
@@ -21493,7 +21728,7 @@
               </a:rPr>
               <a:t>Humans AND models invent inconsistently across a session</a:t>
             </a:r>
-            <a:endParaRPr lang="en-US" sz="1500" dirty="0"/>
+            <a:endParaRPr lang="en-US" dirty="0"/>
           </a:p>
         </p:txBody>
       </p:sp>
@@ -21505,8 +21740,8 @@
         </p:nvSpPr>
         <p:spPr>
           <a:xfrm>
-            <a:off x="6766560" y="1828800"/>
-            <a:ext cx="4828032" cy="3291840"/>
+            <a:off x="6821421" y="1828800"/>
+            <a:ext cx="4773170" cy="4270248"/>
           </a:xfrm>
           <a:prstGeom prst="roundRect">
             <a:avLst>
@@ -21637,7 +21872,7 @@
               <a:buNone/>
             </a:pPr>
             <a:r>
-              <a:rPr lang="en-US" sz="1000" dirty="0">
+              <a:rPr lang="en-US" dirty="0">
                 <a:solidFill>
                   <a:srgbClr val="6E6E6E"/>
                 </a:solidFill>
@@ -21647,7 +21882,7 @@
               </a:rPr>
               <a:t>styles.css</a:t>
             </a:r>
-            <a:endParaRPr lang="en-US" sz="1000" dirty="0"/>
+            <a:endParaRPr lang="en-US" dirty="0"/>
           </a:p>
         </p:txBody>
       </p:sp>
@@ -21659,8 +21894,8 @@
         </p:nvSpPr>
         <p:spPr>
           <a:xfrm>
-            <a:off x="7059168" y="2377440"/>
-            <a:ext cx="4242816" cy="2560320"/>
+            <a:off x="7187184" y="2377440"/>
+            <a:ext cx="4114800" cy="3332696"/>
           </a:xfrm>
           <a:prstGeom prst="rect">
             <a:avLst/>
@@ -21679,7 +21914,7 @@
               <a:buNone/>
             </a:pPr>
             <a:r>
-              <a:rPr lang="en-US" sz="1400" dirty="0">
+              <a:rPr lang="en-US" dirty="0">
                 <a:solidFill>
                   <a:srgbClr val="6E6E6E"/>
                 </a:solidFill>
@@ -21689,7 +21924,7 @@
               </a:rPr>
               <a:t>/* what does 'featured' even mean? */</a:t>
             </a:r>
-            <a:endParaRPr lang="en-US" sz="1400" dirty="0"/>
+            <a:endParaRPr lang="en-US" dirty="0"/>
           </a:p>
           <a:p>
             <a:pPr marL="0" indent="0" algn="l">
@@ -21699,7 +21934,7 @@
               <a:buNone/>
             </a:pPr>
             <a:r>
-              <a:rPr lang="en-US" sz="1400" dirty="0">
+              <a:rPr lang="en-US" dirty="0">
                 <a:solidFill>
                   <a:srgbClr val="75DFBC"/>
                 </a:solidFill>
@@ -21710,7 +21945,7 @@
               <a:t>.card</a:t>
             </a:r>
             <a:r>
-              <a:rPr lang="en-US" sz="1400" dirty="0">
+              <a:rPr lang="en-US" dirty="0">
                 <a:solidFill>
                   <a:srgbClr val="F1CF25"/>
                 </a:solidFill>
@@ -21721,7 +21956,7 @@
               <a:t>__header</a:t>
             </a:r>
             <a:r>
-              <a:rPr lang="en-US" sz="1400" dirty="0">
+              <a:rPr lang="en-US" dirty="0">
                 <a:solidFill>
                   <a:srgbClr val="FF6A4C"/>
                 </a:solidFill>
@@ -21732,7 +21967,7 @@
               <a:t>--featured</a:t>
             </a:r>
             <a:r>
-              <a:rPr lang="en-US" sz="1400" dirty="0">
+              <a:rPr lang="en-US" dirty="0">
                 <a:solidFill>
                   <a:srgbClr val="D8D8D8"/>
                 </a:solidFill>
@@ -21740,9 +21975,9 @@
                 <a:ea typeface="Courier New" pitchFamily="34" charset="-122"/>
                 <a:cs typeface="Courier New" pitchFamily="34" charset="-120"/>
               </a:rPr>
-              <a:t xml:space="preserve"> {</a:t>
-            </a:r>
-            <a:endParaRPr lang="en-US" sz="1400" dirty="0"/>
+              <a:t> {</a:t>
+            </a:r>
+            <a:endParaRPr lang="en-US" dirty="0"/>
           </a:p>
           <a:p>
             <a:pPr marL="0" indent="0" algn="l">
@@ -21752,7 +21987,7 @@
               <a:buNone/>
             </a:pPr>
             <a:r>
-              <a:rPr lang="en-US" sz="1400" dirty="0">
+              <a:rPr lang="en-US" dirty="0">
                 <a:solidFill>
                   <a:srgbClr val="9CDCFE"/>
                 </a:solidFill>
@@ -21760,10 +21995,10 @@
                 <a:ea typeface="Courier New" pitchFamily="34" charset="-122"/>
                 <a:cs typeface="Courier New" pitchFamily="34" charset="-120"/>
               </a:rPr>
-              <a:t xml:space="preserve">  border-color</a:t>
-            </a:r>
-            <a:r>
-              <a:rPr lang="en-US" sz="1400" dirty="0">
+              <a:t>  border-color</a:t>
+            </a:r>
+            <a:r>
+              <a:rPr lang="en-US" dirty="0">
                 <a:solidFill>
                   <a:srgbClr val="D8D8D8"/>
                 </a:solidFill>
@@ -21771,10 +22006,10 @@
                 <a:ea typeface="Courier New" pitchFamily="34" charset="-122"/>
                 <a:cs typeface="Courier New" pitchFamily="34" charset="-120"/>
               </a:rPr>
-              <a:t xml:space="preserve">: </a:t>
-            </a:r>
-            <a:r>
-              <a:rPr lang="en-US" sz="1400" dirty="0">
+              <a:t>: </a:t>
+            </a:r>
+            <a:r>
+              <a:rPr lang="en-US" dirty="0">
                 <a:solidFill>
                   <a:srgbClr val="F1CF25"/>
                 </a:solidFill>
@@ -21784,7 +22019,7 @@
               </a:rPr>
               <a:t>#75dfbc;</a:t>
             </a:r>
-            <a:endParaRPr lang="en-US" sz="1400" dirty="0"/>
+            <a:endParaRPr lang="en-US" dirty="0"/>
           </a:p>
           <a:p>
             <a:pPr marL="0" indent="0" algn="l">
@@ -21794,7 +22029,7 @@
               <a:buNone/>
             </a:pPr>
             <a:r>
-              <a:rPr lang="en-US" sz="1400" dirty="0">
+              <a:rPr lang="en-US" dirty="0">
                 <a:solidFill>
                   <a:srgbClr val="D8D8D8"/>
                 </a:solidFill>
@@ -21804,7 +22039,7 @@
               </a:rPr>
               <a:t>}</a:t>
             </a:r>
-            <a:endParaRPr lang="en-US" sz="1400" dirty="0"/>
+            <a:endParaRPr lang="en-US" dirty="0"/>
           </a:p>
           <a:p>
             <a:pPr marL="0" indent="0" algn="l">
@@ -21813,7 +22048,7 @@
               </a:lnSpc>
               <a:buNone/>
             </a:pPr>
-            <a:endParaRPr lang="en-US" sz="1400" dirty="0"/>
+            <a:endParaRPr lang="en-US" dirty="0"/>
           </a:p>
           <a:p>
             <a:pPr marL="0" indent="0" algn="l">
@@ -21823,7 +22058,7 @@
               <a:buNone/>
             </a:pPr>
             <a:r>
-              <a:rPr lang="en-US" sz="1400" dirty="0">
+              <a:rPr lang="en-US" dirty="0">
                 <a:solidFill>
                   <a:srgbClr val="75DFBC"/>
                 </a:solidFill>
@@ -21834,7 +22069,7 @@
               <a:t>.card</a:t>
             </a:r>
             <a:r>
-              <a:rPr lang="en-US" sz="1400" dirty="0">
+              <a:rPr lang="en-US" dirty="0">
                 <a:solidFill>
                   <a:srgbClr val="F1CF25"/>
                 </a:solidFill>
@@ -21845,7 +22080,7 @@
               <a:t>__cta</a:t>
             </a:r>
             <a:r>
-              <a:rPr lang="en-US" sz="1400" dirty="0">
+              <a:rPr lang="en-US" dirty="0">
                 <a:solidFill>
                   <a:srgbClr val="D8D8D8"/>
                 </a:solidFill>
@@ -21853,9 +22088,9 @@
                 <a:ea typeface="Courier New" pitchFamily="34" charset="-122"/>
                 <a:cs typeface="Courier New" pitchFamily="34" charset="-120"/>
               </a:rPr>
-              <a:t xml:space="preserve"> { … }</a:t>
-            </a:r>
-            <a:endParaRPr lang="en-US" sz="1400" dirty="0"/>
+              <a:t> { … }</a:t>
+            </a:r>
+            <a:endParaRPr lang="en-US" dirty="0"/>
           </a:p>
           <a:p>
             <a:pPr marL="0" indent="0" algn="l">
@@ -21865,7 +22100,7 @@
               <a:buNone/>
             </a:pPr>
             <a:r>
-              <a:rPr lang="en-US" sz="1400" dirty="0">
+              <a:rPr lang="en-US" dirty="0">
                 <a:solidFill>
                   <a:srgbClr val="75DFBC"/>
                 </a:solidFill>
@@ -21876,7 +22111,7 @@
               <a:t>.card</a:t>
             </a:r>
             <a:r>
-              <a:rPr lang="en-US" sz="1400" dirty="0">
+              <a:rPr lang="en-US" dirty="0">
                 <a:solidFill>
                   <a:srgbClr val="F1CF25"/>
                 </a:solidFill>
@@ -21887,7 +22122,7 @@
               <a:t>__badge</a:t>
             </a:r>
             <a:r>
-              <a:rPr lang="en-US" sz="1400" dirty="0">
+              <a:rPr lang="en-US" dirty="0">
                 <a:solidFill>
                   <a:srgbClr val="D8D8D8"/>
                 </a:solidFill>
@@ -21895,9 +22130,9 @@
                 <a:ea typeface="Courier New" pitchFamily="34" charset="-122"/>
                 <a:cs typeface="Courier New" pitchFamily="34" charset="-120"/>
               </a:rPr>
-              <a:t xml:space="preserve"> { … }</a:t>
-            </a:r>
-            <a:endParaRPr lang="en-US" sz="1400" dirty="0"/>
+              <a:t> { … }</a:t>
+            </a:r>
+            <a:endParaRPr lang="en-US" dirty="0"/>
           </a:p>
         </p:txBody>
       </p:sp>
@@ -22126,7 +22361,7 @@
                 <a:ea typeface="Arial" pitchFamily="34" charset="-122"/>
                 <a:cs typeface="Arial" pitchFamily="34" charset="-120"/>
               </a:rPr>
-              <a:t xml:space="preserve">The </a:t>
+              <a:t>The </a:t>
             </a:r>
             <a:r>
               <a:rPr lang="en-US" sz="2200" b="1" dirty="0">
@@ -22148,7 +22383,7 @@
                 <a:ea typeface="Arial" pitchFamily="34" charset="-122"/>
                 <a:cs typeface="Arial" pitchFamily="34" charset="-120"/>
               </a:rPr>
-              <a:t xml:space="preserve"> in CSS is global and order-dependent.</a:t>
+              <a:t> in CSS is global and order-dependent.</a:t>
             </a:r>
             <a:endParaRPr lang="en-US" sz="2200" dirty="0"/>
           </a:p>
@@ -22162,7 +22397,7 @@
         </p:nvSpPr>
         <p:spPr>
           <a:xfrm>
-            <a:off x="594360" y="2651760"/>
+            <a:off x="594360" y="2867714"/>
             <a:ext cx="3200400" cy="1554480"/>
           </a:xfrm>
           <a:prstGeom prst="roundRect">
@@ -22184,7 +22419,7 @@
           <a:bodyPr/>
           <a:lstStyle/>
           <a:p>
-            <a:endParaRPr lang="en-US"/>
+            <a:endParaRPr lang="en-US" sz="2800"/>
           </a:p>
         </p:txBody>
       </p:sp>
@@ -22196,7 +22431,7 @@
         </p:nvSpPr>
         <p:spPr>
           <a:xfrm>
-            <a:off x="822960" y="2834640"/>
+            <a:off x="822960" y="3050594"/>
             <a:ext cx="2743200" cy="365760"/>
           </a:xfrm>
           <a:prstGeom prst="rect">
@@ -22213,7 +22448,7 @@
               <a:buNone/>
             </a:pPr>
             <a:r>
-              <a:rPr lang="en-US" sz="1300" b="1" dirty="0">
+              <a:rPr lang="en-US" b="1" dirty="0">
                 <a:solidFill>
                   <a:srgbClr val="75DFBC"/>
                 </a:solidFill>
@@ -22223,7 +22458,7 @@
               </a:rPr>
               <a:t>reset.css</a:t>
             </a:r>
-            <a:endParaRPr lang="en-US" sz="1300" dirty="0"/>
+            <a:endParaRPr lang="en-US" dirty="0"/>
           </a:p>
         </p:txBody>
       </p:sp>
@@ -22235,7 +22470,7 @@
         </p:nvSpPr>
         <p:spPr>
           <a:xfrm>
-            <a:off x="822960" y="3337560"/>
+            <a:off x="822960" y="3553514"/>
             <a:ext cx="2743200" cy="731520"/>
           </a:xfrm>
           <a:prstGeom prst="rect">
@@ -22255,7 +22490,7 @@
               <a:buNone/>
             </a:pPr>
             <a:r>
-              <a:rPr lang="en-US" sz="1200" dirty="0">
+              <a:rPr lang="en-US" dirty="0">
                 <a:solidFill>
                   <a:srgbClr val="A6A6A6"/>
                 </a:solidFill>
@@ -22265,7 +22500,7 @@
               </a:rPr>
               <a:t>* { margin: 0 }</a:t>
             </a:r>
-            <a:endParaRPr lang="en-US" sz="1200" dirty="0"/>
+            <a:endParaRPr lang="en-US" dirty="0"/>
           </a:p>
         </p:txBody>
       </p:sp>
@@ -22277,7 +22512,7 @@
         </p:nvSpPr>
         <p:spPr>
           <a:xfrm>
-            <a:off x="3813048" y="3154680"/>
+            <a:off x="3813048" y="3370634"/>
             <a:ext cx="420624" cy="457200"/>
           </a:xfrm>
           <a:prstGeom prst="rect">
@@ -22294,7 +22529,7 @@
               <a:buNone/>
             </a:pPr>
             <a:r>
-              <a:rPr lang="en-US" sz="2600" b="1" dirty="0">
+              <a:rPr lang="en-US" sz="3600" b="1" dirty="0">
                 <a:solidFill>
                   <a:srgbClr val="6E6E6E"/>
                 </a:solidFill>
@@ -22304,7 +22539,7 @@
               </a:rPr>
               <a:t>→</a:t>
             </a:r>
-            <a:endParaRPr lang="en-US" sz="2600" dirty="0"/>
+            <a:endParaRPr lang="en-US" sz="3600" dirty="0"/>
           </a:p>
         </p:txBody>
       </p:sp>
@@ -22316,7 +22551,7 @@
         </p:nvSpPr>
         <p:spPr>
           <a:xfrm>
-            <a:off x="4251960" y="2651760"/>
+            <a:off x="4251960" y="2867714"/>
             <a:ext cx="3200400" cy="1554480"/>
           </a:xfrm>
           <a:prstGeom prst="roundRect">
@@ -22338,7 +22573,7 @@
           <a:bodyPr/>
           <a:lstStyle/>
           <a:p>
-            <a:endParaRPr lang="en-US"/>
+            <a:endParaRPr lang="en-US" sz="2800"/>
           </a:p>
         </p:txBody>
       </p:sp>
@@ -22350,7 +22585,7 @@
         </p:nvSpPr>
         <p:spPr>
           <a:xfrm>
-            <a:off x="4480560" y="2834640"/>
+            <a:off x="4480560" y="3050594"/>
             <a:ext cx="2743200" cy="365760"/>
           </a:xfrm>
           <a:prstGeom prst="rect">
@@ -22367,7 +22602,7 @@
               <a:buNone/>
             </a:pPr>
             <a:r>
-              <a:rPr lang="en-US" sz="1300" b="1" dirty="0">
+              <a:rPr lang="en-US" b="1" dirty="0">
                 <a:solidFill>
                   <a:srgbClr val="F1CF25"/>
                 </a:solidFill>
@@ -22377,7 +22612,7 @@
               </a:rPr>
               <a:t>buttons.css</a:t>
             </a:r>
-            <a:endParaRPr lang="en-US" sz="1300" dirty="0"/>
+            <a:endParaRPr lang="en-US" dirty="0"/>
           </a:p>
         </p:txBody>
       </p:sp>
@@ -22389,7 +22624,7 @@
         </p:nvSpPr>
         <p:spPr>
           <a:xfrm>
-            <a:off x="4480560" y="3337560"/>
+            <a:off x="4480560" y="3553514"/>
             <a:ext cx="2743200" cy="731520"/>
           </a:xfrm>
           <a:prstGeom prst="rect">
@@ -22409,7 +22644,7 @@
               <a:buNone/>
             </a:pPr>
             <a:r>
-              <a:rPr lang="en-US" sz="1200" dirty="0">
+              <a:rPr lang="en-US" dirty="0">
                 <a:solidFill>
                   <a:srgbClr val="A6A6A6"/>
                 </a:solidFill>
@@ -22419,7 +22654,7 @@
               </a:rPr>
               <a:t>button { padding: 8px }</a:t>
             </a:r>
-            <a:endParaRPr lang="en-US" sz="1200" dirty="0"/>
+            <a:endParaRPr lang="en-US" dirty="0"/>
           </a:p>
         </p:txBody>
       </p:sp>
@@ -22431,7 +22666,7 @@
         </p:nvSpPr>
         <p:spPr>
           <a:xfrm>
-            <a:off x="7470648" y="3154680"/>
+            <a:off x="7470648" y="3370634"/>
             <a:ext cx="420624" cy="457200"/>
           </a:xfrm>
           <a:prstGeom prst="rect">
@@ -22448,7 +22683,7 @@
               <a:buNone/>
             </a:pPr>
             <a:r>
-              <a:rPr lang="en-US" sz="2600" b="1" dirty="0">
+              <a:rPr lang="en-US" sz="3600" b="1" dirty="0">
                 <a:solidFill>
                   <a:srgbClr val="6E6E6E"/>
                 </a:solidFill>
@@ -22458,7 +22693,7 @@
               </a:rPr>
               <a:t>→</a:t>
             </a:r>
-            <a:endParaRPr lang="en-US" sz="2600" dirty="0"/>
+            <a:endParaRPr lang="en-US" sz="3600" dirty="0"/>
           </a:p>
         </p:txBody>
       </p:sp>
@@ -22470,7 +22705,7 @@
         </p:nvSpPr>
         <p:spPr>
           <a:xfrm>
-            <a:off x="7909560" y="2651760"/>
+            <a:off x="7909560" y="2867714"/>
             <a:ext cx="3200400" cy="1554480"/>
           </a:xfrm>
           <a:prstGeom prst="roundRect">
@@ -22492,7 +22727,7 @@
           <a:bodyPr/>
           <a:lstStyle/>
           <a:p>
-            <a:endParaRPr lang="en-US"/>
+            <a:endParaRPr lang="en-US" sz="2800"/>
           </a:p>
         </p:txBody>
       </p:sp>
@@ -22504,7 +22739,7 @@
         </p:nvSpPr>
         <p:spPr>
           <a:xfrm>
-            <a:off x="8138160" y="2834640"/>
+            <a:off x="8138160" y="3050594"/>
             <a:ext cx="2743200" cy="365760"/>
           </a:xfrm>
           <a:prstGeom prst="rect">
@@ -22521,7 +22756,7 @@
               <a:buNone/>
             </a:pPr>
             <a:r>
-              <a:rPr lang="en-US" sz="1300" b="1" dirty="0">
+              <a:rPr lang="en-US" b="1" dirty="0">
                 <a:solidFill>
                   <a:srgbClr val="FF6A4C"/>
                 </a:solidFill>
@@ -22531,7 +22766,7 @@
               </a:rPr>
               <a:t>card.css</a:t>
             </a:r>
-            <a:endParaRPr lang="en-US" sz="1300" dirty="0"/>
+            <a:endParaRPr lang="en-US" dirty="0"/>
           </a:p>
         </p:txBody>
       </p:sp>
@@ -22543,7 +22778,7 @@
         </p:nvSpPr>
         <p:spPr>
           <a:xfrm>
-            <a:off x="8138160" y="3337560"/>
+            <a:off x="8138160" y="3553514"/>
             <a:ext cx="2743200" cy="731520"/>
           </a:xfrm>
           <a:prstGeom prst="rect">
@@ -22563,7 +22798,7 @@
               <a:buNone/>
             </a:pPr>
             <a:r>
-              <a:rPr lang="en-US" sz="1200" dirty="0">
+              <a:rPr lang="en-US" dirty="0">
                 <a:solidFill>
                   <a:srgbClr val="A6A6A6"/>
                 </a:solidFill>
@@ -22573,7 +22808,7 @@
               </a:rPr>
               <a:t>…relies on both 👆</a:t>
             </a:r>
-            <a:endParaRPr lang="en-US" sz="1200" dirty="0"/>
+            <a:endParaRPr lang="en-US" dirty="0"/>
           </a:p>
         </p:txBody>
       </p:sp>
@@ -22585,7 +22820,7 @@
         </p:nvSpPr>
         <p:spPr>
           <a:xfrm>
-            <a:off x="594360" y="4617720"/>
+            <a:off x="594512" y="5047488"/>
             <a:ext cx="11002975" cy="731520"/>
           </a:xfrm>
           <a:prstGeom prst="rect">
@@ -23313,4 +23548,10 @@
     </a:ext>
   </a:extLst>
 </a:theme>
+</file>
+
+<file path=docMetadata/LabelInfo.xml><?xml version="1.0" encoding="utf-8"?>
+<clbl:labelList xmlns:clbl="http://schemas.microsoft.com/office/2020/mipLabelMetadata">
+  <clbl:label id="{48141450-2387-4aca-b41f-19cd6be9dd3c}" enabled="1" method="Standard" siteId="{adf10e2b-b6e9-41d6-be2f-c12bb566019c}" contentBits="0" removed="0"/>
+</clbl:labelList>
 </file>